--- a/context/FRD-to-STTM-Agent-Data-Governance-Architecture.pptx
+++ b/context/FRD-to-STTM-Agent-Data-Governance-Architecture.pptx
@@ -3088,9 +3088,135 @@
         <p:nvPr/>
       </p:nvGrpSpPr>
       <p:grpSpPr/>
+      <p:sp>
+        <p:nvSpPr>
+          <p:cNvPr id="2" name="Rectangle 1"/>
+          <p:cNvSpPr/>
+          <p:nvPr/>
+        </p:nvSpPr>
+        <p:spPr>
+          <a:xfrm>
+            <a:off x="0" y="0"/>
+            <a:ext cx="12191695" cy="6858000"/>
+          </a:xfrm>
+          <a:prstGeom prst="rect">
+            <a:avLst/>
+          </a:prstGeom>
+          <a:solidFill>
+            <a:srgbClr val="FFFFFF"/>
+          </a:solidFill>
+          <a:ln>
+            <a:noFill/>
+          </a:ln>
+          <a:effectLst/>
+        </p:spPr>
+        <p:style>
+          <a:lnRef idx="1">
+            <a:schemeClr val="accent1"/>
+          </a:lnRef>
+          <a:fillRef idx="3">
+            <a:schemeClr val="accent1"/>
+          </a:fillRef>
+          <a:effectRef idx="2">
+            <a:schemeClr val="accent1"/>
+          </a:effectRef>
+          <a:fontRef idx="minor">
+            <a:schemeClr val="lt1"/>
+          </a:fontRef>
+        </p:style>
+        <p:txBody>
+          <a:bodyPr rtlCol="0" anchor="ctr"/>
+          <a:lstStyle/>
+          <a:p/>
+        </p:txBody>
+      </p:sp>
+      <p:sp>
+        <p:nvSpPr>
+          <p:cNvPr id="3" name="Rectangle 2"/>
+          <p:cNvSpPr/>
+          <p:nvPr/>
+        </p:nvSpPr>
+        <p:spPr>
+          <a:xfrm>
+            <a:off x="0" y="0"/>
+            <a:ext cx="12191695" cy="182880"/>
+          </a:xfrm>
+          <a:prstGeom prst="rect">
+            <a:avLst/>
+          </a:prstGeom>
+          <a:solidFill>
+            <a:srgbClr val="0A2458"/>
+          </a:solidFill>
+          <a:ln>
+            <a:noFill/>
+          </a:ln>
+          <a:effectLst/>
+        </p:spPr>
+        <p:style>
+          <a:lnRef idx="1">
+            <a:schemeClr val="accent1"/>
+          </a:lnRef>
+          <a:fillRef idx="3">
+            <a:schemeClr val="accent1"/>
+          </a:fillRef>
+          <a:effectRef idx="2">
+            <a:schemeClr val="accent1"/>
+          </a:effectRef>
+          <a:fontRef idx="minor">
+            <a:schemeClr val="lt1"/>
+          </a:fontRef>
+        </p:style>
+        <p:txBody>
+          <a:bodyPr rtlCol="0" anchor="ctr"/>
+          <a:lstStyle/>
+          <a:p/>
+        </p:txBody>
+      </p:sp>
+      <p:sp>
+        <p:nvSpPr>
+          <p:cNvPr id="4" name="Rectangle 3"/>
+          <p:cNvSpPr/>
+          <p:nvPr/>
+        </p:nvSpPr>
+        <p:spPr>
+          <a:xfrm>
+            <a:off x="0" y="0"/>
+            <a:ext cx="91440" cy="6858000"/>
+          </a:xfrm>
+          <a:prstGeom prst="rect">
+            <a:avLst/>
+          </a:prstGeom>
+          <a:solidFill>
+            <a:srgbClr val="003DA5"/>
+          </a:solidFill>
+          <a:ln>
+            <a:noFill/>
+          </a:ln>
+          <a:effectLst/>
+        </p:spPr>
+        <p:style>
+          <a:lnRef idx="1">
+            <a:schemeClr val="accent1"/>
+          </a:lnRef>
+          <a:fillRef idx="3">
+            <a:schemeClr val="accent1"/>
+          </a:fillRef>
+          <a:effectRef idx="2">
+            <a:schemeClr val="accent1"/>
+          </a:effectRef>
+          <a:fontRef idx="minor">
+            <a:schemeClr val="lt1"/>
+          </a:fontRef>
+        </p:style>
+        <p:txBody>
+          <a:bodyPr rtlCol="0" anchor="ctr"/>
+          <a:lstStyle/>
+          <a:p/>
+        </p:txBody>
+      </p:sp>
       <p:pic>
         <p:nvPicPr>
-          <p:cNvPr id="2" name="Picture 1" descr="background.png"/>
+          <p:cNvPr id="5" name="Picture 4" descr="acfc.png"/>
           <p:cNvPicPr>
             <a:picLocks noChangeAspect="1"/>
           </p:cNvPicPr>
@@ -3104,8 +3230,8 @@
         </p:blipFill>
         <p:spPr>
           <a:xfrm>
-            <a:off x="0" y="0"/>
-            <a:ext cx="12191695" cy="6858000"/>
+            <a:off x="658368" y="310896"/>
+            <a:ext cx="1188720" cy="784171"/>
           </a:xfrm>
           <a:prstGeom prst="rect">
             <a:avLst/>
@@ -3114,22 +3240,3552 @@
       </p:pic>
       <p:cxnSp>
         <p:nvCxnSpPr>
-          <p:cNvPr id="3" name="Connector 2"/>
+          <p:cNvPr id="6" name="Connector 5"/>
           <p:cNvCxnSpPr/>
           <p:nvPr/>
         </p:nvCxnSpPr>
         <p:spPr>
           <a:xfrm>
-            <a:off x="210311" y="274320"/>
-            <a:ext cx="128017" cy="0"/>
+            <a:off x="2048256" y="347472"/>
+            <a:ext cx="0" cy="804672"/>
           </a:xfrm>
           <a:prstGeom prst="line">
             <a:avLst/>
           </a:prstGeom>
-          <a:ln w="6350">
+          <a:ln w="12700">
             <a:solidFill>
-              <a:srgbClr val="C5CBD3"/>
+              <a:srgbClr val="CDD2D8"/>
             </a:solidFill>
+          </a:ln>
+        </p:spPr>
+        <p:style>
+          <a:lnRef idx="2">
+            <a:schemeClr val="accent1"/>
+          </a:lnRef>
+          <a:fillRef idx="0">
+            <a:schemeClr val="accent1"/>
+          </a:fillRef>
+          <a:effectRef idx="1">
+            <a:schemeClr val="accent1"/>
+          </a:effectRef>
+          <a:fontRef idx="minor">
+            <a:schemeClr val="tx1"/>
+          </a:fontRef>
+        </p:style>
+      </p:cxnSp>
+      <p:sp>
+        <p:nvSpPr>
+          <p:cNvPr id="7" name="TextBox 6"/>
+          <p:cNvSpPr txBox="1"/>
+          <p:nvPr/>
+        </p:nvSpPr>
+        <p:spPr>
+          <a:xfrm>
+            <a:off x="2231136" y="347472"/>
+            <a:ext cx="7680960" cy="219456"/>
+          </a:xfrm>
+          <a:prstGeom prst="rect">
+            <a:avLst/>
+          </a:prstGeom>
+          <a:noFill/>
+        </p:spPr>
+        <p:txBody>
+          <a:bodyPr wrap="square" lIns="0" rIns="0" tIns="0" bIns="0" anchor="t">
+            <a:spAutoFit/>
+          </a:bodyPr>
+          <a:lstStyle/>
+          <a:p>
+            <a:pPr algn="l"/>
+            <a:r>
+              <a:rPr sz="900" b="1" spc="140">
+                <a:solidFill>
+                  <a:srgbClr val="003DA5"/>
+                </a:solidFill>
+                <a:latin typeface="Segoe UI"/>
+              </a:rPr>
+              <a:t>AMERIHEALTH CARITAS  ·  AI-IN-ENGINEERING  ·  AGENT 01 / 03</a:t>
+            </a:r>
+          </a:p>
+        </p:txBody>
+      </p:sp>
+      <p:sp>
+        <p:nvSpPr>
+          <p:cNvPr id="8" name="TextBox 7"/>
+          <p:cNvSpPr txBox="1"/>
+          <p:nvPr/>
+        </p:nvSpPr>
+        <p:spPr>
+          <a:xfrm>
+            <a:off x="2231136" y="548640"/>
+            <a:ext cx="8412480" cy="384048"/>
+          </a:xfrm>
+          <a:prstGeom prst="rect">
+            <a:avLst/>
+          </a:prstGeom>
+          <a:noFill/>
+        </p:spPr>
+        <p:txBody>
+          <a:bodyPr wrap="square" lIns="0" rIns="0" tIns="0" bIns="0" anchor="t">
+            <a:spAutoFit/>
+          </a:bodyPr>
+          <a:lstStyle/>
+          <a:p>
+            <a:pPr algn="l"/>
+            <a:r>
+              <a:rPr sz="2400" b="1" spc="-40">
+                <a:solidFill>
+                  <a:srgbClr val="0A2458"/>
+                </a:solidFill>
+                <a:latin typeface="Segoe UI"/>
+              </a:rPr>
+              <a:t>FRD → STTM Agent</a:t>
+            </a:r>
+            <a:r>
+              <a:rPr sz="1300" b="0">
+                <a:solidFill>
+                  <a:srgbClr val="455560"/>
+                </a:solidFill>
+                <a:latin typeface="Segoe UI"/>
+              </a:rPr>
+              <a:t>    data governance architecture</a:t>
+            </a:r>
+          </a:p>
+        </p:txBody>
+      </p:sp>
+      <p:sp>
+        <p:nvSpPr>
+          <p:cNvPr id="9" name="Rectangle 8"/>
+          <p:cNvSpPr/>
+          <p:nvPr/>
+        </p:nvSpPr>
+        <p:spPr>
+          <a:xfrm>
+            <a:off x="2231136" y="932688"/>
+            <a:ext cx="1696212" cy="292608"/>
+          </a:xfrm>
+          <a:prstGeom prst="rect">
+            <a:avLst/>
+          </a:prstGeom>
+          <a:noFill/>
+          <a:ln w="12700">
+            <a:solidFill>
+              <a:srgbClr val="003DA5"/>
+            </a:solidFill>
+          </a:ln>
+          <a:effectLst/>
+        </p:spPr>
+        <p:style>
+          <a:lnRef idx="1">
+            <a:schemeClr val="accent1"/>
+          </a:lnRef>
+          <a:fillRef idx="3">
+            <a:schemeClr val="accent1"/>
+          </a:fillRef>
+          <a:effectRef idx="2">
+            <a:schemeClr val="accent1"/>
+          </a:effectRef>
+          <a:fontRef idx="minor">
+            <a:schemeClr val="lt1"/>
+          </a:fontRef>
+        </p:style>
+        <p:txBody>
+          <a:bodyPr rtlCol="0" anchor="ctr"/>
+          <a:lstStyle/>
+          <a:p/>
+        </p:txBody>
+      </p:sp>
+      <p:sp>
+        <p:nvSpPr>
+          <p:cNvPr id="10" name="TextBox 9"/>
+          <p:cNvSpPr txBox="1"/>
+          <p:nvPr/>
+        </p:nvSpPr>
+        <p:spPr>
+          <a:xfrm>
+            <a:off x="2231136" y="1001268"/>
+            <a:ext cx="1696212" cy="182880"/>
+          </a:xfrm>
+          <a:prstGeom prst="rect">
+            <a:avLst/>
+          </a:prstGeom>
+          <a:noFill/>
+        </p:spPr>
+        <p:txBody>
+          <a:bodyPr wrap="square" lIns="0" rIns="0" tIns="0" bIns="0" anchor="t">
+            <a:spAutoFit/>
+          </a:bodyPr>
+          <a:lstStyle/>
+          <a:p>
+            <a:pPr algn="ctr"/>
+            <a:r>
+              <a:rPr sz="800" b="1" spc="80">
+                <a:solidFill>
+                  <a:srgbClr val="003DA5"/>
+                </a:solidFill>
+                <a:latin typeface="Segoe UI"/>
+              </a:rPr>
+              <a:t>CLASSIFIED DATA</a:t>
+            </a:r>
+          </a:p>
+        </p:txBody>
+      </p:sp>
+      <p:sp>
+        <p:nvSpPr>
+          <p:cNvPr id="11" name="Rectangle 10"/>
+          <p:cNvSpPr/>
+          <p:nvPr/>
+        </p:nvSpPr>
+        <p:spPr>
+          <a:xfrm>
+            <a:off x="4055363" y="932688"/>
+            <a:ext cx="1441094" cy="292608"/>
+          </a:xfrm>
+          <a:prstGeom prst="rect">
+            <a:avLst/>
+          </a:prstGeom>
+          <a:noFill/>
+          <a:ln w="12700">
+            <a:solidFill>
+              <a:srgbClr val="0A2458"/>
+            </a:solidFill>
+          </a:ln>
+          <a:effectLst/>
+        </p:spPr>
+        <p:style>
+          <a:lnRef idx="1">
+            <a:schemeClr val="accent1"/>
+          </a:lnRef>
+          <a:fillRef idx="3">
+            <a:schemeClr val="accent1"/>
+          </a:fillRef>
+          <a:effectRef idx="2">
+            <a:schemeClr val="accent1"/>
+          </a:effectRef>
+          <a:fontRef idx="minor">
+            <a:schemeClr val="lt1"/>
+          </a:fontRef>
+        </p:style>
+        <p:txBody>
+          <a:bodyPr rtlCol="0" anchor="ctr"/>
+          <a:lstStyle/>
+          <a:p/>
+        </p:txBody>
+      </p:sp>
+      <p:sp>
+        <p:nvSpPr>
+          <p:cNvPr id="12" name="TextBox 11"/>
+          <p:cNvSpPr txBox="1"/>
+          <p:nvPr/>
+        </p:nvSpPr>
+        <p:spPr>
+          <a:xfrm>
+            <a:off x="4055363" y="1001268"/>
+            <a:ext cx="1441094" cy="182880"/>
+          </a:xfrm>
+          <a:prstGeom prst="rect">
+            <a:avLst/>
+          </a:prstGeom>
+          <a:noFill/>
+        </p:spPr>
+        <p:txBody>
+          <a:bodyPr wrap="square" lIns="0" rIns="0" tIns="0" bIns="0" anchor="t">
+            <a:spAutoFit/>
+          </a:bodyPr>
+          <a:lstStyle/>
+          <a:p>
+            <a:pPr algn="ctr"/>
+            <a:r>
+              <a:rPr sz="800" b="1" spc="80">
+                <a:solidFill>
+                  <a:srgbClr val="0A2458"/>
+                </a:solidFill>
+                <a:latin typeface="Segoe UI"/>
+              </a:rPr>
+              <a:t>NAMED PEOPLE</a:t>
+            </a:r>
+          </a:p>
+        </p:txBody>
+      </p:sp>
+      <p:sp>
+        <p:nvSpPr>
+          <p:cNvPr id="13" name="Rectangle 12"/>
+          <p:cNvSpPr/>
+          <p:nvPr/>
+        </p:nvSpPr>
+        <p:spPr>
+          <a:xfrm>
+            <a:off x="5624474" y="932688"/>
+            <a:ext cx="1866290" cy="292608"/>
+          </a:xfrm>
+          <a:prstGeom prst="rect">
+            <a:avLst/>
+          </a:prstGeom>
+          <a:noFill/>
+          <a:ln w="12700">
+            <a:solidFill>
+              <a:srgbClr val="003DA5"/>
+            </a:solidFill>
+          </a:ln>
+          <a:effectLst/>
+        </p:spPr>
+        <p:style>
+          <a:lnRef idx="1">
+            <a:schemeClr val="accent1"/>
+          </a:lnRef>
+          <a:fillRef idx="3">
+            <a:schemeClr val="accent1"/>
+          </a:fillRef>
+          <a:effectRef idx="2">
+            <a:schemeClr val="accent1"/>
+          </a:effectRef>
+          <a:fontRef idx="minor">
+            <a:schemeClr val="lt1"/>
+          </a:fontRef>
+        </p:style>
+        <p:txBody>
+          <a:bodyPr rtlCol="0" anchor="ctr"/>
+          <a:lstStyle/>
+          <a:p/>
+        </p:txBody>
+      </p:sp>
+      <p:sp>
+        <p:nvSpPr>
+          <p:cNvPr id="14" name="TextBox 13"/>
+          <p:cNvSpPr txBox="1"/>
+          <p:nvPr/>
+        </p:nvSpPr>
+        <p:spPr>
+          <a:xfrm>
+            <a:off x="5624474" y="1001268"/>
+            <a:ext cx="1866290" cy="182880"/>
+          </a:xfrm>
+          <a:prstGeom prst="rect">
+            <a:avLst/>
+          </a:prstGeom>
+          <a:noFill/>
+        </p:spPr>
+        <p:txBody>
+          <a:bodyPr wrap="square" lIns="0" rIns="0" tIns="0" bIns="0" anchor="t">
+            <a:spAutoFit/>
+          </a:bodyPr>
+          <a:lstStyle/>
+          <a:p>
+            <a:pPr algn="ctr"/>
+            <a:r>
+              <a:rPr sz="800" b="1" spc="80">
+                <a:solidFill>
+                  <a:srgbClr val="003DA5"/>
+                </a:solidFill>
+                <a:latin typeface="Segoe UI"/>
+              </a:rPr>
+              <a:t>TRACEABLE OUTPUTS</a:t>
+            </a:r>
+          </a:p>
+        </p:txBody>
+      </p:sp>
+      <p:sp>
+        <p:nvSpPr>
+          <p:cNvPr id="15" name="Rectangle 14"/>
+          <p:cNvSpPr/>
+          <p:nvPr/>
+        </p:nvSpPr>
+        <p:spPr>
+          <a:xfrm>
+            <a:off x="7618780" y="932688"/>
+            <a:ext cx="1781251" cy="292608"/>
+          </a:xfrm>
+          <a:prstGeom prst="rect">
+            <a:avLst/>
+          </a:prstGeom>
+          <a:noFill/>
+          <a:ln w="12700">
+            <a:solidFill>
+              <a:srgbClr val="0A2458"/>
+            </a:solidFill>
+          </a:ln>
+          <a:effectLst/>
+        </p:spPr>
+        <p:style>
+          <a:lnRef idx="1">
+            <a:schemeClr val="accent1"/>
+          </a:lnRef>
+          <a:fillRef idx="3">
+            <a:schemeClr val="accent1"/>
+          </a:fillRef>
+          <a:effectRef idx="2">
+            <a:schemeClr val="accent1"/>
+          </a:effectRef>
+          <a:fontRef idx="minor">
+            <a:schemeClr val="lt1"/>
+          </a:fontRef>
+        </p:style>
+        <p:txBody>
+          <a:bodyPr rtlCol="0" anchor="ctr"/>
+          <a:lstStyle/>
+          <a:p/>
+        </p:txBody>
+      </p:sp>
+      <p:sp>
+        <p:nvSpPr>
+          <p:cNvPr id="16" name="TextBox 15"/>
+          <p:cNvSpPr txBox="1"/>
+          <p:nvPr/>
+        </p:nvSpPr>
+        <p:spPr>
+          <a:xfrm>
+            <a:off x="7618780" y="1001268"/>
+            <a:ext cx="1781251" cy="182880"/>
+          </a:xfrm>
+          <a:prstGeom prst="rect">
+            <a:avLst/>
+          </a:prstGeom>
+          <a:noFill/>
+        </p:spPr>
+        <p:txBody>
+          <a:bodyPr wrap="square" lIns="0" rIns="0" tIns="0" bIns="0" anchor="t">
+            <a:spAutoFit/>
+          </a:bodyPr>
+          <a:lstStyle/>
+          <a:p>
+            <a:pPr algn="ctr"/>
+            <a:r>
+              <a:rPr sz="800" b="1" spc="80">
+                <a:solidFill>
+                  <a:srgbClr val="0A2458"/>
+                </a:solidFill>
+                <a:latin typeface="Segoe UI"/>
+              </a:rPr>
+              <a:t>A PERSON DECIDES</a:t>
+            </a:r>
+          </a:p>
+        </p:txBody>
+      </p:sp>
+      <p:sp>
+        <p:nvSpPr>
+          <p:cNvPr id="17" name="TextBox 16"/>
+          <p:cNvSpPr txBox="1"/>
+          <p:nvPr/>
+        </p:nvSpPr>
+        <p:spPr>
+          <a:xfrm>
+            <a:off x="9247327" y="384048"/>
+            <a:ext cx="2286000" cy="475488"/>
+          </a:xfrm>
+          <a:prstGeom prst="rect">
+            <a:avLst/>
+          </a:prstGeom>
+          <a:noFill/>
+        </p:spPr>
+        <p:txBody>
+          <a:bodyPr wrap="square" lIns="0" rIns="0" tIns="0" bIns="0" anchor="t">
+            <a:spAutoFit/>
+          </a:bodyPr>
+          <a:lstStyle/>
+          <a:p>
+            <a:pPr algn="r">
+              <a:lnSpc>
+                <a:spcPct val="118000"/>
+              </a:lnSpc>
+            </a:pPr>
+            <a:r>
+              <a:rPr sz="819" b="1">
+                <a:solidFill>
+                  <a:srgbClr val="0A2458"/>
+                </a:solidFill>
+                <a:latin typeface="Segoe UI"/>
+              </a:rPr>
+              <a:t>Built by Hexaware</a:t>
+            </a:r>
+          </a:p>
+          <a:p>
+            <a:pPr algn="r">
+              <a:lnSpc>
+                <a:spcPct val="118000"/>
+              </a:lnSpc>
+            </a:pPr>
+            <a:r>
+              <a:rPr sz="819" b="0">
+                <a:solidFill>
+                  <a:srgbClr val="455560"/>
+                </a:solidFill>
+                <a:latin typeface="Segoe UI"/>
+              </a:rPr>
+              <a:t>rebuilt inside the ACFC environment</a:t>
+            </a:r>
+          </a:p>
+        </p:txBody>
+      </p:sp>
+      <p:sp>
+        <p:nvSpPr>
+          <p:cNvPr id="18" name="TextBox 17"/>
+          <p:cNvSpPr txBox="1"/>
+          <p:nvPr/>
+        </p:nvSpPr>
+        <p:spPr>
+          <a:xfrm>
+            <a:off x="658368" y="1389888"/>
+            <a:ext cx="5486400" cy="201168"/>
+          </a:xfrm>
+          <a:prstGeom prst="rect">
+            <a:avLst/>
+          </a:prstGeom>
+          <a:noFill/>
+        </p:spPr>
+        <p:txBody>
+          <a:bodyPr wrap="square" lIns="0" rIns="0" tIns="0" bIns="0" anchor="t">
+            <a:spAutoFit/>
+          </a:bodyPr>
+          <a:lstStyle/>
+          <a:p>
+            <a:pPr algn="l"/>
+            <a:r>
+              <a:rPr sz="850" b="1" spc="140">
+                <a:solidFill>
+                  <a:srgbClr val="455560"/>
+                </a:solidFill>
+                <a:latin typeface="Segoe UI"/>
+              </a:rPr>
+              <a:t>THE DOCUMENT'S JOURNEY  →</a:t>
+            </a:r>
+          </a:p>
+        </p:txBody>
+      </p:sp>
+      <p:sp>
+        <p:nvSpPr>
+          <p:cNvPr id="19" name="Rectangle 18"/>
+          <p:cNvSpPr/>
+          <p:nvPr/>
+        </p:nvSpPr>
+        <p:spPr>
+          <a:xfrm>
+            <a:off x="658368" y="1627632"/>
+            <a:ext cx="1818055" cy="2615184"/>
+          </a:xfrm>
+          <a:prstGeom prst="rect">
+            <a:avLst/>
+          </a:prstGeom>
+          <a:solidFill>
+            <a:srgbClr val="F0F0F0"/>
+          </a:solidFill>
+          <a:ln w="12700">
+            <a:solidFill>
+              <a:srgbClr val="003DA5"/>
+            </a:solidFill>
+          </a:ln>
+          <a:effectLst/>
+        </p:spPr>
+        <p:style>
+          <a:lnRef idx="1">
+            <a:schemeClr val="accent1"/>
+          </a:lnRef>
+          <a:fillRef idx="3">
+            <a:schemeClr val="accent1"/>
+          </a:fillRef>
+          <a:effectRef idx="2">
+            <a:schemeClr val="accent1"/>
+          </a:effectRef>
+          <a:fontRef idx="minor">
+            <a:schemeClr val="lt1"/>
+          </a:fontRef>
+        </p:style>
+        <p:txBody>
+          <a:bodyPr rtlCol="0" anchor="ctr"/>
+          <a:lstStyle/>
+          <a:p/>
+        </p:txBody>
+      </p:sp>
+      <p:sp>
+        <p:nvSpPr>
+          <p:cNvPr id="20" name="Rectangle 19"/>
+          <p:cNvSpPr/>
+          <p:nvPr/>
+        </p:nvSpPr>
+        <p:spPr>
+          <a:xfrm>
+            <a:off x="658368" y="1627632"/>
+            <a:ext cx="1818055" cy="45720"/>
+          </a:xfrm>
+          <a:prstGeom prst="rect">
+            <a:avLst/>
+          </a:prstGeom>
+          <a:solidFill>
+            <a:srgbClr val="003DA5"/>
+          </a:solidFill>
+          <a:ln>
+            <a:noFill/>
+          </a:ln>
+          <a:effectLst/>
+        </p:spPr>
+        <p:style>
+          <a:lnRef idx="1">
+            <a:schemeClr val="accent1"/>
+          </a:lnRef>
+          <a:fillRef idx="3">
+            <a:schemeClr val="accent1"/>
+          </a:fillRef>
+          <a:effectRef idx="2">
+            <a:schemeClr val="accent1"/>
+          </a:effectRef>
+          <a:fontRef idx="minor">
+            <a:schemeClr val="lt1"/>
+          </a:fontRef>
+        </p:style>
+        <p:txBody>
+          <a:bodyPr rtlCol="0" anchor="ctr"/>
+          <a:lstStyle/>
+          <a:p/>
+        </p:txBody>
+      </p:sp>
+      <p:sp>
+        <p:nvSpPr>
+          <p:cNvPr id="21" name="TextBox 20"/>
+          <p:cNvSpPr txBox="1"/>
+          <p:nvPr/>
+        </p:nvSpPr>
+        <p:spPr>
+          <a:xfrm>
+            <a:off x="804672" y="1773936"/>
+            <a:ext cx="1525447" cy="182880"/>
+          </a:xfrm>
+          <a:prstGeom prst="rect">
+            <a:avLst/>
+          </a:prstGeom>
+          <a:noFill/>
+        </p:spPr>
+        <p:txBody>
+          <a:bodyPr wrap="square" lIns="0" rIns="0" tIns="0" bIns="0" anchor="t">
+            <a:spAutoFit/>
+          </a:bodyPr>
+          <a:lstStyle/>
+          <a:p>
+            <a:pPr algn="l"/>
+            <a:r>
+              <a:rPr sz="850" b="1" spc="90">
+                <a:solidFill>
+                  <a:srgbClr val="003DA5"/>
+                </a:solidFill>
+                <a:latin typeface="Consolas"/>
+              </a:rPr>
+              <a:t>01</a:t>
+            </a:r>
+            <a:r>
+              <a:rPr sz="850" b="1" spc="90">
+                <a:solidFill>
+                  <a:srgbClr val="003DA5"/>
+                </a:solidFill>
+                <a:latin typeface="Segoe UI"/>
+              </a:rPr>
+              <a:t>  ENTERS</a:t>
+            </a:r>
+          </a:p>
+        </p:txBody>
+      </p:sp>
+      <p:pic>
+        <p:nvPicPr>
+          <p:cNvPr id="22" name="Picture 21" descr="unitycatalog.png"/>
+          <p:cNvPicPr>
+            <a:picLocks noChangeAspect="1"/>
+          </p:cNvPicPr>
+          <p:nvPr/>
+        </p:nvPicPr>
+        <p:blipFill>
+          <a:blip r:embed="rId3"/>
+          <a:stretch>
+            <a:fillRect/>
+          </a:stretch>
+        </p:blipFill>
+        <p:spPr>
+          <a:xfrm>
+            <a:off x="823588" y="2011680"/>
+            <a:ext cx="748551" cy="256032"/>
+          </a:xfrm>
+          <a:prstGeom prst="rect">
+            <a:avLst/>
+          </a:prstGeom>
+        </p:spPr>
+      </p:pic>
+      <p:sp>
+        <p:nvSpPr>
+          <p:cNvPr id="23" name="TextBox 22"/>
+          <p:cNvSpPr txBox="1"/>
+          <p:nvPr/>
+        </p:nvSpPr>
+        <p:spPr>
+          <a:xfrm>
+            <a:off x="804672" y="2359152"/>
+            <a:ext cx="1525447" cy="182880"/>
+          </a:xfrm>
+          <a:prstGeom prst="rect">
+            <a:avLst/>
+          </a:prstGeom>
+          <a:noFill/>
+        </p:spPr>
+        <p:txBody>
+          <a:bodyPr wrap="square" lIns="0" rIns="0" tIns="0" bIns="0" anchor="t">
+            <a:spAutoFit/>
+          </a:bodyPr>
+          <a:lstStyle/>
+          <a:p>
+            <a:pPr algn="l"/>
+            <a:r>
+              <a:rPr sz="780" b="1" spc="100">
+                <a:solidFill>
+                  <a:srgbClr val="003DA5"/>
+                </a:solidFill>
+                <a:latin typeface="Segoe UI"/>
+              </a:rPr>
+              <a:t>WHAT DATA?</a:t>
+            </a:r>
+          </a:p>
+        </p:txBody>
+      </p:sp>
+      <p:sp>
+        <p:nvSpPr>
+          <p:cNvPr id="24" name="TextBox 23"/>
+          <p:cNvSpPr txBox="1"/>
+          <p:nvPr/>
+        </p:nvSpPr>
+        <p:spPr>
+          <a:xfrm>
+            <a:off x="804672" y="2542032"/>
+            <a:ext cx="1525447" cy="329184"/>
+          </a:xfrm>
+          <a:prstGeom prst="rect">
+            <a:avLst/>
+          </a:prstGeom>
+          <a:noFill/>
+        </p:spPr>
+        <p:txBody>
+          <a:bodyPr wrap="square" lIns="0" rIns="0" tIns="0" bIns="0" anchor="t">
+            <a:spAutoFit/>
+          </a:bodyPr>
+          <a:lstStyle/>
+          <a:p>
+            <a:pPr algn="l">
+              <a:lnSpc>
+                <a:spcPct val="105000"/>
+              </a:lnSpc>
+            </a:pPr>
+            <a:r>
+              <a:rPr sz="980" b="1" spc="-15">
+                <a:solidFill>
+                  <a:srgbClr val="0A2458"/>
+                </a:solidFill>
+                <a:latin typeface="Segoe UI"/>
+              </a:rPr>
+              <a:t>Classified at the door</a:t>
+            </a:r>
+          </a:p>
+        </p:txBody>
+      </p:sp>
+      <p:sp>
+        <p:nvSpPr>
+          <p:cNvPr id="25" name="TextBox 24"/>
+          <p:cNvSpPr txBox="1"/>
+          <p:nvPr/>
+        </p:nvSpPr>
+        <p:spPr>
+          <a:xfrm>
+            <a:off x="804672" y="2889504"/>
+            <a:ext cx="1525447" cy="1005839"/>
+          </a:xfrm>
+          <a:prstGeom prst="rect">
+            <a:avLst/>
+          </a:prstGeom>
+          <a:noFill/>
+        </p:spPr>
+        <p:txBody>
+          <a:bodyPr wrap="square" lIns="0" rIns="0" tIns="0" bIns="0" anchor="t">
+            <a:spAutoFit/>
+          </a:bodyPr>
+          <a:lstStyle/>
+          <a:p>
+            <a:pPr algn="l">
+              <a:lnSpc>
+                <a:spcPct val="108000"/>
+              </a:lnSpc>
+            </a:pPr>
+            <a:r>
+              <a:rPr sz="760" b="0">
+                <a:solidFill>
+                  <a:srgbClr val="333F48"/>
+                </a:solidFill>
+                <a:latin typeface="Segoe UI"/>
+              </a:rPr>
+              <a:t>Two documents per feed — the FRD and the vendor data dictionary — land in Unity Catalog, where every folder and table carries an owner, a steward, its sensitivity, its source and its retention rule. The standards are config in the agent, not a document.</a:t>
+            </a:r>
+          </a:p>
+        </p:txBody>
+      </p:sp>
+      <p:cxnSp>
+        <p:nvCxnSpPr>
+          <p:cNvPr id="26" name="Connector 25"/>
+          <p:cNvCxnSpPr/>
+          <p:nvPr/>
+        </p:nvCxnSpPr>
+        <p:spPr>
+          <a:xfrm>
+            <a:off x="804672" y="3913631"/>
+            <a:ext cx="1525447" cy="0"/>
+          </a:xfrm>
+          <a:prstGeom prst="line">
+            <a:avLst/>
+          </a:prstGeom>
+          <a:ln w="12700">
+            <a:solidFill>
+              <a:srgbClr val="CDD2D8"/>
+            </a:solidFill>
+          </a:ln>
+        </p:spPr>
+        <p:style>
+          <a:lnRef idx="2">
+            <a:schemeClr val="accent1"/>
+          </a:lnRef>
+          <a:fillRef idx="0">
+            <a:schemeClr val="accent1"/>
+          </a:fillRef>
+          <a:effectRef idx="1">
+            <a:schemeClr val="accent1"/>
+          </a:effectRef>
+          <a:fontRef idx="minor">
+            <a:schemeClr val="tx1"/>
+          </a:fontRef>
+        </p:style>
+      </p:cxnSp>
+      <p:sp>
+        <p:nvSpPr>
+          <p:cNvPr id="27" name="TextBox 26"/>
+          <p:cNvSpPr txBox="1"/>
+          <p:nvPr/>
+        </p:nvSpPr>
+        <p:spPr>
+          <a:xfrm>
+            <a:off x="804672" y="3968496"/>
+            <a:ext cx="1525447" cy="237744"/>
+          </a:xfrm>
+          <a:prstGeom prst="rect">
+            <a:avLst/>
+          </a:prstGeom>
+          <a:noFill/>
+        </p:spPr>
+        <p:txBody>
+          <a:bodyPr wrap="square" lIns="0" rIns="0" tIns="0" bIns="0" anchor="t">
+            <a:spAutoFit/>
+          </a:bodyPr>
+          <a:lstStyle/>
+          <a:p>
+            <a:pPr algn="l">
+              <a:lnSpc>
+                <a:spcPct val="108000"/>
+              </a:lnSpc>
+            </a:pPr>
+            <a:r>
+              <a:rPr sz="720" b="1">
+                <a:solidFill>
+                  <a:srgbClr val="003DA5"/>
+                </a:solidFill>
+                <a:latin typeface="Segoe UI"/>
+              </a:rPr>
+              <a:t>Unity Catalog tags &amp; comments</a:t>
+            </a:r>
+          </a:p>
+        </p:txBody>
+      </p:sp>
+      <p:cxnSp>
+        <p:nvCxnSpPr>
+          <p:cNvPr id="28" name="Connector 27"/>
+          <p:cNvCxnSpPr/>
+          <p:nvPr/>
+        </p:nvCxnSpPr>
+        <p:spPr>
+          <a:xfrm>
+            <a:off x="2494711" y="2935224"/>
+            <a:ext cx="201168" cy="0"/>
+          </a:xfrm>
+          <a:prstGeom prst="line">
+            <a:avLst/>
+          </a:prstGeom>
+          <a:ln w="19050">
+            <a:solidFill>
+              <a:srgbClr val="0A2458"/>
+            </a:solidFill>
+            <a:tailEnd type="triangle" w="med" len="med"/>
+          </a:ln>
+        </p:spPr>
+        <p:style>
+          <a:lnRef idx="2">
+            <a:schemeClr val="accent1"/>
+          </a:lnRef>
+          <a:fillRef idx="0">
+            <a:schemeClr val="accent1"/>
+          </a:fillRef>
+          <a:effectRef idx="1">
+            <a:schemeClr val="accent1"/>
+          </a:effectRef>
+          <a:fontRef idx="minor">
+            <a:schemeClr val="tx1"/>
+          </a:fontRef>
+        </p:style>
+      </p:cxnSp>
+      <p:sp>
+        <p:nvSpPr>
+          <p:cNvPr id="29" name="Rectangle 28"/>
+          <p:cNvSpPr/>
+          <p:nvPr/>
+        </p:nvSpPr>
+        <p:spPr>
+          <a:xfrm>
+            <a:off x="2714167" y="1627632"/>
+            <a:ext cx="1818055" cy="2615184"/>
+          </a:xfrm>
+          <a:prstGeom prst="rect">
+            <a:avLst/>
+          </a:prstGeom>
+          <a:solidFill>
+            <a:srgbClr val="F0F0F0"/>
+          </a:solidFill>
+          <a:ln w="12700">
+            <a:solidFill>
+              <a:srgbClr val="0A2458"/>
+            </a:solidFill>
+          </a:ln>
+          <a:effectLst/>
+        </p:spPr>
+        <p:style>
+          <a:lnRef idx="1">
+            <a:schemeClr val="accent1"/>
+          </a:lnRef>
+          <a:fillRef idx="3">
+            <a:schemeClr val="accent1"/>
+          </a:fillRef>
+          <a:effectRef idx="2">
+            <a:schemeClr val="accent1"/>
+          </a:effectRef>
+          <a:fontRef idx="minor">
+            <a:schemeClr val="lt1"/>
+          </a:fontRef>
+        </p:style>
+        <p:txBody>
+          <a:bodyPr rtlCol="0" anchor="ctr"/>
+          <a:lstStyle/>
+          <a:p/>
+        </p:txBody>
+      </p:sp>
+      <p:sp>
+        <p:nvSpPr>
+          <p:cNvPr id="30" name="Rectangle 29"/>
+          <p:cNvSpPr/>
+          <p:nvPr/>
+        </p:nvSpPr>
+        <p:spPr>
+          <a:xfrm>
+            <a:off x="2714167" y="1627632"/>
+            <a:ext cx="1818055" cy="45720"/>
+          </a:xfrm>
+          <a:prstGeom prst="rect">
+            <a:avLst/>
+          </a:prstGeom>
+          <a:solidFill>
+            <a:srgbClr val="0A2458"/>
+          </a:solidFill>
+          <a:ln>
+            <a:noFill/>
+          </a:ln>
+          <a:effectLst/>
+        </p:spPr>
+        <p:style>
+          <a:lnRef idx="1">
+            <a:schemeClr val="accent1"/>
+          </a:lnRef>
+          <a:fillRef idx="3">
+            <a:schemeClr val="accent1"/>
+          </a:fillRef>
+          <a:effectRef idx="2">
+            <a:schemeClr val="accent1"/>
+          </a:effectRef>
+          <a:fontRef idx="minor">
+            <a:schemeClr val="lt1"/>
+          </a:fontRef>
+        </p:style>
+        <p:txBody>
+          <a:bodyPr rtlCol="0" anchor="ctr"/>
+          <a:lstStyle/>
+          <a:p/>
+        </p:txBody>
+      </p:sp>
+      <p:sp>
+        <p:nvSpPr>
+          <p:cNvPr id="31" name="TextBox 30"/>
+          <p:cNvSpPr txBox="1"/>
+          <p:nvPr/>
+        </p:nvSpPr>
+        <p:spPr>
+          <a:xfrm>
+            <a:off x="2860471" y="1773936"/>
+            <a:ext cx="1525447" cy="182880"/>
+          </a:xfrm>
+          <a:prstGeom prst="rect">
+            <a:avLst/>
+          </a:prstGeom>
+          <a:noFill/>
+        </p:spPr>
+        <p:txBody>
+          <a:bodyPr wrap="square" lIns="0" rIns="0" tIns="0" bIns="0" anchor="t">
+            <a:spAutoFit/>
+          </a:bodyPr>
+          <a:lstStyle/>
+          <a:p>
+            <a:pPr algn="l"/>
+            <a:r>
+              <a:rPr sz="850" b="1" spc="90">
+                <a:solidFill>
+                  <a:srgbClr val="0A2458"/>
+                </a:solidFill>
+                <a:latin typeface="Consolas"/>
+              </a:rPr>
+              <a:t>02</a:t>
+            </a:r>
+            <a:r>
+              <a:rPr sz="850" b="1" spc="90">
+                <a:solidFill>
+                  <a:srgbClr val="0A2458"/>
+                </a:solidFill>
+                <a:latin typeface="Segoe UI"/>
+              </a:rPr>
+              <a:t>  OPENED</a:t>
+            </a:r>
+          </a:p>
+        </p:txBody>
+      </p:sp>
+      <p:pic>
+        <p:nvPicPr>
+          <p:cNvPr id="32" name="Picture 31" descr="entra.png"/>
+          <p:cNvPicPr>
+            <a:picLocks noChangeAspect="1"/>
+          </p:cNvPicPr>
+          <p:nvPr/>
+        </p:nvPicPr>
+        <p:blipFill>
+          <a:blip r:embed="rId4"/>
+          <a:stretch>
+            <a:fillRect/>
+          </a:stretch>
+        </p:blipFill>
+        <p:spPr>
+          <a:xfrm>
+            <a:off x="2860471" y="2017299"/>
+            <a:ext cx="274320" cy="244792"/>
+          </a:xfrm>
+          <a:prstGeom prst="rect">
+            <a:avLst/>
+          </a:prstGeom>
+        </p:spPr>
+      </p:pic>
+      <p:pic>
+        <p:nvPicPr>
+          <p:cNvPr id="33" name="Picture 32" descr="databricks.png"/>
+          <p:cNvPicPr>
+            <a:picLocks noChangeAspect="1"/>
+          </p:cNvPicPr>
+          <p:nvPr/>
+        </p:nvPicPr>
+        <p:blipFill>
+          <a:blip r:embed="rId5"/>
+          <a:stretch>
+            <a:fillRect/>
+          </a:stretch>
+        </p:blipFill>
+        <p:spPr>
+          <a:xfrm>
+            <a:off x="3409033" y="2011680"/>
+            <a:ext cx="457356" cy="256032"/>
+          </a:xfrm>
+          <a:prstGeom prst="rect">
+            <a:avLst/>
+          </a:prstGeom>
+        </p:spPr>
+      </p:pic>
+      <p:sp>
+        <p:nvSpPr>
+          <p:cNvPr id="34" name="TextBox 33"/>
+          <p:cNvSpPr txBox="1"/>
+          <p:nvPr/>
+        </p:nvSpPr>
+        <p:spPr>
+          <a:xfrm>
+            <a:off x="2860471" y="2359152"/>
+            <a:ext cx="1525447" cy="182880"/>
+          </a:xfrm>
+          <a:prstGeom prst="rect">
+            <a:avLst/>
+          </a:prstGeom>
+          <a:noFill/>
+        </p:spPr>
+        <p:txBody>
+          <a:bodyPr wrap="square" lIns="0" rIns="0" tIns="0" bIns="0" anchor="t">
+            <a:spAutoFit/>
+          </a:bodyPr>
+          <a:lstStyle/>
+          <a:p>
+            <a:pPr algn="l"/>
+            <a:r>
+              <a:rPr sz="780" b="1" spc="100">
+                <a:solidFill>
+                  <a:srgbClr val="0A2458"/>
+                </a:solidFill>
+                <a:latin typeface="Segoe UI"/>
+              </a:rPr>
+              <a:t>WHO?</a:t>
+            </a:r>
+          </a:p>
+        </p:txBody>
+      </p:sp>
+      <p:sp>
+        <p:nvSpPr>
+          <p:cNvPr id="35" name="TextBox 34"/>
+          <p:cNvSpPr txBox="1"/>
+          <p:nvPr/>
+        </p:nvSpPr>
+        <p:spPr>
+          <a:xfrm>
+            <a:off x="2860471" y="2542032"/>
+            <a:ext cx="1525447" cy="329184"/>
+          </a:xfrm>
+          <a:prstGeom prst="rect">
+            <a:avLst/>
+          </a:prstGeom>
+          <a:noFill/>
+        </p:spPr>
+        <p:txBody>
+          <a:bodyPr wrap="square" lIns="0" rIns="0" tIns="0" bIns="0" anchor="t">
+            <a:spAutoFit/>
+          </a:bodyPr>
+          <a:lstStyle/>
+          <a:p>
+            <a:pPr algn="l">
+              <a:lnSpc>
+                <a:spcPct val="105000"/>
+              </a:lnSpc>
+            </a:pPr>
+            <a:r>
+              <a:rPr sz="980" b="1" spc="-15">
+                <a:solidFill>
+                  <a:srgbClr val="0A2458"/>
+                </a:solidFill>
+                <a:latin typeface="Segoe UI"/>
+              </a:rPr>
+              <a:t>Only named BSAs</a:t>
+            </a:r>
+          </a:p>
+        </p:txBody>
+      </p:sp>
+      <p:sp>
+        <p:nvSpPr>
+          <p:cNvPr id="36" name="TextBox 35"/>
+          <p:cNvSpPr txBox="1"/>
+          <p:nvPr/>
+        </p:nvSpPr>
+        <p:spPr>
+          <a:xfrm>
+            <a:off x="2860471" y="2889504"/>
+            <a:ext cx="1525447" cy="1005839"/>
+          </a:xfrm>
+          <a:prstGeom prst="rect">
+            <a:avLst/>
+          </a:prstGeom>
+          <a:noFill/>
+        </p:spPr>
+        <p:txBody>
+          <a:bodyPr wrap="square" lIns="0" rIns="0" tIns="0" bIns="0" anchor="t">
+            <a:spAutoFit/>
+          </a:bodyPr>
+          <a:lstStyle/>
+          <a:p>
+            <a:pPr algn="l">
+              <a:lnSpc>
+                <a:spcPct val="108000"/>
+              </a:lnSpc>
+            </a:pPr>
+            <a:r>
+              <a:rPr sz="760" b="0">
+                <a:solidFill>
+                  <a:srgbClr val="333F48"/>
+                </a:solidFill>
+                <a:latin typeface="Segoe UI"/>
+              </a:rPr>
+              <a:t>Only the client's BSA group — the people already allowed to read this data — can open the app. Each signs in with the company login. Nothing runs, is decided or handed out without that name attached.</a:t>
+            </a:r>
+          </a:p>
+        </p:txBody>
+      </p:sp>
+      <p:cxnSp>
+        <p:nvCxnSpPr>
+          <p:cNvPr id="37" name="Connector 36"/>
+          <p:cNvCxnSpPr/>
+          <p:nvPr/>
+        </p:nvCxnSpPr>
+        <p:spPr>
+          <a:xfrm>
+            <a:off x="2860471" y="3913631"/>
+            <a:ext cx="1525448" cy="0"/>
+          </a:xfrm>
+          <a:prstGeom prst="line">
+            <a:avLst/>
+          </a:prstGeom>
+          <a:ln w="12700">
+            <a:solidFill>
+              <a:srgbClr val="CDD2D8"/>
+            </a:solidFill>
+          </a:ln>
+        </p:spPr>
+        <p:style>
+          <a:lnRef idx="2">
+            <a:schemeClr val="accent1"/>
+          </a:lnRef>
+          <a:fillRef idx="0">
+            <a:schemeClr val="accent1"/>
+          </a:fillRef>
+          <a:effectRef idx="1">
+            <a:schemeClr val="accent1"/>
+          </a:effectRef>
+          <a:fontRef idx="minor">
+            <a:schemeClr val="tx1"/>
+          </a:fontRef>
+        </p:style>
+      </p:cxnSp>
+      <p:sp>
+        <p:nvSpPr>
+          <p:cNvPr id="38" name="TextBox 37"/>
+          <p:cNvSpPr txBox="1"/>
+          <p:nvPr/>
+        </p:nvSpPr>
+        <p:spPr>
+          <a:xfrm>
+            <a:off x="2860471" y="3968496"/>
+            <a:ext cx="1525447" cy="237744"/>
+          </a:xfrm>
+          <a:prstGeom prst="rect">
+            <a:avLst/>
+          </a:prstGeom>
+          <a:noFill/>
+        </p:spPr>
+        <p:txBody>
+          <a:bodyPr wrap="square" lIns="0" rIns="0" tIns="0" bIns="0" anchor="t">
+            <a:spAutoFit/>
+          </a:bodyPr>
+          <a:lstStyle/>
+          <a:p>
+            <a:pPr algn="l">
+              <a:lnSpc>
+                <a:spcPct val="108000"/>
+              </a:lnSpc>
+            </a:pPr>
+            <a:r>
+              <a:rPr sz="720" b="1">
+                <a:solidFill>
+                  <a:srgbClr val="0A2458"/>
+                </a:solidFill>
+                <a:latin typeface="Segoe UI"/>
+              </a:rPr>
+              <a:t>Microsoft Entra ID group · Databricks Apps</a:t>
+            </a:r>
+          </a:p>
+        </p:txBody>
+      </p:sp>
+      <p:cxnSp>
+        <p:nvCxnSpPr>
+          <p:cNvPr id="39" name="Connector 38"/>
+          <p:cNvCxnSpPr/>
+          <p:nvPr/>
+        </p:nvCxnSpPr>
+        <p:spPr>
+          <a:xfrm>
+            <a:off x="4550511" y="2935224"/>
+            <a:ext cx="201168" cy="0"/>
+          </a:xfrm>
+          <a:prstGeom prst="line">
+            <a:avLst/>
+          </a:prstGeom>
+          <a:ln w="19050">
+            <a:solidFill>
+              <a:srgbClr val="0A2458"/>
+            </a:solidFill>
+            <a:tailEnd type="triangle" w="med" len="med"/>
+          </a:ln>
+        </p:spPr>
+        <p:style>
+          <a:lnRef idx="2">
+            <a:schemeClr val="accent1"/>
+          </a:lnRef>
+          <a:fillRef idx="0">
+            <a:schemeClr val="accent1"/>
+          </a:fillRef>
+          <a:effectRef idx="1">
+            <a:schemeClr val="accent1"/>
+          </a:effectRef>
+          <a:fontRef idx="minor">
+            <a:schemeClr val="tx1"/>
+          </a:fontRef>
+        </p:style>
+      </p:cxnSp>
+      <p:sp>
+        <p:nvSpPr>
+          <p:cNvPr id="40" name="Rectangle 39"/>
+          <p:cNvSpPr/>
+          <p:nvPr/>
+        </p:nvSpPr>
+        <p:spPr>
+          <a:xfrm>
+            <a:off x="4769967" y="1627632"/>
+            <a:ext cx="1818055" cy="2615184"/>
+          </a:xfrm>
+          <a:prstGeom prst="rect">
+            <a:avLst/>
+          </a:prstGeom>
+          <a:solidFill>
+            <a:srgbClr val="FCECEE"/>
+          </a:solidFill>
+          <a:ln w="15875">
+            <a:solidFill>
+              <a:srgbClr val="D2202F"/>
+            </a:solidFill>
+          </a:ln>
+          <a:effectLst/>
+        </p:spPr>
+        <p:style>
+          <a:lnRef idx="1">
+            <a:schemeClr val="accent1"/>
+          </a:lnRef>
+          <a:fillRef idx="3">
+            <a:schemeClr val="accent1"/>
+          </a:fillRef>
+          <a:effectRef idx="2">
+            <a:schemeClr val="accent1"/>
+          </a:effectRef>
+          <a:fontRef idx="minor">
+            <a:schemeClr val="lt1"/>
+          </a:fontRef>
+        </p:style>
+        <p:txBody>
+          <a:bodyPr rtlCol="0" anchor="ctr"/>
+          <a:lstStyle/>
+          <a:p/>
+        </p:txBody>
+      </p:sp>
+      <p:sp>
+        <p:nvSpPr>
+          <p:cNvPr id="41" name="Rectangle 40"/>
+          <p:cNvSpPr/>
+          <p:nvPr/>
+        </p:nvSpPr>
+        <p:spPr>
+          <a:xfrm>
+            <a:off x="4769967" y="1627632"/>
+            <a:ext cx="1818055" cy="45720"/>
+          </a:xfrm>
+          <a:prstGeom prst="rect">
+            <a:avLst/>
+          </a:prstGeom>
+          <a:solidFill>
+            <a:srgbClr val="D2202F"/>
+          </a:solidFill>
+          <a:ln>
+            <a:noFill/>
+          </a:ln>
+          <a:effectLst/>
+        </p:spPr>
+        <p:style>
+          <a:lnRef idx="1">
+            <a:schemeClr val="accent1"/>
+          </a:lnRef>
+          <a:fillRef idx="3">
+            <a:schemeClr val="accent1"/>
+          </a:fillRef>
+          <a:effectRef idx="2">
+            <a:schemeClr val="accent1"/>
+          </a:effectRef>
+          <a:fontRef idx="minor">
+            <a:schemeClr val="lt1"/>
+          </a:fontRef>
+        </p:style>
+        <p:txBody>
+          <a:bodyPr rtlCol="0" anchor="ctr"/>
+          <a:lstStyle/>
+          <a:p/>
+        </p:txBody>
+      </p:sp>
+      <p:sp>
+        <p:nvSpPr>
+          <p:cNvPr id="42" name="TextBox 41"/>
+          <p:cNvSpPr txBox="1"/>
+          <p:nvPr/>
+        </p:nvSpPr>
+        <p:spPr>
+          <a:xfrm>
+            <a:off x="4916271" y="1773936"/>
+            <a:ext cx="1525447" cy="182880"/>
+          </a:xfrm>
+          <a:prstGeom prst="rect">
+            <a:avLst/>
+          </a:prstGeom>
+          <a:noFill/>
+        </p:spPr>
+        <p:txBody>
+          <a:bodyPr wrap="square" lIns="0" rIns="0" tIns="0" bIns="0" anchor="t">
+            <a:spAutoFit/>
+          </a:bodyPr>
+          <a:lstStyle/>
+          <a:p>
+            <a:pPr algn="l"/>
+            <a:r>
+              <a:rPr sz="850" b="1" spc="90">
+                <a:solidFill>
+                  <a:srgbClr val="D2202F"/>
+                </a:solidFill>
+                <a:latin typeface="Consolas"/>
+              </a:rPr>
+              <a:t>03</a:t>
+            </a:r>
+            <a:r>
+              <a:rPr sz="850" b="1" spc="90">
+                <a:solidFill>
+                  <a:srgbClr val="D2202F"/>
+                </a:solidFill>
+                <a:latin typeface="Segoe UI"/>
+              </a:rPr>
+              <a:t>  GENERATED</a:t>
+            </a:r>
+          </a:p>
+        </p:txBody>
+      </p:sp>
+      <p:pic>
+        <p:nvPicPr>
+          <p:cNvPr id="43" name="Picture 42" descr="claude.png"/>
+          <p:cNvPicPr>
+            <a:picLocks noChangeAspect="1"/>
+          </p:cNvPicPr>
+          <p:nvPr/>
+        </p:nvPicPr>
+        <p:blipFill>
+          <a:blip r:embed="rId6"/>
+          <a:stretch>
+            <a:fillRect/>
+          </a:stretch>
+        </p:blipFill>
+        <p:spPr>
+          <a:xfrm>
+            <a:off x="4916271" y="2053685"/>
+            <a:ext cx="786384" cy="172021"/>
+          </a:xfrm>
+          <a:prstGeom prst="rect">
+            <a:avLst/>
+          </a:prstGeom>
+        </p:spPr>
+      </p:pic>
+      <p:sp>
+        <p:nvSpPr>
+          <p:cNvPr id="44" name="TextBox 43"/>
+          <p:cNvSpPr txBox="1"/>
+          <p:nvPr/>
+        </p:nvSpPr>
+        <p:spPr>
+          <a:xfrm>
+            <a:off x="4916271" y="2359152"/>
+            <a:ext cx="1525447" cy="182880"/>
+          </a:xfrm>
+          <a:prstGeom prst="rect">
+            <a:avLst/>
+          </a:prstGeom>
+          <a:noFill/>
+        </p:spPr>
+        <p:txBody>
+          <a:bodyPr wrap="square" lIns="0" rIns="0" tIns="0" bIns="0" anchor="t">
+            <a:spAutoFit/>
+          </a:bodyPr>
+          <a:lstStyle/>
+          <a:p>
+            <a:pPr algn="l"/>
+            <a:r>
+              <a:rPr sz="780" b="1" spc="100">
+                <a:solidFill>
+                  <a:srgbClr val="D2202F"/>
+                </a:solidFill>
+                <a:latin typeface="Segoe UI"/>
+              </a:rPr>
+              <a:t>WHERE FROM?</a:t>
+            </a:r>
+          </a:p>
+        </p:txBody>
+      </p:sp>
+      <p:sp>
+        <p:nvSpPr>
+          <p:cNvPr id="45" name="TextBox 44"/>
+          <p:cNvSpPr txBox="1"/>
+          <p:nvPr/>
+        </p:nvSpPr>
+        <p:spPr>
+          <a:xfrm>
+            <a:off x="4916271" y="2542032"/>
+            <a:ext cx="1525447" cy="329184"/>
+          </a:xfrm>
+          <a:prstGeom prst="rect">
+            <a:avLst/>
+          </a:prstGeom>
+          <a:noFill/>
+        </p:spPr>
+        <p:txBody>
+          <a:bodyPr wrap="square" lIns="0" rIns="0" tIns="0" bIns="0" anchor="t">
+            <a:spAutoFit/>
+          </a:bodyPr>
+          <a:lstStyle/>
+          <a:p>
+            <a:pPr algn="l">
+              <a:lnSpc>
+                <a:spcPct val="105000"/>
+              </a:lnSpc>
+            </a:pPr>
+            <a:r>
+              <a:rPr sz="980" b="1" spc="-15">
+                <a:solidFill>
+                  <a:srgbClr val="0A2458"/>
+                </a:solidFill>
+                <a:latin typeface="Segoe UI"/>
+              </a:rPr>
+              <a:t>Every output is traceable</a:t>
+            </a:r>
+          </a:p>
+        </p:txBody>
+      </p:sp>
+      <p:sp>
+        <p:nvSpPr>
+          <p:cNvPr id="46" name="TextBox 45"/>
+          <p:cNvSpPr txBox="1"/>
+          <p:nvPr/>
+        </p:nvSpPr>
+        <p:spPr>
+          <a:xfrm>
+            <a:off x="4916271" y="2889504"/>
+            <a:ext cx="1525447" cy="1005839"/>
+          </a:xfrm>
+          <a:prstGeom prst="rect">
+            <a:avLst/>
+          </a:prstGeom>
+          <a:noFill/>
+        </p:spPr>
+        <p:txBody>
+          <a:bodyPr wrap="square" lIns="0" rIns="0" tIns="0" bIns="0" anchor="t">
+            <a:spAutoFit/>
+          </a:bodyPr>
+          <a:lstStyle/>
+          <a:p>
+            <a:pPr algn="l">
+              <a:lnSpc>
+                <a:spcPct val="108000"/>
+              </a:lnSpc>
+            </a:pPr>
+            <a:r>
+              <a:rPr sz="760" b="0">
+                <a:solidFill>
+                  <a:srgbClr val="333F48"/>
+                </a:solidFill>
+                <a:latin typeface="Segoe UI"/>
+              </a:rPr>
+              <a:t>One AI call reads the FRD — the only one in the system. Fingerprints tie the finished workbook to the exact FRD version, to that call (which model, which instructions) and to the revision of the client's standards that decided its target side.</a:t>
+            </a:r>
+          </a:p>
+        </p:txBody>
+      </p:sp>
+      <p:cxnSp>
+        <p:nvCxnSpPr>
+          <p:cNvPr id="47" name="Connector 46"/>
+          <p:cNvCxnSpPr/>
+          <p:nvPr/>
+        </p:nvCxnSpPr>
+        <p:spPr>
+          <a:xfrm>
+            <a:off x="4916271" y="3913631"/>
+            <a:ext cx="1525448" cy="0"/>
+          </a:xfrm>
+          <a:prstGeom prst="line">
+            <a:avLst/>
+          </a:prstGeom>
+          <a:ln w="12700">
+            <a:solidFill>
+              <a:srgbClr val="CDD2D8"/>
+            </a:solidFill>
+          </a:ln>
+        </p:spPr>
+        <p:style>
+          <a:lnRef idx="2">
+            <a:schemeClr val="accent1"/>
+          </a:lnRef>
+          <a:fillRef idx="0">
+            <a:schemeClr val="accent1"/>
+          </a:fillRef>
+          <a:effectRef idx="1">
+            <a:schemeClr val="accent1"/>
+          </a:effectRef>
+          <a:fontRef idx="minor">
+            <a:schemeClr val="tx1"/>
+          </a:fontRef>
+        </p:style>
+      </p:cxnSp>
+      <p:sp>
+        <p:nvSpPr>
+          <p:cNvPr id="48" name="TextBox 47"/>
+          <p:cNvSpPr txBox="1"/>
+          <p:nvPr/>
+        </p:nvSpPr>
+        <p:spPr>
+          <a:xfrm>
+            <a:off x="4916271" y="3968496"/>
+            <a:ext cx="1525447" cy="237744"/>
+          </a:xfrm>
+          <a:prstGeom prst="rect">
+            <a:avLst/>
+          </a:prstGeom>
+          <a:noFill/>
+        </p:spPr>
+        <p:txBody>
+          <a:bodyPr wrap="square" lIns="0" rIns="0" tIns="0" bIns="0" anchor="t">
+            <a:spAutoFit/>
+          </a:bodyPr>
+          <a:lstStyle/>
+          <a:p>
+            <a:pPr algn="l">
+              <a:lnSpc>
+                <a:spcPct val="108000"/>
+              </a:lnSpc>
+            </a:pPr>
+            <a:r>
+              <a:rPr sz="720" b="1">
+                <a:solidFill>
+                  <a:srgbClr val="D2202F"/>
+                </a:solidFill>
+                <a:latin typeface="Segoe UI"/>
+              </a:rPr>
+              <a:t>SHA-256 · run manifests · standards_sha256</a:t>
+            </a:r>
+          </a:p>
+        </p:txBody>
+      </p:sp>
+      <p:cxnSp>
+        <p:nvCxnSpPr>
+          <p:cNvPr id="49" name="Connector 48"/>
+          <p:cNvCxnSpPr/>
+          <p:nvPr/>
+        </p:nvCxnSpPr>
+        <p:spPr>
+          <a:xfrm>
+            <a:off x="6606311" y="2935224"/>
+            <a:ext cx="201168" cy="0"/>
+          </a:xfrm>
+          <a:prstGeom prst="line">
+            <a:avLst/>
+          </a:prstGeom>
+          <a:ln w="19050">
+            <a:solidFill>
+              <a:srgbClr val="0A2458"/>
+            </a:solidFill>
+            <a:tailEnd type="triangle" w="med" len="med"/>
+          </a:ln>
+        </p:spPr>
+        <p:style>
+          <a:lnRef idx="2">
+            <a:schemeClr val="accent1"/>
+          </a:lnRef>
+          <a:fillRef idx="0">
+            <a:schemeClr val="accent1"/>
+          </a:fillRef>
+          <a:effectRef idx="1">
+            <a:schemeClr val="accent1"/>
+          </a:effectRef>
+          <a:fontRef idx="minor">
+            <a:schemeClr val="tx1"/>
+          </a:fontRef>
+        </p:style>
+      </p:cxnSp>
+      <p:sp>
+        <p:nvSpPr>
+          <p:cNvPr id="50" name="Rectangle 49"/>
+          <p:cNvSpPr/>
+          <p:nvPr/>
+        </p:nvSpPr>
+        <p:spPr>
+          <a:xfrm>
+            <a:off x="6825767" y="1627632"/>
+            <a:ext cx="1818055" cy="2615184"/>
+          </a:xfrm>
+          <a:prstGeom prst="rect">
+            <a:avLst/>
+          </a:prstGeom>
+          <a:solidFill>
+            <a:srgbClr val="F0F0F0"/>
+          </a:solidFill>
+          <a:ln w="12700">
+            <a:solidFill>
+              <a:srgbClr val="0A2458"/>
+            </a:solidFill>
+          </a:ln>
+          <a:effectLst/>
+        </p:spPr>
+        <p:style>
+          <a:lnRef idx="1">
+            <a:schemeClr val="accent1"/>
+          </a:lnRef>
+          <a:fillRef idx="3">
+            <a:schemeClr val="accent1"/>
+          </a:fillRef>
+          <a:effectRef idx="2">
+            <a:schemeClr val="accent1"/>
+          </a:effectRef>
+          <a:fontRef idx="minor">
+            <a:schemeClr val="lt1"/>
+          </a:fontRef>
+        </p:style>
+        <p:txBody>
+          <a:bodyPr rtlCol="0" anchor="ctr"/>
+          <a:lstStyle/>
+          <a:p/>
+        </p:txBody>
+      </p:sp>
+      <p:sp>
+        <p:nvSpPr>
+          <p:cNvPr id="51" name="Rectangle 50"/>
+          <p:cNvSpPr/>
+          <p:nvPr/>
+        </p:nvSpPr>
+        <p:spPr>
+          <a:xfrm>
+            <a:off x="6825767" y="1627632"/>
+            <a:ext cx="1818055" cy="45720"/>
+          </a:xfrm>
+          <a:prstGeom prst="rect">
+            <a:avLst/>
+          </a:prstGeom>
+          <a:solidFill>
+            <a:srgbClr val="0A2458"/>
+          </a:solidFill>
+          <a:ln>
+            <a:noFill/>
+          </a:ln>
+          <a:effectLst/>
+        </p:spPr>
+        <p:style>
+          <a:lnRef idx="1">
+            <a:schemeClr val="accent1"/>
+          </a:lnRef>
+          <a:fillRef idx="3">
+            <a:schemeClr val="accent1"/>
+          </a:fillRef>
+          <a:effectRef idx="2">
+            <a:schemeClr val="accent1"/>
+          </a:effectRef>
+          <a:fontRef idx="minor">
+            <a:schemeClr val="lt1"/>
+          </a:fontRef>
+        </p:style>
+        <p:txBody>
+          <a:bodyPr rtlCol="0" anchor="ctr"/>
+          <a:lstStyle/>
+          <a:p/>
+        </p:txBody>
+      </p:sp>
+      <p:sp>
+        <p:nvSpPr>
+          <p:cNvPr id="52" name="TextBox 51"/>
+          <p:cNvSpPr txBox="1"/>
+          <p:nvPr/>
+        </p:nvSpPr>
+        <p:spPr>
+          <a:xfrm>
+            <a:off x="6972071" y="1773936"/>
+            <a:ext cx="1525447" cy="182880"/>
+          </a:xfrm>
+          <a:prstGeom prst="rect">
+            <a:avLst/>
+          </a:prstGeom>
+          <a:noFill/>
+        </p:spPr>
+        <p:txBody>
+          <a:bodyPr wrap="square" lIns="0" rIns="0" tIns="0" bIns="0" anchor="t">
+            <a:spAutoFit/>
+          </a:bodyPr>
+          <a:lstStyle/>
+          <a:p>
+            <a:pPr algn="l"/>
+            <a:r>
+              <a:rPr sz="850" b="1" spc="90">
+                <a:solidFill>
+                  <a:srgbClr val="0A2458"/>
+                </a:solidFill>
+                <a:latin typeface="Consolas"/>
+              </a:rPr>
+              <a:t>04</a:t>
+            </a:r>
+            <a:r>
+              <a:rPr sz="850" b="1" spc="90">
+                <a:solidFill>
+                  <a:srgbClr val="0A2458"/>
+                </a:solidFill>
+                <a:latin typeface="Segoe UI"/>
+              </a:rPr>
+              <a:t>  DECIDED</a:t>
+            </a:r>
+          </a:p>
+        </p:txBody>
+      </p:sp>
+      <p:pic>
+        <p:nvPicPr>
+          <p:cNvPr id="53" name="Picture 52" descr="check.png"/>
+          <p:cNvPicPr>
+            <a:picLocks noChangeAspect="1"/>
+          </p:cNvPicPr>
+          <p:nvPr/>
+        </p:nvPicPr>
+        <p:blipFill>
+          <a:blip r:embed="rId7"/>
+          <a:stretch>
+            <a:fillRect/>
+          </a:stretch>
+        </p:blipFill>
+        <p:spPr>
+          <a:xfrm>
+            <a:off x="6972071" y="2011680"/>
+            <a:ext cx="256032" cy="256032"/>
+          </a:xfrm>
+          <a:prstGeom prst="rect">
+            <a:avLst/>
+          </a:prstGeom>
+        </p:spPr>
+      </p:pic>
+      <p:sp>
+        <p:nvSpPr>
+          <p:cNvPr id="54" name="TextBox 53"/>
+          <p:cNvSpPr txBox="1"/>
+          <p:nvPr/>
+        </p:nvSpPr>
+        <p:spPr>
+          <a:xfrm>
+            <a:off x="6972071" y="2359152"/>
+            <a:ext cx="1525447" cy="182880"/>
+          </a:xfrm>
+          <a:prstGeom prst="rect">
+            <a:avLst/>
+          </a:prstGeom>
+          <a:noFill/>
+        </p:spPr>
+        <p:txBody>
+          <a:bodyPr wrap="square" lIns="0" rIns="0" tIns="0" bIns="0" anchor="t">
+            <a:spAutoFit/>
+          </a:bodyPr>
+          <a:lstStyle/>
+          <a:p>
+            <a:pPr algn="l"/>
+            <a:r>
+              <a:rPr sz="780" b="1" spc="100">
+                <a:solidFill>
+                  <a:srgbClr val="0A2458"/>
+                </a:solidFill>
+                <a:latin typeface="Segoe UI"/>
+              </a:rPr>
+              <a:t>WHO DECIDES?</a:t>
+            </a:r>
+          </a:p>
+        </p:txBody>
+      </p:sp>
+      <p:sp>
+        <p:nvSpPr>
+          <p:cNvPr id="55" name="TextBox 54"/>
+          <p:cNvSpPr txBox="1"/>
+          <p:nvPr/>
+        </p:nvSpPr>
+        <p:spPr>
+          <a:xfrm>
+            <a:off x="6972071" y="2542032"/>
+            <a:ext cx="1525447" cy="329184"/>
+          </a:xfrm>
+          <a:prstGeom prst="rect">
+            <a:avLst/>
+          </a:prstGeom>
+          <a:noFill/>
+        </p:spPr>
+        <p:txBody>
+          <a:bodyPr wrap="square" lIns="0" rIns="0" tIns="0" bIns="0" anchor="t">
+            <a:spAutoFit/>
+          </a:bodyPr>
+          <a:lstStyle/>
+          <a:p>
+            <a:pPr algn="l">
+              <a:lnSpc>
+                <a:spcPct val="105000"/>
+              </a:lnSpc>
+            </a:pPr>
+            <a:r>
+              <a:rPr sz="980" b="1" spc="-15">
+                <a:solidFill>
+                  <a:srgbClr val="0A2458"/>
+                </a:solidFill>
+                <a:latin typeface="Segoe UI"/>
+              </a:rPr>
+              <a:t>A person decides</a:t>
+            </a:r>
+          </a:p>
+        </p:txBody>
+      </p:sp>
+      <p:sp>
+        <p:nvSpPr>
+          <p:cNvPr id="56" name="TextBox 55"/>
+          <p:cNvSpPr txBox="1"/>
+          <p:nvPr/>
+        </p:nvSpPr>
+        <p:spPr>
+          <a:xfrm>
+            <a:off x="6972071" y="2889504"/>
+            <a:ext cx="1525447" cy="1005839"/>
+          </a:xfrm>
+          <a:prstGeom prst="rect">
+            <a:avLst/>
+          </a:prstGeom>
+          <a:noFill/>
+        </p:spPr>
+        <p:txBody>
+          <a:bodyPr wrap="square" lIns="0" rIns="0" tIns="0" bIns="0" anchor="t">
+            <a:spAutoFit/>
+          </a:bodyPr>
+          <a:lstStyle/>
+          <a:p>
+            <a:pPr algn="l">
+              <a:lnSpc>
+                <a:spcPct val="108000"/>
+              </a:lnSpc>
+            </a:pPr>
+            <a:r>
+              <a:rPr sz="760" b="0">
+                <a:solidFill>
+                  <a:srgbClr val="333F48"/>
+                </a:solidFill>
+                <a:latin typeface="Segoe UI"/>
+              </a:rPr>
+              <a:t>The AI only proposes. Code checks every mapping against the FRD word for word and scores it against an approved example. Anything it cannot ground is left blank and flagged, never guessed. A named reviewer settles those and approves.</a:t>
+            </a:r>
+          </a:p>
+        </p:txBody>
+      </p:sp>
+      <p:cxnSp>
+        <p:nvCxnSpPr>
+          <p:cNvPr id="57" name="Connector 56"/>
+          <p:cNvCxnSpPr/>
+          <p:nvPr/>
+        </p:nvCxnSpPr>
+        <p:spPr>
+          <a:xfrm>
+            <a:off x="6972071" y="3913631"/>
+            <a:ext cx="1525448" cy="0"/>
+          </a:xfrm>
+          <a:prstGeom prst="line">
+            <a:avLst/>
+          </a:prstGeom>
+          <a:ln w="12700">
+            <a:solidFill>
+              <a:srgbClr val="CDD2D8"/>
+            </a:solidFill>
+          </a:ln>
+        </p:spPr>
+        <p:style>
+          <a:lnRef idx="2">
+            <a:schemeClr val="accent1"/>
+          </a:lnRef>
+          <a:fillRef idx="0">
+            <a:schemeClr val="accent1"/>
+          </a:fillRef>
+          <a:effectRef idx="1">
+            <a:schemeClr val="accent1"/>
+          </a:effectRef>
+          <a:fontRef idx="minor">
+            <a:schemeClr val="tx1"/>
+          </a:fontRef>
+        </p:style>
+      </p:cxnSp>
+      <p:sp>
+        <p:nvSpPr>
+          <p:cNvPr id="58" name="TextBox 57"/>
+          <p:cNvSpPr txBox="1"/>
+          <p:nvPr/>
+        </p:nvSpPr>
+        <p:spPr>
+          <a:xfrm>
+            <a:off x="6972071" y="3968496"/>
+            <a:ext cx="1525447" cy="237744"/>
+          </a:xfrm>
+          <a:prstGeom prst="rect">
+            <a:avLst/>
+          </a:prstGeom>
+          <a:noFill/>
+        </p:spPr>
+        <p:txBody>
+          <a:bodyPr wrap="square" lIns="0" rIns="0" tIns="0" bIns="0" anchor="t">
+            <a:spAutoFit/>
+          </a:bodyPr>
+          <a:lstStyle/>
+          <a:p>
+            <a:pPr algn="l">
+              <a:lnSpc>
+                <a:spcPct val="108000"/>
+              </a:lnSpc>
+            </a:pPr>
+            <a:r>
+              <a:rPr sz="720" b="1">
+                <a:solidFill>
+                  <a:srgbClr val="0A2458"/>
+                </a:solidFill>
+                <a:latin typeface="Segoe UI"/>
+              </a:rPr>
+              <a:t>Grounding audit · gating · human-in-the-loop</a:t>
+            </a:r>
+          </a:p>
+        </p:txBody>
+      </p:sp>
+      <p:sp>
+        <p:nvSpPr>
+          <p:cNvPr id="59" name="Rectangle 58"/>
+          <p:cNvSpPr/>
+          <p:nvPr/>
+        </p:nvSpPr>
+        <p:spPr>
+          <a:xfrm>
+            <a:off x="658368" y="4425696"/>
+            <a:ext cx="7985455" cy="713232"/>
+          </a:xfrm>
+          <a:prstGeom prst="rect">
+            <a:avLst/>
+          </a:prstGeom>
+          <a:solidFill>
+            <a:srgbClr val="FFFFFF"/>
+          </a:solidFill>
+          <a:ln w="12700">
+            <a:solidFill>
+              <a:srgbClr val="003DA5"/>
+            </a:solidFill>
+          </a:ln>
+          <a:effectLst/>
+        </p:spPr>
+        <p:style>
+          <a:lnRef idx="1">
+            <a:schemeClr val="accent1"/>
+          </a:lnRef>
+          <a:fillRef idx="3">
+            <a:schemeClr val="accent1"/>
+          </a:fillRef>
+          <a:effectRef idx="2">
+            <a:schemeClr val="accent1"/>
+          </a:effectRef>
+          <a:fontRef idx="minor">
+            <a:schemeClr val="lt1"/>
+          </a:fontRef>
+        </p:style>
+        <p:txBody>
+          <a:bodyPr rtlCol="0" anchor="ctr"/>
+          <a:lstStyle/>
+          <a:p/>
+        </p:txBody>
+      </p:sp>
+      <p:sp>
+        <p:nvSpPr>
+          <p:cNvPr id="60" name="Rectangle 59"/>
+          <p:cNvSpPr/>
+          <p:nvPr/>
+        </p:nvSpPr>
+        <p:spPr>
+          <a:xfrm>
+            <a:off x="658368" y="4425696"/>
+            <a:ext cx="45720" cy="713232"/>
+          </a:xfrm>
+          <a:prstGeom prst="rect">
+            <a:avLst/>
+          </a:prstGeom>
+          <a:solidFill>
+            <a:srgbClr val="003DA5"/>
+          </a:solidFill>
+          <a:ln>
+            <a:noFill/>
+          </a:ln>
+          <a:effectLst/>
+        </p:spPr>
+        <p:style>
+          <a:lnRef idx="1">
+            <a:schemeClr val="accent1"/>
+          </a:lnRef>
+          <a:fillRef idx="3">
+            <a:schemeClr val="accent1"/>
+          </a:fillRef>
+          <a:effectRef idx="2">
+            <a:schemeClr val="accent1"/>
+          </a:effectRef>
+          <a:fontRef idx="minor">
+            <a:schemeClr val="lt1"/>
+          </a:fontRef>
+        </p:style>
+        <p:txBody>
+          <a:bodyPr rtlCol="0" anchor="ctr"/>
+          <a:lstStyle/>
+          <a:p/>
+        </p:txBody>
+      </p:sp>
+      <p:pic>
+        <p:nvPicPr>
+          <p:cNvPr id="61" name="Picture 60" descr="shield.png"/>
+          <p:cNvPicPr>
+            <a:picLocks noChangeAspect="1"/>
+          </p:cNvPicPr>
+          <p:nvPr/>
+        </p:nvPicPr>
+        <p:blipFill>
+          <a:blip r:embed="rId8"/>
+          <a:stretch>
+            <a:fillRect/>
+          </a:stretch>
+        </p:blipFill>
+        <p:spPr>
+          <a:xfrm>
+            <a:off x="822959" y="4626864"/>
+            <a:ext cx="292608" cy="292608"/>
+          </a:xfrm>
+          <a:prstGeom prst="rect">
+            <a:avLst/>
+          </a:prstGeom>
+        </p:spPr>
+      </p:pic>
+      <p:sp>
+        <p:nvSpPr>
+          <p:cNvPr id="62" name="TextBox 61"/>
+          <p:cNvSpPr txBox="1"/>
+          <p:nvPr/>
+        </p:nvSpPr>
+        <p:spPr>
+          <a:xfrm>
+            <a:off x="1225295" y="4553712"/>
+            <a:ext cx="2011680" cy="182880"/>
+          </a:xfrm>
+          <a:prstGeom prst="rect">
+            <a:avLst/>
+          </a:prstGeom>
+          <a:noFill/>
+        </p:spPr>
+        <p:txBody>
+          <a:bodyPr wrap="square" lIns="0" rIns="0" tIns="0" bIns="0" anchor="t">
+            <a:spAutoFit/>
+          </a:bodyPr>
+          <a:lstStyle/>
+          <a:p>
+            <a:pPr algn="l"/>
+            <a:r>
+              <a:rPr sz="780" b="1" spc="100">
+                <a:solidFill>
+                  <a:srgbClr val="003DA5"/>
+                </a:solidFill>
+                <a:latin typeface="Segoe UI"/>
+              </a:rPr>
+              <a:t>WHAT HAPPENED?</a:t>
+            </a:r>
+          </a:p>
+        </p:txBody>
+      </p:sp>
+      <p:sp>
+        <p:nvSpPr>
+          <p:cNvPr id="63" name="TextBox 62"/>
+          <p:cNvSpPr txBox="1"/>
+          <p:nvPr/>
+        </p:nvSpPr>
+        <p:spPr>
+          <a:xfrm>
+            <a:off x="1225295" y="4736592"/>
+            <a:ext cx="2194560" cy="219456"/>
+          </a:xfrm>
+          <a:prstGeom prst="rect">
+            <a:avLst/>
+          </a:prstGeom>
+          <a:noFill/>
+        </p:spPr>
+        <p:txBody>
+          <a:bodyPr wrap="square" lIns="0" rIns="0" tIns="0" bIns="0" anchor="t">
+            <a:spAutoFit/>
+          </a:bodyPr>
+          <a:lstStyle/>
+          <a:p>
+            <a:pPr algn="l"/>
+            <a:r>
+              <a:rPr sz="1019" b="1" spc="-15">
+                <a:solidFill>
+                  <a:srgbClr val="0A2458"/>
+                </a:solidFill>
+                <a:latin typeface="Segoe UI"/>
+              </a:rPr>
+              <a:t>Nothing is off the record</a:t>
+            </a:r>
+          </a:p>
+        </p:txBody>
+      </p:sp>
+      <p:sp>
+        <p:nvSpPr>
+          <p:cNvPr id="64" name="TextBox 63"/>
+          <p:cNvSpPr txBox="1"/>
+          <p:nvPr/>
+        </p:nvSpPr>
+        <p:spPr>
+          <a:xfrm>
+            <a:off x="3584448" y="4553712"/>
+            <a:ext cx="4876495" cy="420624"/>
+          </a:xfrm>
+          <a:prstGeom prst="rect">
+            <a:avLst/>
+          </a:prstGeom>
+          <a:noFill/>
+        </p:spPr>
+        <p:txBody>
+          <a:bodyPr wrap="square" lIns="0" rIns="0" tIns="0" bIns="0" anchor="t">
+            <a:spAutoFit/>
+          </a:bodyPr>
+          <a:lstStyle/>
+          <a:p>
+            <a:pPr algn="l">
+              <a:lnSpc>
+                <a:spcPct val="110000"/>
+              </a:lnSpc>
+            </a:pPr>
+            <a:r>
+              <a:rPr sz="800" b="0">
+                <a:solidFill>
+                  <a:srgbClr val="333F48"/>
+                </a:solidFill>
+                <a:latin typeface="Segoe UI"/>
+              </a:rPr>
+              <a:t>Every step above — each run, reviewer decision, re-render, download and sync — writes one record the moment it happens. The trail cannot be edited afterwards and reads like a table.</a:t>
+            </a:r>
+          </a:p>
+        </p:txBody>
+      </p:sp>
+      <p:sp>
+        <p:nvSpPr>
+          <p:cNvPr id="65" name="TextBox 64"/>
+          <p:cNvSpPr txBox="1"/>
+          <p:nvPr/>
+        </p:nvSpPr>
+        <p:spPr>
+          <a:xfrm>
+            <a:off x="3584448" y="4919472"/>
+            <a:ext cx="4876495" cy="182880"/>
+          </a:xfrm>
+          <a:prstGeom prst="rect">
+            <a:avLst/>
+          </a:prstGeom>
+          <a:noFill/>
+        </p:spPr>
+        <p:txBody>
+          <a:bodyPr wrap="square" lIns="0" rIns="0" tIns="0" bIns="0" anchor="t">
+            <a:spAutoFit/>
+          </a:bodyPr>
+          <a:lstStyle/>
+          <a:p>
+            <a:pPr algn="l"/>
+            <a:r>
+              <a:rPr sz="720" b="1">
+                <a:solidFill>
+                  <a:srgbClr val="003DA5"/>
+                </a:solidFill>
+                <a:latin typeface="Segoe UI"/>
+              </a:rPr>
+              <a:t>Audit trail in a Unity Catalog volume · Delta run log</a:t>
+            </a:r>
+          </a:p>
+        </p:txBody>
+      </p:sp>
+      <p:sp>
+        <p:nvSpPr>
+          <p:cNvPr id="66" name="TextBox 65"/>
+          <p:cNvSpPr txBox="1"/>
+          <p:nvPr/>
+        </p:nvSpPr>
+        <p:spPr>
+          <a:xfrm>
+            <a:off x="658368" y="5340096"/>
+            <a:ext cx="3727551" cy="457200"/>
+          </a:xfrm>
+          <a:prstGeom prst="rect">
+            <a:avLst/>
+          </a:prstGeom>
+          <a:noFill/>
+        </p:spPr>
+        <p:txBody>
+          <a:bodyPr wrap="square" lIns="0" rIns="0" tIns="0" bIns="0" anchor="t">
+            <a:spAutoFit/>
+          </a:bodyPr>
+          <a:lstStyle/>
+          <a:p>
+            <a:pPr algn="l">
+              <a:lnSpc>
+                <a:spcPct val="112000"/>
+              </a:lnSpc>
+            </a:pPr>
+            <a:r>
+              <a:rPr sz="819" b="1">
+                <a:solidFill>
+                  <a:srgbClr val="0A2458"/>
+                </a:solidFill>
+                <a:latin typeface="Segoe UI"/>
+              </a:rPr>
+              <a:t>Client data crosses the platform boundary in exactly two places</a:t>
+            </a:r>
+          </a:p>
+          <a:p>
+            <a:pPr algn="l">
+              <a:lnSpc>
+                <a:spcPct val="112000"/>
+              </a:lnSpc>
+            </a:pPr>
+            <a:r>
+              <a:rPr sz="819" b="0">
+                <a:solidFill>
+                  <a:srgbClr val="333F48"/>
+                </a:solidFill>
+                <a:latin typeface="Segoe UI"/>
+              </a:rPr>
+              <a:t>— both shown under the station where they happen, both recorded.</a:t>
+            </a:r>
+          </a:p>
+        </p:txBody>
+      </p:sp>
+      <p:sp>
+        <p:nvSpPr>
+          <p:cNvPr id="67" name="TextBox 66"/>
+          <p:cNvSpPr txBox="1"/>
+          <p:nvPr/>
+        </p:nvSpPr>
+        <p:spPr>
+          <a:xfrm>
+            <a:off x="658368" y="5833872"/>
+            <a:ext cx="3727551" cy="182880"/>
+          </a:xfrm>
+          <a:prstGeom prst="rect">
+            <a:avLst/>
+          </a:prstGeom>
+          <a:noFill/>
+        </p:spPr>
+        <p:txBody>
+          <a:bodyPr wrap="square" lIns="0" rIns="0" tIns="0" bIns="0" anchor="t">
+            <a:spAutoFit/>
+          </a:bodyPr>
+          <a:lstStyle/>
+          <a:p>
+            <a:pPr algn="l"/>
+            <a:r>
+              <a:rPr sz="740" b="1" spc="100">
+                <a:solidFill>
+                  <a:srgbClr val="D2202F"/>
+                </a:solidFill>
+                <a:latin typeface="Segoe UI"/>
+              </a:rPr>
+              <a:t>STILL OPEN — FOR THE CLIENT, NOT FOR CODE</a:t>
+            </a:r>
+          </a:p>
+        </p:txBody>
+      </p:sp>
+      <p:sp>
+        <p:nvSpPr>
+          <p:cNvPr id="68" name="Rectangle 67"/>
+          <p:cNvSpPr/>
+          <p:nvPr/>
+        </p:nvSpPr>
+        <p:spPr>
+          <a:xfrm>
+            <a:off x="676656" y="6080760"/>
+            <a:ext cx="64008" cy="64008"/>
+          </a:xfrm>
+          <a:prstGeom prst="rect">
+            <a:avLst/>
+          </a:prstGeom>
+          <a:solidFill>
+            <a:srgbClr val="D2202F"/>
+          </a:solidFill>
+          <a:ln>
+            <a:noFill/>
+          </a:ln>
+          <a:effectLst/>
+        </p:spPr>
+        <p:style>
+          <a:lnRef idx="1">
+            <a:schemeClr val="accent1"/>
+          </a:lnRef>
+          <a:fillRef idx="3">
+            <a:schemeClr val="accent1"/>
+          </a:fillRef>
+          <a:effectRef idx="2">
+            <a:schemeClr val="accent1"/>
+          </a:effectRef>
+          <a:fontRef idx="minor">
+            <a:schemeClr val="lt1"/>
+          </a:fontRef>
+        </p:style>
+        <p:txBody>
+          <a:bodyPr rtlCol="0" anchor="ctr"/>
+          <a:lstStyle/>
+          <a:p/>
+        </p:txBody>
+      </p:sp>
+      <p:sp>
+        <p:nvSpPr>
+          <p:cNvPr id="69" name="TextBox 68"/>
+          <p:cNvSpPr txBox="1"/>
+          <p:nvPr/>
+        </p:nvSpPr>
+        <p:spPr>
+          <a:xfrm>
+            <a:off x="841247" y="6016752"/>
+            <a:ext cx="3526383" cy="219456"/>
+          </a:xfrm>
+          <a:prstGeom prst="rect">
+            <a:avLst/>
+          </a:prstGeom>
+          <a:noFill/>
+        </p:spPr>
+        <p:txBody>
+          <a:bodyPr wrap="square" lIns="0" rIns="0" tIns="0" bIns="0" anchor="t">
+            <a:spAutoFit/>
+          </a:bodyPr>
+          <a:lstStyle/>
+          <a:p>
+            <a:pPr algn="l"/>
+            <a:r>
+              <a:rPr sz="760" b="0">
+                <a:solidFill>
+                  <a:srgbClr val="333F48"/>
+                </a:solidFill>
+                <a:latin typeface="Segoe UI"/>
+              </a:rPr>
+              <a:t>Named data owner and steward</a:t>
+            </a:r>
+          </a:p>
+        </p:txBody>
+      </p:sp>
+      <p:sp>
+        <p:nvSpPr>
+          <p:cNvPr id="70" name="Rectangle 69"/>
+          <p:cNvSpPr/>
+          <p:nvPr/>
+        </p:nvSpPr>
+        <p:spPr>
+          <a:xfrm>
+            <a:off x="676656" y="6281928"/>
+            <a:ext cx="64008" cy="64008"/>
+          </a:xfrm>
+          <a:prstGeom prst="rect">
+            <a:avLst/>
+          </a:prstGeom>
+          <a:solidFill>
+            <a:srgbClr val="D2202F"/>
+          </a:solidFill>
+          <a:ln>
+            <a:noFill/>
+          </a:ln>
+          <a:effectLst/>
+        </p:spPr>
+        <p:style>
+          <a:lnRef idx="1">
+            <a:schemeClr val="accent1"/>
+          </a:lnRef>
+          <a:fillRef idx="3">
+            <a:schemeClr val="accent1"/>
+          </a:fillRef>
+          <a:effectRef idx="2">
+            <a:schemeClr val="accent1"/>
+          </a:effectRef>
+          <a:fontRef idx="minor">
+            <a:schemeClr val="lt1"/>
+          </a:fontRef>
+        </p:style>
+        <p:txBody>
+          <a:bodyPr rtlCol="0" anchor="ctr"/>
+          <a:lstStyle/>
+          <a:p/>
+        </p:txBody>
+      </p:sp>
+      <p:sp>
+        <p:nvSpPr>
+          <p:cNvPr id="71" name="TextBox 70"/>
+          <p:cNvSpPr txBox="1"/>
+          <p:nvPr/>
+        </p:nvSpPr>
+        <p:spPr>
+          <a:xfrm>
+            <a:off x="841247" y="6217920"/>
+            <a:ext cx="3526383" cy="219456"/>
+          </a:xfrm>
+          <a:prstGeom prst="rect">
+            <a:avLst/>
+          </a:prstGeom>
+          <a:noFill/>
+        </p:spPr>
+        <p:txBody>
+          <a:bodyPr wrap="square" lIns="0" rIns="0" tIns="0" bIns="0" anchor="t">
+            <a:spAutoFit/>
+          </a:bodyPr>
+          <a:lstStyle/>
+          <a:p>
+            <a:pPr algn="l"/>
+            <a:r>
+              <a:rPr sz="760" b="0">
+                <a:solidFill>
+                  <a:srgbClr val="333F48"/>
+                </a:solidFill>
+                <a:latin typeface="Segoe UI"/>
+              </a:rPr>
+              <a:t>The model-vendor data path against the BAA posture</a:t>
+            </a:r>
+          </a:p>
+        </p:txBody>
+      </p:sp>
+      <p:sp>
+        <p:nvSpPr>
+          <p:cNvPr id="72" name="Rectangle 71"/>
+          <p:cNvSpPr/>
+          <p:nvPr/>
+        </p:nvSpPr>
+        <p:spPr>
+          <a:xfrm>
+            <a:off x="676656" y="6483096"/>
+            <a:ext cx="64008" cy="64008"/>
+          </a:xfrm>
+          <a:prstGeom prst="rect">
+            <a:avLst/>
+          </a:prstGeom>
+          <a:solidFill>
+            <a:srgbClr val="D2202F"/>
+          </a:solidFill>
+          <a:ln>
+            <a:noFill/>
+          </a:ln>
+          <a:effectLst/>
+        </p:spPr>
+        <p:style>
+          <a:lnRef idx="1">
+            <a:schemeClr val="accent1"/>
+          </a:lnRef>
+          <a:fillRef idx="3">
+            <a:schemeClr val="accent1"/>
+          </a:fillRef>
+          <a:effectRef idx="2">
+            <a:schemeClr val="accent1"/>
+          </a:effectRef>
+          <a:fontRef idx="minor">
+            <a:schemeClr val="lt1"/>
+          </a:fontRef>
+        </p:style>
+        <p:txBody>
+          <a:bodyPr rtlCol="0" anchor="ctr"/>
+          <a:lstStyle/>
+          <a:p/>
+        </p:txBody>
+      </p:sp>
+      <p:sp>
+        <p:nvSpPr>
+          <p:cNvPr id="73" name="TextBox 72"/>
+          <p:cNvSpPr txBox="1"/>
+          <p:nvPr/>
+        </p:nvSpPr>
+        <p:spPr>
+          <a:xfrm>
+            <a:off x="841247" y="6419088"/>
+            <a:ext cx="3526383" cy="219456"/>
+          </a:xfrm>
+          <a:prstGeom prst="rect">
+            <a:avLst/>
+          </a:prstGeom>
+          <a:noFill/>
+        </p:spPr>
+        <p:txBody>
+          <a:bodyPr wrap="square" lIns="0" rIns="0" tIns="0" bIns="0" anchor="t">
+            <a:spAutoFit/>
+          </a:bodyPr>
+          <a:lstStyle/>
+          <a:p>
+            <a:pPr algn="l"/>
+            <a:r>
+              <a:rPr sz="760" b="0">
+                <a:solidFill>
+                  <a:srgbClr val="333F48"/>
+                </a:solidFill>
+                <a:latin typeface="Segoe UI"/>
+              </a:rPr>
+              <a:t>Retention for generated artefacts and the audit trail</a:t>
+            </a:r>
+          </a:p>
+        </p:txBody>
+      </p:sp>
+      <p:sp>
+        <p:nvSpPr>
+          <p:cNvPr id="74" name="Rectangle 73"/>
+          <p:cNvSpPr/>
+          <p:nvPr/>
+        </p:nvSpPr>
+        <p:spPr>
+          <a:xfrm>
+            <a:off x="4769967" y="5321808"/>
+            <a:ext cx="1818055" cy="1005839"/>
+          </a:xfrm>
+          <a:prstGeom prst="rect">
+            <a:avLst/>
+          </a:prstGeom>
+          <a:solidFill>
+            <a:srgbClr val="FCECEE"/>
+          </a:solidFill>
+          <a:ln w="12700">
+            <a:solidFill>
+              <a:srgbClr val="D2202F"/>
+            </a:solidFill>
+          </a:ln>
+          <a:effectLst/>
+        </p:spPr>
+        <p:style>
+          <a:lnRef idx="1">
+            <a:schemeClr val="accent1"/>
+          </a:lnRef>
+          <a:fillRef idx="3">
+            <a:schemeClr val="accent1"/>
+          </a:fillRef>
+          <a:effectRef idx="2">
+            <a:schemeClr val="accent1"/>
+          </a:effectRef>
+          <a:fontRef idx="minor">
+            <a:schemeClr val="lt1"/>
+          </a:fontRef>
+        </p:style>
+        <p:txBody>
+          <a:bodyPr rtlCol="0" anchor="ctr"/>
+          <a:lstStyle/>
+          <a:p/>
+        </p:txBody>
+      </p:sp>
+      <p:sp>
+        <p:nvSpPr>
+          <p:cNvPr id="75" name="TextBox 74"/>
+          <p:cNvSpPr txBox="1"/>
+          <p:nvPr/>
+        </p:nvSpPr>
+        <p:spPr>
+          <a:xfrm>
+            <a:off x="4897983" y="5413248"/>
+            <a:ext cx="1562023" cy="859535"/>
+          </a:xfrm>
+          <a:prstGeom prst="rect">
+            <a:avLst/>
+          </a:prstGeom>
+          <a:noFill/>
+        </p:spPr>
+        <p:txBody>
+          <a:bodyPr wrap="square" lIns="0" rIns="0" tIns="0" bIns="0" anchor="t">
+            <a:spAutoFit/>
+          </a:bodyPr>
+          <a:lstStyle/>
+          <a:p>
+            <a:pPr algn="l">
+              <a:lnSpc>
+                <a:spcPct val="110000"/>
+              </a:lnSpc>
+            </a:pPr>
+            <a:r>
+              <a:rPr sz="740" b="1">
+                <a:solidFill>
+                  <a:srgbClr val="D2202F"/>
+                </a:solidFill>
+                <a:latin typeface="Segoe UI"/>
+              </a:rPr>
+              <a:t>1   FRD text → Anthropic</a:t>
+            </a:r>
+          </a:p>
+          <a:p>
+            <a:pPr algn="l">
+              <a:lnSpc>
+                <a:spcPct val="110000"/>
+              </a:lnSpc>
+            </a:pPr>
+            <a:r>
+              <a:rPr sz="740" b="0">
+                <a:solidFill>
+                  <a:srgbClr val="333F48"/>
+                </a:solidFill>
+                <a:latin typeface="Segoe UI"/>
+              </a:rPr>
+              <a:t>The credential lives in a Databricks secret scope — or, on the workspace route, is the workspace's own. Within the client's data-handling review.</a:t>
+            </a:r>
+          </a:p>
+        </p:txBody>
+      </p:sp>
+      <p:sp>
+        <p:nvSpPr>
+          <p:cNvPr id="76" name="Rectangle 75"/>
+          <p:cNvSpPr/>
+          <p:nvPr/>
+        </p:nvSpPr>
+        <p:spPr>
+          <a:xfrm>
+            <a:off x="6825767" y="5321808"/>
+            <a:ext cx="1818055" cy="1005839"/>
+          </a:xfrm>
+          <a:prstGeom prst="rect">
+            <a:avLst/>
+          </a:prstGeom>
+          <a:solidFill>
+            <a:srgbClr val="EAF0FA"/>
+          </a:solidFill>
+          <a:ln w="12700">
+            <a:solidFill>
+              <a:srgbClr val="0A2458"/>
+            </a:solidFill>
+          </a:ln>
+          <a:effectLst/>
+        </p:spPr>
+        <p:style>
+          <a:lnRef idx="1">
+            <a:schemeClr val="accent1"/>
+          </a:lnRef>
+          <a:fillRef idx="3">
+            <a:schemeClr val="accent1"/>
+          </a:fillRef>
+          <a:effectRef idx="2">
+            <a:schemeClr val="accent1"/>
+          </a:effectRef>
+          <a:fontRef idx="minor">
+            <a:schemeClr val="lt1"/>
+          </a:fontRef>
+        </p:style>
+        <p:txBody>
+          <a:bodyPr rtlCol="0" anchor="ctr"/>
+          <a:lstStyle/>
+          <a:p/>
+        </p:txBody>
+      </p:sp>
+      <p:sp>
+        <p:nvSpPr>
+          <p:cNvPr id="77" name="TextBox 76"/>
+          <p:cNvSpPr txBox="1"/>
+          <p:nvPr/>
+        </p:nvSpPr>
+        <p:spPr>
+          <a:xfrm>
+            <a:off x="6953783" y="5413248"/>
+            <a:ext cx="1562023" cy="859535"/>
+          </a:xfrm>
+          <a:prstGeom prst="rect">
+            <a:avLst/>
+          </a:prstGeom>
+          <a:noFill/>
+        </p:spPr>
+        <p:txBody>
+          <a:bodyPr wrap="square" lIns="0" rIns="0" tIns="0" bIns="0" anchor="t">
+            <a:spAutoFit/>
+          </a:bodyPr>
+          <a:lstStyle/>
+          <a:p>
+            <a:pPr algn="l">
+              <a:lnSpc>
+                <a:spcPct val="110000"/>
+              </a:lnSpc>
+            </a:pPr>
+            <a:r>
+              <a:rPr sz="740" b="1">
+                <a:solidFill>
+                  <a:srgbClr val="0A2458"/>
+                </a:solidFill>
+                <a:latin typeface="Segoe UI"/>
+              </a:rPr>
+              <a:t>2   workbook → a named person</a:t>
+            </a:r>
+          </a:p>
+          <a:p>
+            <a:pPr algn="l">
+              <a:lnSpc>
+                <a:spcPct val="110000"/>
+              </a:lnSpc>
+            </a:pPr>
+            <a:r>
+              <a:rPr sz="740" b="0">
+                <a:solidFill>
+                  <a:srgbClr val="333F48"/>
+                </a:solidFill>
+                <a:latin typeface="Segoe UI"/>
+              </a:rPr>
+              <a:t>The download is recorded with the file's fingerprint and the person's name. The agent never writes back to the library itself.</a:t>
+            </a:r>
+          </a:p>
+        </p:txBody>
+      </p:sp>
+      <p:sp>
+        <p:nvSpPr>
+          <p:cNvPr id="78" name="Rectangle 77"/>
+          <p:cNvSpPr/>
+          <p:nvPr/>
+        </p:nvSpPr>
+        <p:spPr>
+          <a:xfrm>
+            <a:off x="9064447" y="1627632"/>
+            <a:ext cx="2468880" cy="4700016"/>
+          </a:xfrm>
+          <a:prstGeom prst="rect">
+            <a:avLst/>
+          </a:prstGeom>
+          <a:solidFill>
+            <a:srgbClr val="F0F0F0"/>
+          </a:solidFill>
+          <a:ln w="12700">
+            <a:solidFill>
+              <a:srgbClr val="0A2458"/>
+            </a:solidFill>
+          </a:ln>
+          <a:effectLst/>
+        </p:spPr>
+        <p:style>
+          <a:lnRef idx="1">
+            <a:schemeClr val="accent1"/>
+          </a:lnRef>
+          <a:fillRef idx="3">
+            <a:schemeClr val="accent1"/>
+          </a:fillRef>
+          <a:effectRef idx="2">
+            <a:schemeClr val="accent1"/>
+          </a:effectRef>
+          <a:fontRef idx="minor">
+            <a:schemeClr val="lt1"/>
+          </a:fontRef>
+        </p:style>
+        <p:txBody>
+          <a:bodyPr rtlCol="0" anchor="ctr"/>
+          <a:lstStyle/>
+          <a:p/>
+        </p:txBody>
+      </p:sp>
+      <p:sp>
+        <p:nvSpPr>
+          <p:cNvPr id="79" name="Rectangle 78"/>
+          <p:cNvSpPr/>
+          <p:nvPr/>
+        </p:nvSpPr>
+        <p:spPr>
+          <a:xfrm>
+            <a:off x="9064447" y="1627632"/>
+            <a:ext cx="2468880" cy="45720"/>
+          </a:xfrm>
+          <a:prstGeom prst="rect">
+            <a:avLst/>
+          </a:prstGeom>
+          <a:solidFill>
+            <a:srgbClr val="69B3E7"/>
+          </a:solidFill>
+          <a:ln>
+            <a:noFill/>
+          </a:ln>
+          <a:effectLst/>
+        </p:spPr>
+        <p:style>
+          <a:lnRef idx="1">
+            <a:schemeClr val="accent1"/>
+          </a:lnRef>
+          <a:fillRef idx="3">
+            <a:schemeClr val="accent1"/>
+          </a:fillRef>
+          <a:effectRef idx="2">
+            <a:schemeClr val="accent1"/>
+          </a:effectRef>
+          <a:fontRef idx="minor">
+            <a:schemeClr val="lt1"/>
+          </a:fontRef>
+        </p:style>
+        <p:txBody>
+          <a:bodyPr rtlCol="0" anchor="ctr"/>
+          <a:lstStyle/>
+          <a:p/>
+        </p:txBody>
+      </p:sp>
+      <p:sp>
+        <p:nvSpPr>
+          <p:cNvPr id="80" name="TextBox 79"/>
+          <p:cNvSpPr txBox="1"/>
+          <p:nvPr/>
+        </p:nvSpPr>
+        <p:spPr>
+          <a:xfrm>
+            <a:off x="9064447" y="1371600"/>
+            <a:ext cx="2468880" cy="201168"/>
+          </a:xfrm>
+          <a:prstGeom prst="rect">
+            <a:avLst/>
+          </a:prstGeom>
+          <a:noFill/>
+        </p:spPr>
+        <p:txBody>
+          <a:bodyPr wrap="square" lIns="0" rIns="0" tIns="0" bIns="0" anchor="t">
+            <a:spAutoFit/>
+          </a:bodyPr>
+          <a:lstStyle/>
+          <a:p>
+            <a:pPr algn="l"/>
+            <a:r>
+              <a:rPr sz="850" b="1" spc="140">
+                <a:solidFill>
+                  <a:srgbClr val="0A2458"/>
+                </a:solidFill>
+                <a:latin typeface="Segoe UI"/>
+              </a:rPr>
+              <a:t>→  REGISTERED IN</a:t>
+            </a:r>
+          </a:p>
+        </p:txBody>
+      </p:sp>
+      <p:pic>
+        <p:nvPicPr>
+          <p:cNvPr id="81" name="Picture 80" descr="collibra.png"/>
+          <p:cNvPicPr>
+            <a:picLocks noChangeAspect="1"/>
+          </p:cNvPicPr>
+          <p:nvPr/>
+        </p:nvPicPr>
+        <p:blipFill>
+          <a:blip r:embed="rId9"/>
+          <a:stretch>
+            <a:fillRect/>
+          </a:stretch>
+        </p:blipFill>
+        <p:spPr>
+          <a:xfrm>
+            <a:off x="9449556" y="1865376"/>
+            <a:ext cx="1698660" cy="402336"/>
+          </a:xfrm>
+          <a:prstGeom prst="rect">
+            <a:avLst/>
+          </a:prstGeom>
+        </p:spPr>
+      </p:pic>
+      <p:sp>
+        <p:nvSpPr>
+          <p:cNvPr id="82" name="TextBox 81"/>
+          <p:cNvSpPr txBox="1"/>
+          <p:nvPr/>
+        </p:nvSpPr>
+        <p:spPr>
+          <a:xfrm>
+            <a:off x="9283903" y="2414016"/>
+            <a:ext cx="2029968" cy="182880"/>
+          </a:xfrm>
+          <a:prstGeom prst="rect">
+            <a:avLst/>
+          </a:prstGeom>
+          <a:noFill/>
+        </p:spPr>
+        <p:txBody>
+          <a:bodyPr wrap="square" lIns="0" rIns="0" tIns="0" bIns="0" anchor="t">
+            <a:spAutoFit/>
+          </a:bodyPr>
+          <a:lstStyle/>
+          <a:p>
+            <a:pPr algn="l"/>
+            <a:r>
+              <a:rPr sz="780" b="1" spc="100">
+                <a:solidFill>
+                  <a:srgbClr val="0A2458"/>
+                </a:solidFill>
+                <a:latin typeface="Segoe UI"/>
+              </a:rPr>
+              <a:t>GOVERNANCE REGISTER</a:t>
+            </a:r>
+          </a:p>
+        </p:txBody>
+      </p:sp>
+      <p:sp>
+        <p:nvSpPr>
+          <p:cNvPr id="83" name="TextBox 82"/>
+          <p:cNvSpPr txBox="1"/>
+          <p:nvPr/>
+        </p:nvSpPr>
+        <p:spPr>
+          <a:xfrm>
+            <a:off x="9283903" y="2615184"/>
+            <a:ext cx="2029968" cy="841248"/>
+          </a:xfrm>
+          <a:prstGeom prst="rect">
+            <a:avLst/>
+          </a:prstGeom>
+          <a:noFill/>
+        </p:spPr>
+        <p:txBody>
+          <a:bodyPr wrap="square" lIns="0" rIns="0" tIns="0" bIns="0" anchor="t">
+            <a:spAutoFit/>
+          </a:bodyPr>
+          <a:lstStyle/>
+          <a:p>
+            <a:pPr algn="l">
+              <a:lnSpc>
+                <a:spcPct val="112000"/>
+              </a:lnSpc>
+            </a:pPr>
+            <a:r>
+              <a:rPr sz="840" b="0">
+                <a:solidFill>
+                  <a:srgbClr val="333F48"/>
+                </a:solidFill>
+                <a:latin typeface="Segoe UI"/>
+              </a:rPr>
+              <a:t>The client's data-governance catalog. The agent is registered here as an </a:t>
+            </a:r>
+            <a:r>
+              <a:rPr sz="840" b="1">
+                <a:solidFill>
+                  <a:srgbClr val="0A2458"/>
+                </a:solidFill>
+                <a:latin typeface="Segoe UI"/>
+              </a:rPr>
+              <a:t>AI asset</a:t>
+            </a:r>
+            <a:r>
+              <a:rPr sz="840" b="0">
+                <a:solidFill>
+                  <a:srgbClr val="333F48"/>
+                </a:solidFill>
+                <a:latin typeface="Segoe UI"/>
+              </a:rPr>
+              <a:t> — one place to answer “what is this agent, and is it under control?”</a:t>
+            </a:r>
+          </a:p>
+        </p:txBody>
+      </p:sp>
+      <p:sp>
+        <p:nvSpPr>
+          <p:cNvPr id="84" name="Rectangle 83"/>
+          <p:cNvSpPr/>
+          <p:nvPr/>
+        </p:nvSpPr>
+        <p:spPr>
+          <a:xfrm>
+            <a:off x="9283903" y="3602736"/>
+            <a:ext cx="2029968" cy="1133856"/>
+          </a:xfrm>
+          <a:prstGeom prst="rect">
+            <a:avLst/>
+          </a:prstGeom>
+          <a:solidFill>
+            <a:srgbClr val="FFFFFF"/>
+          </a:solidFill>
+          <a:ln w="12700">
+            <a:solidFill>
+              <a:srgbClr val="CDD2D8"/>
+            </a:solidFill>
+          </a:ln>
+          <a:effectLst/>
+        </p:spPr>
+        <p:style>
+          <a:lnRef idx="1">
+            <a:schemeClr val="accent1"/>
+          </a:lnRef>
+          <a:fillRef idx="3">
+            <a:schemeClr val="accent1"/>
+          </a:fillRef>
+          <a:effectRef idx="2">
+            <a:schemeClr val="accent1"/>
+          </a:effectRef>
+          <a:fontRef idx="minor">
+            <a:schemeClr val="lt1"/>
+          </a:fontRef>
+        </p:style>
+        <p:txBody>
+          <a:bodyPr rtlCol="0" anchor="ctr"/>
+          <a:lstStyle/>
+          <a:p/>
+        </p:txBody>
+      </p:sp>
+      <p:pic>
+        <p:nvPicPr>
+          <p:cNvPr id="85" name="Picture 84" descr="unitycatalog.png"/>
+          <p:cNvPicPr>
+            <a:picLocks noChangeAspect="1"/>
+          </p:cNvPicPr>
+          <p:nvPr/>
+        </p:nvPicPr>
+        <p:blipFill>
+          <a:blip r:embed="rId3"/>
+          <a:stretch>
+            <a:fillRect/>
+          </a:stretch>
+        </p:blipFill>
+        <p:spPr>
+          <a:xfrm>
+            <a:off x="9494843" y="3730752"/>
+            <a:ext cx="748551" cy="256032"/>
+          </a:xfrm>
+          <a:prstGeom prst="rect">
+            <a:avLst/>
+          </a:prstGeom>
+        </p:spPr>
+      </p:pic>
+      <p:cxnSp>
+        <p:nvCxnSpPr>
+          <p:cNvPr id="86" name="Connector 85"/>
+          <p:cNvCxnSpPr/>
+          <p:nvPr/>
+        </p:nvCxnSpPr>
+        <p:spPr>
+          <a:xfrm>
+            <a:off x="10436047" y="3858768"/>
+            <a:ext cx="274320" cy="0"/>
+          </a:xfrm>
+          <a:prstGeom prst="line">
+            <a:avLst/>
+          </a:prstGeom>
+          <a:ln w="19050">
+            <a:solidFill>
+              <a:srgbClr val="0A2458"/>
+            </a:solidFill>
+            <a:tailEnd type="triangle" w="med" len="med"/>
+          </a:ln>
+        </p:spPr>
+        <p:style>
+          <a:lnRef idx="2">
+            <a:schemeClr val="accent1"/>
+          </a:lnRef>
+          <a:fillRef idx="0">
+            <a:schemeClr val="accent1"/>
+          </a:fillRef>
+          <a:effectRef idx="1">
+            <a:schemeClr val="accent1"/>
+          </a:effectRef>
+          <a:fontRef idx="minor">
+            <a:schemeClr val="tx1"/>
+          </a:fontRef>
+        </p:style>
+      </p:cxnSp>
+      <p:sp>
+        <p:nvSpPr>
+          <p:cNvPr id="87" name="TextBox 86"/>
+          <p:cNvSpPr txBox="1"/>
+          <p:nvPr/>
+        </p:nvSpPr>
+        <p:spPr>
+          <a:xfrm>
+            <a:off x="9411919" y="4059936"/>
+            <a:ext cx="1773936" cy="640080"/>
+          </a:xfrm>
+          <a:prstGeom prst="rect">
+            <a:avLst/>
+          </a:prstGeom>
+          <a:noFill/>
+        </p:spPr>
+        <p:txBody>
+          <a:bodyPr wrap="square" lIns="0" rIns="0" tIns="0" bIns="0" anchor="t">
+            <a:spAutoFit/>
+          </a:bodyPr>
+          <a:lstStyle/>
+          <a:p>
+            <a:pPr algn="l">
+              <a:lnSpc>
+                <a:spcPct val="108000"/>
+              </a:lnSpc>
+            </a:pPr>
+            <a:r>
+              <a:rPr sz="780" b="1">
+                <a:solidFill>
+                  <a:srgbClr val="0A2458"/>
+                </a:solidFill>
+                <a:latin typeface="Segoe UI"/>
+              </a:rPr>
+              <a:t>Collibra harvests Unity Catalog</a:t>
+            </a:r>
+            <a:r>
+              <a:rPr sz="780" b="0">
+                <a:solidFill>
+                  <a:srgbClr val="333F48"/>
+                </a:solidFill>
+                <a:latin typeface="Segoe UI"/>
+              </a:rPr>
+              <a:t> — owners, sensitivity and descriptions set in Databricks appear here automatically. Classified once, visible in both.</a:t>
+            </a:r>
+          </a:p>
+        </p:txBody>
+      </p:sp>
+      <p:sp>
+        <p:nvSpPr>
+          <p:cNvPr id="88" name="TextBox 87"/>
+          <p:cNvSpPr txBox="1"/>
+          <p:nvPr/>
+        </p:nvSpPr>
+        <p:spPr>
+          <a:xfrm>
+            <a:off x="9283903" y="4919472"/>
+            <a:ext cx="2029968" cy="182880"/>
+          </a:xfrm>
+          <a:prstGeom prst="rect">
+            <a:avLst/>
+          </a:prstGeom>
+          <a:noFill/>
+        </p:spPr>
+        <p:txBody>
+          <a:bodyPr wrap="square" lIns="0" rIns="0" tIns="0" bIns="0" anchor="t">
+            <a:spAutoFit/>
+          </a:bodyPr>
+          <a:lstStyle/>
+          <a:p>
+            <a:pPr algn="l"/>
+            <a:r>
+              <a:rPr sz="780" b="1" spc="100">
+                <a:solidFill>
+                  <a:srgbClr val="0A2458"/>
+                </a:solidFill>
+                <a:latin typeface="Segoe UI"/>
+              </a:rPr>
+              <a:t>WHAT IS REGISTERED</a:t>
+            </a:r>
+          </a:p>
+        </p:txBody>
+      </p:sp>
+      <p:sp>
+        <p:nvSpPr>
+          <p:cNvPr id="89" name="Rectangle 88"/>
+          <p:cNvSpPr/>
+          <p:nvPr/>
+        </p:nvSpPr>
+        <p:spPr>
+          <a:xfrm>
+            <a:off x="9302191" y="5207508"/>
+            <a:ext cx="68580" cy="68580"/>
+          </a:xfrm>
+          <a:prstGeom prst="rect">
+            <a:avLst/>
+          </a:prstGeom>
+          <a:solidFill>
+            <a:srgbClr val="69B3E7"/>
+          </a:solidFill>
+          <a:ln>
+            <a:noFill/>
+          </a:ln>
+          <a:effectLst/>
+        </p:spPr>
+        <p:style>
+          <a:lnRef idx="1">
+            <a:schemeClr val="accent1"/>
+          </a:lnRef>
+          <a:fillRef idx="3">
+            <a:schemeClr val="accent1"/>
+          </a:fillRef>
+          <a:effectRef idx="2">
+            <a:schemeClr val="accent1"/>
+          </a:effectRef>
+          <a:fontRef idx="minor">
+            <a:schemeClr val="lt1"/>
+          </a:fontRef>
+        </p:style>
+        <p:txBody>
+          <a:bodyPr rtlCol="0" anchor="ctr"/>
+          <a:lstStyle/>
+          <a:p/>
+        </p:txBody>
+      </p:sp>
+      <p:sp>
+        <p:nvSpPr>
+          <p:cNvPr id="90" name="TextBox 89"/>
+          <p:cNvSpPr txBox="1"/>
+          <p:nvPr/>
+        </p:nvSpPr>
+        <p:spPr>
+          <a:xfrm>
+            <a:off x="9485071" y="5138928"/>
+            <a:ext cx="1810512" cy="310896"/>
+          </a:xfrm>
+          <a:prstGeom prst="rect">
+            <a:avLst/>
+          </a:prstGeom>
+          <a:noFill/>
+        </p:spPr>
+        <p:txBody>
+          <a:bodyPr wrap="square" lIns="0" rIns="0" tIns="0" bIns="0" anchor="t">
+            <a:spAutoFit/>
+          </a:bodyPr>
+          <a:lstStyle/>
+          <a:p>
+            <a:pPr algn="l">
+              <a:lnSpc>
+                <a:spcPct val="108000"/>
+              </a:lnSpc>
+            </a:pPr>
+            <a:r>
+              <a:rPr sz="790" b="0">
+                <a:solidFill>
+                  <a:srgbClr val="333F48"/>
+                </a:solidFill>
+                <a:latin typeface="Segoe UI"/>
+              </a:rPr>
+              <a:t>What the agent is for, and its risk tier</a:t>
+            </a:r>
+          </a:p>
+        </p:txBody>
+      </p:sp>
+      <p:sp>
+        <p:nvSpPr>
+          <p:cNvPr id="91" name="Rectangle 90"/>
+          <p:cNvSpPr/>
+          <p:nvPr/>
+        </p:nvSpPr>
+        <p:spPr>
+          <a:xfrm>
+            <a:off x="9302191" y="5472684"/>
+            <a:ext cx="68580" cy="68580"/>
+          </a:xfrm>
+          <a:prstGeom prst="rect">
+            <a:avLst/>
+          </a:prstGeom>
+          <a:solidFill>
+            <a:srgbClr val="69B3E7"/>
+          </a:solidFill>
+          <a:ln>
+            <a:noFill/>
+          </a:ln>
+          <a:effectLst/>
+        </p:spPr>
+        <p:style>
+          <a:lnRef idx="1">
+            <a:schemeClr val="accent1"/>
+          </a:lnRef>
+          <a:fillRef idx="3">
+            <a:schemeClr val="accent1"/>
+          </a:fillRef>
+          <a:effectRef idx="2">
+            <a:schemeClr val="accent1"/>
+          </a:effectRef>
+          <a:fontRef idx="minor">
+            <a:schemeClr val="lt1"/>
+          </a:fontRef>
+        </p:style>
+        <p:txBody>
+          <a:bodyPr rtlCol="0" anchor="ctr"/>
+          <a:lstStyle/>
+          <a:p/>
+        </p:txBody>
+      </p:sp>
+      <p:sp>
+        <p:nvSpPr>
+          <p:cNvPr id="92" name="TextBox 91"/>
+          <p:cNvSpPr txBox="1"/>
+          <p:nvPr/>
+        </p:nvSpPr>
+        <p:spPr>
+          <a:xfrm>
+            <a:off x="9485071" y="5404104"/>
+            <a:ext cx="1810512" cy="310896"/>
+          </a:xfrm>
+          <a:prstGeom prst="rect">
+            <a:avLst/>
+          </a:prstGeom>
+          <a:noFill/>
+        </p:spPr>
+        <p:txBody>
+          <a:bodyPr wrap="square" lIns="0" rIns="0" tIns="0" bIns="0" anchor="t">
+            <a:spAutoFit/>
+          </a:bodyPr>
+          <a:lstStyle/>
+          <a:p>
+            <a:pPr algn="l">
+              <a:lnSpc>
+                <a:spcPct val="108000"/>
+              </a:lnSpc>
+            </a:pPr>
+            <a:r>
+              <a:rPr sz="790" b="0">
+                <a:solidFill>
+                  <a:srgbClr val="333F48"/>
+                </a:solidFill>
+                <a:latin typeface="Segoe UI"/>
+              </a:rPr>
+              <a:t>Who owns it and who stewards it</a:t>
+            </a:r>
+          </a:p>
+        </p:txBody>
+      </p:sp>
+      <p:sp>
+        <p:nvSpPr>
+          <p:cNvPr id="93" name="Rectangle 92"/>
+          <p:cNvSpPr/>
+          <p:nvPr/>
+        </p:nvSpPr>
+        <p:spPr>
+          <a:xfrm>
+            <a:off x="9302191" y="5737860"/>
+            <a:ext cx="68580" cy="68580"/>
+          </a:xfrm>
+          <a:prstGeom prst="rect">
+            <a:avLst/>
+          </a:prstGeom>
+          <a:solidFill>
+            <a:srgbClr val="69B3E7"/>
+          </a:solidFill>
+          <a:ln>
+            <a:noFill/>
+          </a:ln>
+          <a:effectLst/>
+        </p:spPr>
+        <p:style>
+          <a:lnRef idx="1">
+            <a:schemeClr val="accent1"/>
+          </a:lnRef>
+          <a:fillRef idx="3">
+            <a:schemeClr val="accent1"/>
+          </a:fillRef>
+          <a:effectRef idx="2">
+            <a:schemeClr val="accent1"/>
+          </a:effectRef>
+          <a:fontRef idx="minor">
+            <a:schemeClr val="lt1"/>
+          </a:fontRef>
+        </p:style>
+        <p:txBody>
+          <a:bodyPr rtlCol="0" anchor="ctr"/>
+          <a:lstStyle/>
+          <a:p/>
+        </p:txBody>
+      </p:sp>
+      <p:sp>
+        <p:nvSpPr>
+          <p:cNvPr id="94" name="TextBox 93"/>
+          <p:cNvSpPr txBox="1"/>
+          <p:nvPr/>
+        </p:nvSpPr>
+        <p:spPr>
+          <a:xfrm>
+            <a:off x="9485071" y="5669280"/>
+            <a:ext cx="1810512" cy="310896"/>
+          </a:xfrm>
+          <a:prstGeom prst="rect">
+            <a:avLst/>
+          </a:prstGeom>
+          <a:noFill/>
+        </p:spPr>
+        <p:txBody>
+          <a:bodyPr wrap="square" lIns="0" rIns="0" tIns="0" bIns="0" anchor="t">
+            <a:spAutoFit/>
+          </a:bodyPr>
+          <a:lstStyle/>
+          <a:p>
+            <a:pPr algn="l">
+              <a:lnSpc>
+                <a:spcPct val="108000"/>
+              </a:lnSpc>
+            </a:pPr>
+            <a:r>
+              <a:rPr sz="790" b="0">
+                <a:solidFill>
+                  <a:srgbClr val="333F48"/>
+                </a:solidFill>
+                <a:latin typeface="Segoe UI"/>
+              </a:rPr>
+              <a:t>The data it reads and writes, and where it flows</a:t>
+            </a:r>
+          </a:p>
+        </p:txBody>
+      </p:sp>
+      <p:sp>
+        <p:nvSpPr>
+          <p:cNvPr id="95" name="Rectangle 94"/>
+          <p:cNvSpPr/>
+          <p:nvPr/>
+        </p:nvSpPr>
+        <p:spPr>
+          <a:xfrm>
+            <a:off x="9302191" y="6003036"/>
+            <a:ext cx="68580" cy="68580"/>
+          </a:xfrm>
+          <a:prstGeom prst="rect">
+            <a:avLst/>
+          </a:prstGeom>
+          <a:solidFill>
+            <a:srgbClr val="69B3E7"/>
+          </a:solidFill>
+          <a:ln>
+            <a:noFill/>
+          </a:ln>
+          <a:effectLst/>
+        </p:spPr>
+        <p:style>
+          <a:lnRef idx="1">
+            <a:schemeClr val="accent1"/>
+          </a:lnRef>
+          <a:fillRef idx="3">
+            <a:schemeClr val="accent1"/>
+          </a:fillRef>
+          <a:effectRef idx="2">
+            <a:schemeClr val="accent1"/>
+          </a:effectRef>
+          <a:fontRef idx="minor">
+            <a:schemeClr val="lt1"/>
+          </a:fontRef>
+        </p:style>
+        <p:txBody>
+          <a:bodyPr rtlCol="0" anchor="ctr"/>
+          <a:lstStyle/>
+          <a:p/>
+        </p:txBody>
+      </p:sp>
+      <p:sp>
+        <p:nvSpPr>
+          <p:cNvPr id="96" name="TextBox 95"/>
+          <p:cNvSpPr txBox="1"/>
+          <p:nvPr/>
+        </p:nvSpPr>
+        <p:spPr>
+          <a:xfrm>
+            <a:off x="9485071" y="5934456"/>
+            <a:ext cx="1810512" cy="310896"/>
+          </a:xfrm>
+          <a:prstGeom prst="rect">
+            <a:avLst/>
+          </a:prstGeom>
+          <a:noFill/>
+        </p:spPr>
+        <p:txBody>
+          <a:bodyPr wrap="square" lIns="0" rIns="0" tIns="0" bIns="0" anchor="t">
+            <a:spAutoFit/>
+          </a:bodyPr>
+          <a:lstStyle/>
+          <a:p>
+            <a:pPr algn="l">
+              <a:lnSpc>
+                <a:spcPct val="108000"/>
+              </a:lnSpc>
+            </a:pPr>
+            <a:r>
+              <a:rPr sz="790" b="0">
+                <a:solidFill>
+                  <a:srgbClr val="333F48"/>
+                </a:solidFill>
+                <a:latin typeface="Segoe UI"/>
+              </a:rPr>
+              <a:t>The five controls shown to the left</a:t>
+            </a:r>
+          </a:p>
+        </p:txBody>
+      </p:sp>
+      <p:cxnSp>
+        <p:nvCxnSpPr>
+          <p:cNvPr id="97" name="Connector 96"/>
+          <p:cNvCxnSpPr/>
+          <p:nvPr/>
+        </p:nvCxnSpPr>
+        <p:spPr>
+          <a:xfrm>
+            <a:off x="8698687" y="2935224"/>
+            <a:ext cx="310896" cy="0"/>
+          </a:xfrm>
+          <a:prstGeom prst="line">
+            <a:avLst/>
+          </a:prstGeom>
+          <a:ln w="25400">
+            <a:solidFill>
+              <a:srgbClr val="0A2458"/>
+            </a:solidFill>
+            <a:tailEnd type="triangle" w="med" len="med"/>
           </a:ln>
         </p:spPr>
         <p:style>
@@ -3149,22 +6805,23 @@
       </p:cxnSp>
       <p:cxnSp>
         <p:nvCxnSpPr>
-          <p:cNvPr id="4" name="Connector 3"/>
+          <p:cNvPr id="98" name="Connector 97"/>
           <p:cNvCxnSpPr/>
           <p:nvPr/>
         </p:nvCxnSpPr>
         <p:spPr>
           <a:xfrm>
-            <a:off x="274320" y="210311"/>
-            <a:ext cx="0" cy="128017"/>
+            <a:off x="8698687" y="4782312"/>
+            <a:ext cx="310896" cy="0"/>
           </a:xfrm>
           <a:prstGeom prst="line">
             <a:avLst/>
           </a:prstGeom>
-          <a:ln w="6350">
+          <a:ln w="25400">
             <a:solidFill>
-              <a:srgbClr val="C5CBD3"/>
+              <a:srgbClr val="0A2458"/>
             </a:solidFill>
+            <a:tailEnd type="triangle" w="med" len="med"/>
           </a:ln>
         </p:spPr>
         <p:style>
@@ -3182,353 +6839,25 @@
           </a:fontRef>
         </p:style>
       </p:cxnSp>
-      <p:cxnSp>
-        <p:nvCxnSpPr>
-          <p:cNvPr id="5" name="Connector 4"/>
-          <p:cNvCxnSpPr/>
-          <p:nvPr/>
-        </p:nvCxnSpPr>
-        <p:spPr>
-          <a:xfrm>
-            <a:off x="11853367" y="274320"/>
-            <a:ext cx="128016" cy="0"/>
-          </a:xfrm>
-          <a:prstGeom prst="line">
-            <a:avLst/>
-          </a:prstGeom>
-          <a:ln w="6350">
-            <a:solidFill>
-              <a:srgbClr val="C5CBD3"/>
-            </a:solidFill>
-          </a:ln>
-        </p:spPr>
-        <p:style>
-          <a:lnRef idx="2">
-            <a:schemeClr val="accent1"/>
-          </a:lnRef>
-          <a:fillRef idx="0">
-            <a:schemeClr val="accent1"/>
-          </a:fillRef>
-          <a:effectRef idx="1">
-            <a:schemeClr val="accent1"/>
-          </a:effectRef>
-          <a:fontRef idx="minor">
-            <a:schemeClr val="tx1"/>
-          </a:fontRef>
-        </p:style>
-      </p:cxnSp>
-      <p:cxnSp>
-        <p:nvCxnSpPr>
-          <p:cNvPr id="6" name="Connector 5"/>
-          <p:cNvCxnSpPr/>
-          <p:nvPr/>
-        </p:nvCxnSpPr>
-        <p:spPr>
-          <a:xfrm>
-            <a:off x="11917375" y="210311"/>
-            <a:ext cx="0" cy="128017"/>
-          </a:xfrm>
-          <a:prstGeom prst="line">
-            <a:avLst/>
-          </a:prstGeom>
-          <a:ln w="6350">
-            <a:solidFill>
-              <a:srgbClr val="C5CBD3"/>
-            </a:solidFill>
-          </a:ln>
-        </p:spPr>
-        <p:style>
-          <a:lnRef idx="2">
-            <a:schemeClr val="accent1"/>
-          </a:lnRef>
-          <a:fillRef idx="0">
-            <a:schemeClr val="accent1"/>
-          </a:fillRef>
-          <a:effectRef idx="1">
-            <a:schemeClr val="accent1"/>
-          </a:effectRef>
-          <a:fontRef idx="minor">
-            <a:schemeClr val="tx1"/>
-          </a:fontRef>
-        </p:style>
-      </p:cxnSp>
-      <p:cxnSp>
-        <p:nvCxnSpPr>
-          <p:cNvPr id="7" name="Connector 6"/>
-          <p:cNvCxnSpPr/>
-          <p:nvPr/>
-        </p:nvCxnSpPr>
-        <p:spPr>
-          <a:xfrm>
-            <a:off x="210311" y="6583680"/>
-            <a:ext cx="128017" cy="0"/>
-          </a:xfrm>
-          <a:prstGeom prst="line">
-            <a:avLst/>
-          </a:prstGeom>
-          <a:ln w="6350">
-            <a:solidFill>
-              <a:srgbClr val="C5CBD3"/>
-            </a:solidFill>
-          </a:ln>
-        </p:spPr>
-        <p:style>
-          <a:lnRef idx="2">
-            <a:schemeClr val="accent1"/>
-          </a:lnRef>
-          <a:fillRef idx="0">
-            <a:schemeClr val="accent1"/>
-          </a:fillRef>
-          <a:effectRef idx="1">
-            <a:schemeClr val="accent1"/>
-          </a:effectRef>
-          <a:fontRef idx="minor">
-            <a:schemeClr val="tx1"/>
-          </a:fontRef>
-        </p:style>
-      </p:cxnSp>
-      <p:cxnSp>
-        <p:nvCxnSpPr>
-          <p:cNvPr id="8" name="Connector 7"/>
-          <p:cNvCxnSpPr/>
-          <p:nvPr/>
-        </p:nvCxnSpPr>
-        <p:spPr>
-          <a:xfrm>
-            <a:off x="274320" y="6519672"/>
-            <a:ext cx="0" cy="128016"/>
-          </a:xfrm>
-          <a:prstGeom prst="line">
-            <a:avLst/>
-          </a:prstGeom>
-          <a:ln w="6350">
-            <a:solidFill>
-              <a:srgbClr val="C5CBD3"/>
-            </a:solidFill>
-          </a:ln>
-        </p:spPr>
-        <p:style>
-          <a:lnRef idx="2">
-            <a:schemeClr val="accent1"/>
-          </a:lnRef>
-          <a:fillRef idx="0">
-            <a:schemeClr val="accent1"/>
-          </a:fillRef>
-          <a:effectRef idx="1">
-            <a:schemeClr val="accent1"/>
-          </a:effectRef>
-          <a:fontRef idx="minor">
-            <a:schemeClr val="tx1"/>
-          </a:fontRef>
-        </p:style>
-      </p:cxnSp>
-      <p:cxnSp>
-        <p:nvCxnSpPr>
-          <p:cNvPr id="9" name="Connector 8"/>
-          <p:cNvCxnSpPr/>
-          <p:nvPr/>
-        </p:nvCxnSpPr>
-        <p:spPr>
-          <a:xfrm>
-            <a:off x="11853367" y="6583680"/>
-            <a:ext cx="128016" cy="0"/>
-          </a:xfrm>
-          <a:prstGeom prst="line">
-            <a:avLst/>
-          </a:prstGeom>
-          <a:ln w="6350">
-            <a:solidFill>
-              <a:srgbClr val="C5CBD3"/>
-            </a:solidFill>
-          </a:ln>
-        </p:spPr>
-        <p:style>
-          <a:lnRef idx="2">
-            <a:schemeClr val="accent1"/>
-          </a:lnRef>
-          <a:fillRef idx="0">
-            <a:schemeClr val="accent1"/>
-          </a:fillRef>
-          <a:effectRef idx="1">
-            <a:schemeClr val="accent1"/>
-          </a:effectRef>
-          <a:fontRef idx="minor">
-            <a:schemeClr val="tx1"/>
-          </a:fontRef>
-        </p:style>
-      </p:cxnSp>
-      <p:cxnSp>
-        <p:nvCxnSpPr>
-          <p:cNvPr id="10" name="Connector 9"/>
-          <p:cNvCxnSpPr/>
-          <p:nvPr/>
-        </p:nvCxnSpPr>
-        <p:spPr>
-          <a:xfrm>
-            <a:off x="11917375" y="6519672"/>
-            <a:ext cx="0" cy="128016"/>
-          </a:xfrm>
-          <a:prstGeom prst="line">
-            <a:avLst/>
-          </a:prstGeom>
-          <a:ln w="6350">
-            <a:solidFill>
-              <a:srgbClr val="C5CBD3"/>
-            </a:solidFill>
-          </a:ln>
-        </p:spPr>
-        <p:style>
-          <a:lnRef idx="2">
-            <a:schemeClr val="accent1"/>
-          </a:lnRef>
-          <a:fillRef idx="0">
-            <a:schemeClr val="accent1"/>
-          </a:fillRef>
-          <a:effectRef idx="1">
-            <a:schemeClr val="accent1"/>
-          </a:effectRef>
-          <a:fontRef idx="minor">
-            <a:schemeClr val="tx1"/>
-          </a:fontRef>
-        </p:style>
-      </p:cxnSp>
-      <p:sp>
-        <p:nvSpPr>
-          <p:cNvPr id="11" name="TextBox 10"/>
-          <p:cNvSpPr txBox="1"/>
-          <p:nvPr/>
-        </p:nvSpPr>
-        <p:spPr>
-          <a:xfrm>
-            <a:off x="548640" y="347472"/>
-            <a:ext cx="8229600" cy="219456"/>
-          </a:xfrm>
-          <a:prstGeom prst="rect">
-            <a:avLst/>
-          </a:prstGeom>
-          <a:noFill/>
-        </p:spPr>
-        <p:txBody>
-          <a:bodyPr wrap="square" lIns="0" rIns="0" tIns="0" bIns="0" anchor="t">
-            <a:spAutoFit/>
-          </a:bodyPr>
-          <a:lstStyle/>
-          <a:p>
-            <a:pPr algn="l"/>
-            <a:r>
-              <a:rPr sz="900" b="1" spc="140">
-                <a:solidFill>
-                  <a:srgbClr val="5F6B7C"/>
-                </a:solidFill>
-                <a:latin typeface="Calibri"/>
-              </a:rPr>
-              <a:t>HEXAWARE  ·  AMERIHEALTH CARITAS  ·  AGENT 01 / 03</a:t>
-            </a:r>
-          </a:p>
-        </p:txBody>
-      </p:sp>
-      <p:sp>
-        <p:nvSpPr>
-          <p:cNvPr id="12" name="TextBox 11"/>
-          <p:cNvSpPr txBox="1"/>
-          <p:nvPr/>
-        </p:nvSpPr>
-        <p:spPr>
-          <a:xfrm>
-            <a:off x="548640" y="566928"/>
-            <a:ext cx="9601200" cy="502920"/>
-          </a:xfrm>
-          <a:prstGeom prst="rect">
-            <a:avLst/>
-          </a:prstGeom>
-          <a:noFill/>
-        </p:spPr>
-        <p:txBody>
-          <a:bodyPr wrap="square" lIns="0" rIns="0" tIns="0" bIns="0" anchor="t">
-            <a:spAutoFit/>
-          </a:bodyPr>
-          <a:lstStyle/>
-          <a:p>
-            <a:pPr algn="l"/>
-            <a:r>
-              <a:rPr sz="2800" b="1">
-                <a:solidFill>
-                  <a:srgbClr val="111418"/>
-                </a:solidFill>
-                <a:latin typeface="Calibri"/>
-              </a:rPr>
-              <a:t>FRD → STTM Agent</a:t>
-            </a:r>
-            <a:r>
-              <a:rPr sz="1500" b="0">
-                <a:solidFill>
-                  <a:srgbClr val="5F6B7C"/>
-                </a:solidFill>
-                <a:latin typeface="Calibri"/>
-              </a:rPr>
-              <a:t>    data governance architecture</a:t>
-            </a:r>
-          </a:p>
-        </p:txBody>
-      </p:sp>
-      <p:sp>
-        <p:nvSpPr>
-          <p:cNvPr id="13" name="TextBox 12"/>
-          <p:cNvSpPr txBox="1"/>
-          <p:nvPr/>
-        </p:nvSpPr>
-        <p:spPr>
-          <a:xfrm>
-            <a:off x="548640" y="1088136"/>
-            <a:ext cx="5486400" cy="201168"/>
-          </a:xfrm>
-          <a:prstGeom prst="rect">
-            <a:avLst/>
-          </a:prstGeom>
-          <a:noFill/>
-        </p:spPr>
-        <p:txBody>
-          <a:bodyPr wrap="square" lIns="0" rIns="0" tIns="0" bIns="0" anchor="t">
-            <a:spAutoFit/>
-          </a:bodyPr>
-          <a:lstStyle/>
-          <a:p>
-            <a:pPr algn="l"/>
-            <a:r>
-              <a:rPr sz="900" b="1" spc="140">
-                <a:solidFill>
-                  <a:srgbClr val="5F6B7C"/>
-                </a:solidFill>
-                <a:latin typeface="Calibri"/>
-              </a:rPr>
-              <a:t>THE DOCUMENT'S JOURNEY  →</a:t>
-            </a:r>
-          </a:p>
-        </p:txBody>
-      </p:sp>
-      <p:sp>
-        <p:nvSpPr>
-          <p:cNvPr id="14" name="Rounded Rectangle 13"/>
+      <p:sp>
+        <p:nvSpPr>
+          <p:cNvPr id="99" name="Rectangle 98"/>
           <p:cNvSpPr/>
           <p:nvPr/>
         </p:nvSpPr>
         <p:spPr>
           <a:xfrm>
-            <a:off x="548640" y="1325880"/>
-            <a:ext cx="1831771" cy="2834640"/>
-          </a:xfrm>
-          <a:prstGeom prst="roundRect">
-            <a:avLst>
-              <a:gd name="adj" fmla="val 5000"/>
-            </a:avLst>
+            <a:off x="0" y="6620256"/>
+            <a:ext cx="12191695" cy="237744"/>
+          </a:xfrm>
+          <a:prstGeom prst="rect">
+            <a:avLst/>
           </a:prstGeom>
           <a:solidFill>
-            <a:srgbClr val="EDEFF2"/>
+            <a:srgbClr val="0A2458"/>
           </a:solidFill>
-          <a:ln w="12700">
-            <a:solidFill>
-              <a:srgbClr val="00A396"/>
-            </a:solidFill>
+          <a:ln>
+            <a:noFill/>
           </a:ln>
           <a:effectLst/>
         </p:spPr>
@@ -3554,14 +6883,14 @@
       </p:sp>
       <p:sp>
         <p:nvSpPr>
-          <p:cNvPr id="15" name="TextBox 14"/>
+          <p:cNvPr id="100" name="TextBox 99"/>
           <p:cNvSpPr txBox="1"/>
           <p:nvPr/>
         </p:nvSpPr>
         <p:spPr>
           <a:xfrm>
-            <a:off x="694944" y="1472184"/>
-            <a:ext cx="1539163" cy="182880"/>
+            <a:off x="658368" y="6665976"/>
+            <a:ext cx="10874959" cy="182880"/>
           </a:xfrm>
           <a:prstGeom prst="rect">
             <a:avLst/>
@@ -3576,84 +6905,99 @@
           <a:p>
             <a:pPr algn="l"/>
             <a:r>
-              <a:rPr sz="850" b="1" spc="80">
-                <a:solidFill>
-                  <a:srgbClr val="007067"/>
-                </a:solidFill>
-                <a:latin typeface="Consolas"/>
+              <a:rPr sz="800" b="1" spc="100">
+                <a:solidFill>
+                  <a:srgbClr val="FFFFFF"/>
+                </a:solidFill>
+                <a:latin typeface="Segoe UI"/>
               </a:rPr>
-              <a:t>01</a:t>
-            </a:r>
-            <a:r>
-              <a:rPr sz="850" b="1" spc="80">
-                <a:solidFill>
-                  <a:srgbClr val="007067"/>
-                </a:solidFill>
-                <a:latin typeface="Calibri"/>
+              <a:t>CLASSIFIED DATA</a:t>
+            </a:r>
+            <a:r>
+              <a:rPr sz="800" b="0" spc="100">
+                <a:solidFill>
+                  <a:srgbClr val="6B7FA8"/>
+                </a:solidFill>
+                <a:latin typeface="Segoe UI"/>
               </a:rPr>
-              <a:t>  ENTERS</a:t>
-            </a:r>
-          </a:p>
-        </p:txBody>
-      </p:sp>
-      <p:pic>
-        <p:nvPicPr>
-          <p:cNvPr id="16" name="Picture 15" descr="sharepoint.png"/>
-          <p:cNvPicPr>
-            <a:picLocks noChangeAspect="1"/>
-          </p:cNvPicPr>
-          <p:nvPr/>
-        </p:nvPicPr>
-        <p:blipFill>
-          <a:blip r:embed="rId3"/>
-          <a:stretch>
-            <a:fillRect/>
-          </a:stretch>
-        </p:blipFill>
-        <p:spPr>
-          <a:xfrm>
-            <a:off x="700975" y="1728216"/>
-            <a:ext cx="298833" cy="292608"/>
-          </a:xfrm>
-          <a:prstGeom prst="rect">
-            <a:avLst/>
-          </a:prstGeom>
-        </p:spPr>
-      </p:pic>
-      <p:pic>
-        <p:nvPicPr>
-          <p:cNvPr id="17" name="Picture 16" descr="unitycatalog.png"/>
-          <p:cNvPicPr>
-            <a:picLocks noChangeAspect="1"/>
-          </p:cNvPicPr>
-          <p:nvPr/>
-        </p:nvPicPr>
-        <p:blipFill>
-          <a:blip r:embed="rId4"/>
-          <a:stretch>
-            <a:fillRect/>
-          </a:stretch>
-        </p:blipFill>
-        <p:spPr>
-          <a:xfrm>
-            <a:off x="1140452" y="1728216"/>
-            <a:ext cx="855487" cy="292608"/>
-          </a:xfrm>
-          <a:prstGeom prst="rect">
-            <a:avLst/>
-          </a:prstGeom>
-        </p:spPr>
-      </p:pic>
-      <p:sp>
-        <p:nvSpPr>
-          <p:cNvPr id="18" name="TextBox 17"/>
+              <a:t>     ·     </a:t>
+            </a:r>
+            <a:r>
+              <a:rPr sz="800" b="1" spc="100">
+                <a:solidFill>
+                  <a:srgbClr val="FFFFFF"/>
+                </a:solidFill>
+                <a:latin typeface="Segoe UI"/>
+              </a:rPr>
+              <a:t>NAMED PEOPLE</a:t>
+            </a:r>
+            <a:r>
+              <a:rPr sz="800" b="0" spc="100">
+                <a:solidFill>
+                  <a:srgbClr val="6B7FA8"/>
+                </a:solidFill>
+                <a:latin typeface="Segoe UI"/>
+              </a:rPr>
+              <a:t>     ·     </a:t>
+            </a:r>
+            <a:r>
+              <a:rPr sz="800" b="1" spc="100">
+                <a:solidFill>
+                  <a:srgbClr val="FFFFFF"/>
+                </a:solidFill>
+                <a:latin typeface="Segoe UI"/>
+              </a:rPr>
+              <a:t>TRACEABLE OUTPUTS</a:t>
+            </a:r>
+            <a:r>
+              <a:rPr sz="800" b="0" spc="100">
+                <a:solidFill>
+                  <a:srgbClr val="6B7FA8"/>
+                </a:solidFill>
+                <a:latin typeface="Segoe UI"/>
+              </a:rPr>
+              <a:t>     ·     </a:t>
+            </a:r>
+            <a:r>
+              <a:rPr sz="800" b="1" spc="100">
+                <a:solidFill>
+                  <a:srgbClr val="FFFFFF"/>
+                </a:solidFill>
+                <a:latin typeface="Segoe UI"/>
+              </a:rPr>
+              <a:t>A PERSON DECIDES</a:t>
+            </a:r>
+            <a:r>
+              <a:rPr sz="800" b="0" spc="100">
+                <a:solidFill>
+                  <a:srgbClr val="6B7FA8"/>
+                </a:solidFill>
+                <a:latin typeface="Segoe UI"/>
+              </a:rPr>
+              <a:t>     ·     </a:t>
+            </a:r>
+            <a:r>
+              <a:rPr sz="800" b="1" spc="100">
+                <a:solidFill>
+                  <a:srgbClr val="FFFFFF"/>
+                </a:solidFill>
+                <a:latin typeface="Segoe UI"/>
+              </a:rPr>
+              <a:t>A RECORD OF EVERYTHING</a:t>
+            </a:r>
+          </a:p>
+        </p:txBody>
+      </p:sp>
+      <p:sp>
+        <p:nvSpPr>
+          <p:cNvPr id="101" name="TextBox 100"/>
           <p:cNvSpPr txBox="1"/>
           <p:nvPr/>
         </p:nvSpPr>
         <p:spPr>
           <a:xfrm>
-            <a:off x="694944" y="2148840"/>
-            <a:ext cx="1539163" cy="182880"/>
+            <a:off x="7144207" y="6400800"/>
+            <a:ext cx="4389120" cy="182880"/>
           </a:xfrm>
           <a:prstGeom prst="rect">
             <a:avLst/>
@@ -3666,2227 +7010,13 @@
           </a:bodyPr>
           <a:lstStyle/>
           <a:p>
-            <a:pPr algn="l"/>
-            <a:r>
-              <a:rPr sz="800" b="1" spc="100">
-                <a:solidFill>
-                  <a:srgbClr val="007067"/>
-                </a:solidFill>
-                <a:latin typeface="Calibri"/>
-              </a:rPr>
-              <a:t>WHAT DATA?</a:t>
-            </a:r>
-          </a:p>
-        </p:txBody>
-      </p:sp>
-      <p:sp>
-        <p:nvSpPr>
-          <p:cNvPr id="19" name="TextBox 18"/>
-          <p:cNvSpPr txBox="1"/>
-          <p:nvPr/>
-        </p:nvSpPr>
-        <p:spPr>
-          <a:xfrm>
-            <a:off x="694944" y="2350008"/>
-            <a:ext cx="1539163" cy="237744"/>
-          </a:xfrm>
-          <a:prstGeom prst="rect">
-            <a:avLst/>
-          </a:prstGeom>
-          <a:noFill/>
-        </p:spPr>
-        <p:txBody>
-          <a:bodyPr wrap="square" lIns="0" rIns="0" tIns="0" bIns="0" anchor="t">
-            <a:spAutoFit/>
-          </a:bodyPr>
-          <a:lstStyle/>
-          <a:p>
-            <a:pPr algn="l"/>
-            <a:r>
-              <a:rPr sz="1050" b="1">
-                <a:solidFill>
-                  <a:srgbClr val="1C2127"/>
-                </a:solidFill>
-                <a:latin typeface="Calibri"/>
-              </a:rPr>
-              <a:t>Classified at the door</a:t>
-            </a:r>
-          </a:p>
-        </p:txBody>
-      </p:sp>
-      <p:sp>
-        <p:nvSpPr>
-          <p:cNvPr id="20" name="TextBox 19"/>
-          <p:cNvSpPr txBox="1"/>
-          <p:nvPr/>
-        </p:nvSpPr>
-        <p:spPr>
-          <a:xfrm>
-            <a:off x="694944" y="2624328"/>
-            <a:ext cx="1539163" cy="1133856"/>
-          </a:xfrm>
-          <a:prstGeom prst="rect">
-            <a:avLst/>
-          </a:prstGeom>
-          <a:noFill/>
-        </p:spPr>
-        <p:txBody>
-          <a:bodyPr wrap="square" lIns="0" rIns="0" tIns="0" bIns="0" anchor="t">
-            <a:spAutoFit/>
-          </a:bodyPr>
-          <a:lstStyle/>
-          <a:p>
-            <a:pPr algn="l">
-              <a:lnSpc>
-                <a:spcPct val="105000"/>
-              </a:lnSpc>
-            </a:pPr>
-            <a:r>
-              <a:rPr sz="850" b="0">
-                <a:solidFill>
-                  <a:srgbClr val="2F343C"/>
-                </a:solidFill>
-                <a:latin typeface="Calibri"/>
-              </a:rPr>
-              <a:t>Documents come from the client's SharePoint, read-only. In Databricks every table and folder carries an owner, a steward, its sensitivity (confidential; may name PHI fields), its source and its retention rule — set by the data owner.</a:t>
-            </a:r>
-          </a:p>
-        </p:txBody>
-      </p:sp>
-      <p:cxnSp>
-        <p:nvCxnSpPr>
-          <p:cNvPr id="21" name="Connector 20"/>
-          <p:cNvCxnSpPr/>
-          <p:nvPr/>
-        </p:nvCxnSpPr>
-        <p:spPr>
-          <a:xfrm>
-            <a:off x="694944" y="3776472"/>
-            <a:ext cx="1539163" cy="0"/>
-          </a:xfrm>
-          <a:prstGeom prst="line">
-            <a:avLst/>
-          </a:prstGeom>
-          <a:ln w="6350">
-            <a:solidFill>
-              <a:srgbClr val="C5CBD3"/>
-            </a:solidFill>
-          </a:ln>
-        </p:spPr>
-        <p:style>
-          <a:lnRef idx="2">
-            <a:schemeClr val="accent1"/>
-          </a:lnRef>
-          <a:fillRef idx="0">
-            <a:schemeClr val="accent1"/>
-          </a:fillRef>
-          <a:effectRef idx="1">
-            <a:schemeClr val="accent1"/>
-          </a:effectRef>
-          <a:fontRef idx="minor">
-            <a:schemeClr val="tx1"/>
-          </a:fontRef>
-        </p:style>
-      </p:cxnSp>
-      <p:sp>
-        <p:nvSpPr>
-          <p:cNvPr id="22" name="TextBox 21"/>
-          <p:cNvSpPr txBox="1"/>
-          <p:nvPr/>
-        </p:nvSpPr>
-        <p:spPr>
-          <a:xfrm>
-            <a:off x="694944" y="3831335"/>
-            <a:ext cx="1539163" cy="274320"/>
-          </a:xfrm>
-          <a:prstGeom prst="rect">
-            <a:avLst/>
-          </a:prstGeom>
-          <a:noFill/>
-        </p:spPr>
-        <p:txBody>
-          <a:bodyPr wrap="square" lIns="0" rIns="0" tIns="0" bIns="0" anchor="t">
-            <a:spAutoFit/>
-          </a:bodyPr>
-          <a:lstStyle/>
-          <a:p>
-            <a:pPr algn="l"/>
-            <a:r>
-              <a:rPr sz="750" b="1">
-                <a:solidFill>
-                  <a:srgbClr val="007067"/>
-                </a:solidFill>
-                <a:latin typeface="Calibri"/>
-              </a:rPr>
-              <a:t>SharePoint · Unity Catalog tags &amp; comments</a:t>
-            </a:r>
-          </a:p>
-        </p:txBody>
-      </p:sp>
-      <p:cxnSp>
-        <p:nvCxnSpPr>
-          <p:cNvPr id="23" name="Connector 22"/>
-          <p:cNvCxnSpPr/>
-          <p:nvPr/>
-        </p:nvCxnSpPr>
-        <p:spPr>
-          <a:xfrm>
-            <a:off x="2416987" y="2743200"/>
-            <a:ext cx="237744" cy="0"/>
-          </a:xfrm>
-          <a:prstGeom prst="line">
-            <a:avLst/>
-          </a:prstGeom>
-          <a:ln w="15875">
-            <a:solidFill>
-              <a:srgbClr val="5F6B7C"/>
-            </a:solidFill>
-            <a:tailEnd type="triangle" w="sm" len="sm"/>
-          </a:ln>
-        </p:spPr>
-        <p:style>
-          <a:lnRef idx="2">
-            <a:schemeClr val="accent1"/>
-          </a:lnRef>
-          <a:fillRef idx="0">
-            <a:schemeClr val="accent1"/>
-          </a:fillRef>
-          <a:effectRef idx="1">
-            <a:schemeClr val="accent1"/>
-          </a:effectRef>
-          <a:fontRef idx="minor">
-            <a:schemeClr val="tx1"/>
-          </a:fontRef>
-        </p:style>
-      </p:cxnSp>
-      <p:sp>
-        <p:nvSpPr>
-          <p:cNvPr id="24" name="Rounded Rectangle 23"/>
-          <p:cNvSpPr/>
-          <p:nvPr/>
-        </p:nvSpPr>
-        <p:spPr>
-          <a:xfrm>
-            <a:off x="2691307" y="1325880"/>
-            <a:ext cx="1831771" cy="2834640"/>
-          </a:xfrm>
-          <a:prstGeom prst="roundRect">
-            <a:avLst>
-              <a:gd name="adj" fmla="val 5000"/>
-            </a:avLst>
-          </a:prstGeom>
-          <a:solidFill>
-            <a:srgbClr val="EDEFF2"/>
-          </a:solidFill>
-          <a:ln w="12700">
-            <a:solidFill>
-              <a:srgbClr val="D1980B"/>
-            </a:solidFill>
-          </a:ln>
-          <a:effectLst/>
-        </p:spPr>
-        <p:style>
-          <a:lnRef idx="1">
-            <a:schemeClr val="accent1"/>
-          </a:lnRef>
-          <a:fillRef idx="3">
-            <a:schemeClr val="accent1"/>
-          </a:fillRef>
-          <a:effectRef idx="2">
-            <a:schemeClr val="accent1"/>
-          </a:effectRef>
-          <a:fontRef idx="minor">
-            <a:schemeClr val="lt1"/>
-          </a:fontRef>
-        </p:style>
-        <p:txBody>
-          <a:bodyPr rtlCol="0" anchor="ctr"/>
-          <a:lstStyle/>
-          <a:p/>
-        </p:txBody>
-      </p:sp>
-      <p:sp>
-        <p:nvSpPr>
-          <p:cNvPr id="25" name="TextBox 24"/>
-          <p:cNvSpPr txBox="1"/>
-          <p:nvPr/>
-        </p:nvSpPr>
-        <p:spPr>
-          <a:xfrm>
-            <a:off x="2837611" y="1472184"/>
-            <a:ext cx="1539163" cy="182880"/>
-          </a:xfrm>
-          <a:prstGeom prst="rect">
-            <a:avLst/>
-          </a:prstGeom>
-          <a:noFill/>
-        </p:spPr>
-        <p:txBody>
-          <a:bodyPr wrap="square" lIns="0" rIns="0" tIns="0" bIns="0" anchor="t">
-            <a:spAutoFit/>
-          </a:bodyPr>
-          <a:lstStyle/>
-          <a:p>
-            <a:pPr algn="l"/>
-            <a:r>
-              <a:rPr sz="850" b="1" spc="80">
-                <a:solidFill>
-                  <a:srgbClr val="866103"/>
-                </a:solidFill>
-                <a:latin typeface="Consolas"/>
-              </a:rPr>
-              <a:t>02</a:t>
-            </a:r>
-            <a:r>
-              <a:rPr sz="850" b="1" spc="80">
-                <a:solidFill>
-                  <a:srgbClr val="866103"/>
-                </a:solidFill>
-                <a:latin typeface="Calibri"/>
-              </a:rPr>
-              <a:t>  OPENED</a:t>
-            </a:r>
-          </a:p>
-        </p:txBody>
-      </p:sp>
-      <p:pic>
-        <p:nvPicPr>
-          <p:cNvPr id="26" name="Picture 25" descr="entra.png"/>
-          <p:cNvPicPr>
-            <a:picLocks noChangeAspect="1"/>
-          </p:cNvPicPr>
-          <p:nvPr/>
-        </p:nvPicPr>
-        <p:blipFill>
-          <a:blip r:embed="rId5"/>
-          <a:stretch>
-            <a:fillRect/>
-          </a:stretch>
-        </p:blipFill>
-        <p:spPr>
-          <a:xfrm>
-            <a:off x="2837611" y="1735804"/>
-            <a:ext cx="310896" cy="277431"/>
-          </a:xfrm>
-          <a:prstGeom prst="rect">
-            <a:avLst/>
-          </a:prstGeom>
-        </p:spPr>
-      </p:pic>
-      <p:pic>
-        <p:nvPicPr>
-          <p:cNvPr id="27" name="Picture 26" descr="databricks.png"/>
-          <p:cNvPicPr>
-            <a:picLocks noChangeAspect="1"/>
-          </p:cNvPicPr>
-          <p:nvPr/>
-        </p:nvPicPr>
-        <p:blipFill>
-          <a:blip r:embed="rId6"/>
-          <a:stretch>
-            <a:fillRect/>
-          </a:stretch>
-        </p:blipFill>
-        <p:spPr>
-          <a:xfrm>
-            <a:off x="3449517" y="1728216"/>
-            <a:ext cx="522692" cy="292608"/>
-          </a:xfrm>
-          <a:prstGeom prst="rect">
-            <a:avLst/>
-          </a:prstGeom>
-        </p:spPr>
-      </p:pic>
-      <p:sp>
-        <p:nvSpPr>
-          <p:cNvPr id="28" name="TextBox 27"/>
-          <p:cNvSpPr txBox="1"/>
-          <p:nvPr/>
-        </p:nvSpPr>
-        <p:spPr>
-          <a:xfrm>
-            <a:off x="2837611" y="2148840"/>
-            <a:ext cx="1539163" cy="182880"/>
-          </a:xfrm>
-          <a:prstGeom prst="rect">
-            <a:avLst/>
-          </a:prstGeom>
-          <a:noFill/>
-        </p:spPr>
-        <p:txBody>
-          <a:bodyPr wrap="square" lIns="0" rIns="0" tIns="0" bIns="0" anchor="t">
-            <a:spAutoFit/>
-          </a:bodyPr>
-          <a:lstStyle/>
-          <a:p>
-            <a:pPr algn="l"/>
-            <a:r>
-              <a:rPr sz="800" b="1" spc="100">
-                <a:solidFill>
-                  <a:srgbClr val="866103"/>
-                </a:solidFill>
-                <a:latin typeface="Calibri"/>
-              </a:rPr>
-              <a:t>WHO?</a:t>
-            </a:r>
-          </a:p>
-        </p:txBody>
-      </p:sp>
-      <p:sp>
-        <p:nvSpPr>
-          <p:cNvPr id="29" name="TextBox 28"/>
-          <p:cNvSpPr txBox="1"/>
-          <p:nvPr/>
-        </p:nvSpPr>
-        <p:spPr>
-          <a:xfrm>
-            <a:off x="2837611" y="2350008"/>
-            <a:ext cx="1539163" cy="237744"/>
-          </a:xfrm>
-          <a:prstGeom prst="rect">
-            <a:avLst/>
-          </a:prstGeom>
-          <a:noFill/>
-        </p:spPr>
-        <p:txBody>
-          <a:bodyPr wrap="square" lIns="0" rIns="0" tIns="0" bIns="0" anchor="t">
-            <a:spAutoFit/>
-          </a:bodyPr>
-          <a:lstStyle/>
-          <a:p>
-            <a:pPr algn="l"/>
-            <a:r>
-              <a:rPr sz="1050" b="1">
-                <a:solidFill>
-                  <a:srgbClr val="1C2127"/>
-                </a:solidFill>
-                <a:latin typeface="Calibri"/>
-              </a:rPr>
-              <a:t>Only named BSAs</a:t>
-            </a:r>
-          </a:p>
-        </p:txBody>
-      </p:sp>
-      <p:sp>
-        <p:nvSpPr>
-          <p:cNvPr id="30" name="TextBox 29"/>
-          <p:cNvSpPr txBox="1"/>
-          <p:nvPr/>
-        </p:nvSpPr>
-        <p:spPr>
-          <a:xfrm>
-            <a:off x="2837611" y="2624328"/>
-            <a:ext cx="1539163" cy="1133856"/>
-          </a:xfrm>
-          <a:prstGeom prst="rect">
-            <a:avLst/>
-          </a:prstGeom>
-          <a:noFill/>
-        </p:spPr>
-        <p:txBody>
-          <a:bodyPr wrap="square" lIns="0" rIns="0" tIns="0" bIns="0" anchor="t">
-            <a:spAutoFit/>
-          </a:bodyPr>
-          <a:lstStyle/>
-          <a:p>
-            <a:pPr algn="l">
-              <a:lnSpc>
-                <a:spcPct val="105000"/>
-              </a:lnSpc>
-            </a:pPr>
-            <a:r>
-              <a:rPr sz="850" b="0">
-                <a:solidFill>
-                  <a:srgbClr val="2F343C"/>
-                </a:solidFill>
-                <a:latin typeface="Calibri"/>
-              </a:rPr>
-              <a:t>Only the client's BSA group — the people already allowed to read the data — can open the app. Each signs in with the company login; nothing runs, is decided or handed out without that name.</a:t>
-            </a:r>
-          </a:p>
-        </p:txBody>
-      </p:sp>
-      <p:cxnSp>
-        <p:nvCxnSpPr>
-          <p:cNvPr id="31" name="Connector 30"/>
-          <p:cNvCxnSpPr/>
-          <p:nvPr/>
-        </p:nvCxnSpPr>
-        <p:spPr>
-          <a:xfrm>
-            <a:off x="2837611" y="3776472"/>
-            <a:ext cx="1539164" cy="0"/>
-          </a:xfrm>
-          <a:prstGeom prst="line">
-            <a:avLst/>
-          </a:prstGeom>
-          <a:ln w="6350">
-            <a:solidFill>
-              <a:srgbClr val="C5CBD3"/>
-            </a:solidFill>
-          </a:ln>
-        </p:spPr>
-        <p:style>
-          <a:lnRef idx="2">
-            <a:schemeClr val="accent1"/>
-          </a:lnRef>
-          <a:fillRef idx="0">
-            <a:schemeClr val="accent1"/>
-          </a:fillRef>
-          <a:effectRef idx="1">
-            <a:schemeClr val="accent1"/>
-          </a:effectRef>
-          <a:fontRef idx="minor">
-            <a:schemeClr val="tx1"/>
-          </a:fontRef>
-        </p:style>
-      </p:cxnSp>
-      <p:sp>
-        <p:nvSpPr>
-          <p:cNvPr id="32" name="TextBox 31"/>
-          <p:cNvSpPr txBox="1"/>
-          <p:nvPr/>
-        </p:nvSpPr>
-        <p:spPr>
-          <a:xfrm>
-            <a:off x="2837611" y="3831335"/>
-            <a:ext cx="1539163" cy="274320"/>
-          </a:xfrm>
-          <a:prstGeom prst="rect">
-            <a:avLst/>
-          </a:prstGeom>
-          <a:noFill/>
-        </p:spPr>
-        <p:txBody>
-          <a:bodyPr wrap="square" lIns="0" rIns="0" tIns="0" bIns="0" anchor="t">
-            <a:spAutoFit/>
-          </a:bodyPr>
-          <a:lstStyle/>
-          <a:p>
-            <a:pPr algn="l"/>
-            <a:r>
-              <a:rPr sz="750" b="1">
-                <a:solidFill>
-                  <a:srgbClr val="866103"/>
-                </a:solidFill>
-                <a:latin typeface="Calibri"/>
-              </a:rPr>
-              <a:t>Microsoft Entra ID group · Databricks Apps</a:t>
-            </a:r>
-          </a:p>
-        </p:txBody>
-      </p:sp>
-      <p:cxnSp>
-        <p:nvCxnSpPr>
-          <p:cNvPr id="33" name="Connector 32"/>
-          <p:cNvCxnSpPr/>
-          <p:nvPr/>
-        </p:nvCxnSpPr>
-        <p:spPr>
-          <a:xfrm>
-            <a:off x="4559655" y="2743200"/>
-            <a:ext cx="237744" cy="0"/>
-          </a:xfrm>
-          <a:prstGeom prst="line">
-            <a:avLst/>
-          </a:prstGeom>
-          <a:ln w="15875">
-            <a:solidFill>
-              <a:srgbClr val="5F6B7C"/>
-            </a:solidFill>
-            <a:tailEnd type="triangle" w="sm" len="sm"/>
-          </a:ln>
-        </p:spPr>
-        <p:style>
-          <a:lnRef idx="2">
-            <a:schemeClr val="accent1"/>
-          </a:lnRef>
-          <a:fillRef idx="0">
-            <a:schemeClr val="accent1"/>
-          </a:fillRef>
-          <a:effectRef idx="1">
-            <a:schemeClr val="accent1"/>
-          </a:effectRef>
-          <a:fontRef idx="minor">
-            <a:schemeClr val="tx1"/>
-          </a:fontRef>
-        </p:style>
-      </p:cxnSp>
-      <p:sp>
-        <p:nvSpPr>
-          <p:cNvPr id="34" name="Rounded Rectangle 33"/>
-          <p:cNvSpPr/>
-          <p:nvPr/>
-        </p:nvSpPr>
-        <p:spPr>
-          <a:xfrm>
-            <a:off x="4833975" y="1325880"/>
-            <a:ext cx="1831771" cy="2834640"/>
-          </a:xfrm>
-          <a:prstGeom prst="roundRect">
-            <a:avLst>
-              <a:gd name="adj" fmla="val 5000"/>
-            </a:avLst>
-          </a:prstGeom>
-          <a:solidFill>
-            <a:srgbClr val="FBEEE8"/>
-          </a:solidFill>
-          <a:ln w="15875">
-            <a:solidFill>
-              <a:srgbClr val="D97757"/>
-            </a:solidFill>
-          </a:ln>
-          <a:effectLst/>
-        </p:spPr>
-        <p:style>
-          <a:lnRef idx="1">
-            <a:schemeClr val="accent1"/>
-          </a:lnRef>
-          <a:fillRef idx="3">
-            <a:schemeClr val="accent1"/>
-          </a:fillRef>
-          <a:effectRef idx="2">
-            <a:schemeClr val="accent1"/>
-          </a:effectRef>
-          <a:fontRef idx="minor">
-            <a:schemeClr val="lt1"/>
-          </a:fontRef>
-        </p:style>
-        <p:txBody>
-          <a:bodyPr rtlCol="0" anchor="ctr"/>
-          <a:lstStyle/>
-          <a:p/>
-        </p:txBody>
-      </p:sp>
-      <p:sp>
-        <p:nvSpPr>
-          <p:cNvPr id="35" name="TextBox 34"/>
-          <p:cNvSpPr txBox="1"/>
-          <p:nvPr/>
-        </p:nvSpPr>
-        <p:spPr>
-          <a:xfrm>
-            <a:off x="4980279" y="1472184"/>
-            <a:ext cx="1539163" cy="182880"/>
-          </a:xfrm>
-          <a:prstGeom prst="rect">
-            <a:avLst/>
-          </a:prstGeom>
-          <a:noFill/>
-        </p:spPr>
-        <p:txBody>
-          <a:bodyPr wrap="square" lIns="0" rIns="0" tIns="0" bIns="0" anchor="t">
-            <a:spAutoFit/>
-          </a:bodyPr>
-          <a:lstStyle/>
-          <a:p>
-            <a:pPr algn="l"/>
-            <a:r>
-              <a:rPr sz="850" b="1" spc="80">
-                <a:solidFill>
-                  <a:srgbClr val="A04D2C"/>
-                </a:solidFill>
-                <a:latin typeface="Consolas"/>
-              </a:rPr>
-              <a:t>03</a:t>
-            </a:r>
-            <a:r>
-              <a:rPr sz="850" b="1" spc="80">
-                <a:solidFill>
-                  <a:srgbClr val="A04D2C"/>
-                </a:solidFill>
-                <a:latin typeface="Calibri"/>
-              </a:rPr>
-              <a:t>  GENERATED</a:t>
-            </a:r>
-          </a:p>
-        </p:txBody>
-      </p:sp>
-      <p:pic>
-        <p:nvPicPr>
-          <p:cNvPr id="36" name="Picture 35" descr="claude.png"/>
-          <p:cNvPicPr>
-            <a:picLocks noChangeAspect="1"/>
-          </p:cNvPicPr>
-          <p:nvPr/>
-        </p:nvPicPr>
-        <p:blipFill>
-          <a:blip r:embed="rId7"/>
-          <a:stretch>
-            <a:fillRect/>
-          </a:stretch>
-        </p:blipFill>
-        <p:spPr>
-          <a:xfrm>
-            <a:off x="4980279" y="1779508"/>
-            <a:ext cx="868680" cy="190023"/>
-          </a:xfrm>
-          <a:prstGeom prst="rect">
-            <a:avLst/>
-          </a:prstGeom>
-        </p:spPr>
-      </p:pic>
-      <p:sp>
-        <p:nvSpPr>
-          <p:cNvPr id="37" name="TextBox 36"/>
-          <p:cNvSpPr txBox="1"/>
-          <p:nvPr/>
-        </p:nvSpPr>
-        <p:spPr>
-          <a:xfrm>
-            <a:off x="4980279" y="2148840"/>
-            <a:ext cx="1539163" cy="182880"/>
-          </a:xfrm>
-          <a:prstGeom prst="rect">
-            <a:avLst/>
-          </a:prstGeom>
-          <a:noFill/>
-        </p:spPr>
-        <p:txBody>
-          <a:bodyPr wrap="square" lIns="0" rIns="0" tIns="0" bIns="0" anchor="t">
-            <a:spAutoFit/>
-          </a:bodyPr>
-          <a:lstStyle/>
-          <a:p>
-            <a:pPr algn="l"/>
-            <a:r>
-              <a:rPr sz="800" b="1" spc="100">
-                <a:solidFill>
-                  <a:srgbClr val="A04D2C"/>
-                </a:solidFill>
-                <a:latin typeface="Calibri"/>
-              </a:rPr>
-              <a:t>WHERE FROM?</a:t>
-            </a:r>
-          </a:p>
-        </p:txBody>
-      </p:sp>
-      <p:sp>
-        <p:nvSpPr>
-          <p:cNvPr id="38" name="TextBox 37"/>
-          <p:cNvSpPr txBox="1"/>
-          <p:nvPr/>
-        </p:nvSpPr>
-        <p:spPr>
-          <a:xfrm>
-            <a:off x="4980279" y="2350008"/>
-            <a:ext cx="1539163" cy="237744"/>
-          </a:xfrm>
-          <a:prstGeom prst="rect">
-            <a:avLst/>
-          </a:prstGeom>
-          <a:noFill/>
-        </p:spPr>
-        <p:txBody>
-          <a:bodyPr wrap="square" lIns="0" rIns="0" tIns="0" bIns="0" anchor="t">
-            <a:spAutoFit/>
-          </a:bodyPr>
-          <a:lstStyle/>
-          <a:p>
-            <a:pPr algn="l"/>
-            <a:r>
-              <a:rPr sz="1050" b="1">
-                <a:solidFill>
-                  <a:srgbClr val="A04D2C"/>
-                </a:solidFill>
-                <a:latin typeface="Calibri"/>
-              </a:rPr>
-              <a:t>Every output is traceable</a:t>
-            </a:r>
-          </a:p>
-        </p:txBody>
-      </p:sp>
-      <p:sp>
-        <p:nvSpPr>
-          <p:cNvPr id="39" name="TextBox 38"/>
-          <p:cNvSpPr txBox="1"/>
-          <p:nvPr/>
-        </p:nvSpPr>
-        <p:spPr>
-          <a:xfrm>
-            <a:off x="4980279" y="2624328"/>
-            <a:ext cx="1539163" cy="1133856"/>
-          </a:xfrm>
-          <a:prstGeom prst="rect">
-            <a:avLst/>
-          </a:prstGeom>
-          <a:noFill/>
-        </p:spPr>
-        <p:txBody>
-          <a:bodyPr wrap="square" lIns="0" rIns="0" tIns="0" bIns="0" anchor="t">
-            <a:spAutoFit/>
-          </a:bodyPr>
-          <a:lstStyle/>
-          <a:p>
-            <a:pPr algn="l">
-              <a:lnSpc>
-                <a:spcPct val="105000"/>
-              </a:lnSpc>
-            </a:pPr>
-            <a:r>
-              <a:rPr sz="850" b="0">
-                <a:solidFill>
-                  <a:srgbClr val="A04D2C"/>
-                </a:solidFill>
-                <a:latin typeface="Calibri"/>
-              </a:rPr>
-              <a:t>One AI call reads the FRD — the only one. Digital fingerprints tie the workbook to the exact FRD version, to that call (which model, which instructions) and to the person who asked.</a:t>
-            </a:r>
-          </a:p>
-        </p:txBody>
-      </p:sp>
-      <p:cxnSp>
-        <p:nvCxnSpPr>
-          <p:cNvPr id="40" name="Connector 39"/>
-          <p:cNvCxnSpPr/>
-          <p:nvPr/>
-        </p:nvCxnSpPr>
-        <p:spPr>
-          <a:xfrm>
-            <a:off x="4980279" y="3776472"/>
-            <a:ext cx="1539164" cy="0"/>
-          </a:xfrm>
-          <a:prstGeom prst="line">
-            <a:avLst/>
-          </a:prstGeom>
-          <a:ln w="6350">
-            <a:solidFill>
-              <a:srgbClr val="C5CBD3"/>
-            </a:solidFill>
-          </a:ln>
-        </p:spPr>
-        <p:style>
-          <a:lnRef idx="2">
-            <a:schemeClr val="accent1"/>
-          </a:lnRef>
-          <a:fillRef idx="0">
-            <a:schemeClr val="accent1"/>
-          </a:fillRef>
-          <a:effectRef idx="1">
-            <a:schemeClr val="accent1"/>
-          </a:effectRef>
-          <a:fontRef idx="minor">
-            <a:schemeClr val="tx1"/>
-          </a:fontRef>
-        </p:style>
-      </p:cxnSp>
-      <p:sp>
-        <p:nvSpPr>
-          <p:cNvPr id="41" name="TextBox 40"/>
-          <p:cNvSpPr txBox="1"/>
-          <p:nvPr/>
-        </p:nvSpPr>
-        <p:spPr>
-          <a:xfrm>
-            <a:off x="4980279" y="3831335"/>
-            <a:ext cx="1539163" cy="274320"/>
-          </a:xfrm>
-          <a:prstGeom prst="rect">
-            <a:avLst/>
-          </a:prstGeom>
-          <a:noFill/>
-        </p:spPr>
-        <p:txBody>
-          <a:bodyPr wrap="square" lIns="0" rIns="0" tIns="0" bIns="0" anchor="t">
-            <a:spAutoFit/>
-          </a:bodyPr>
-          <a:lstStyle/>
-          <a:p>
-            <a:pPr algn="l"/>
-            <a:r>
-              <a:rPr sz="750" b="1">
-                <a:solidFill>
-                  <a:srgbClr val="A04D2C"/>
-                </a:solidFill>
-                <a:latin typeface="Calibri"/>
-              </a:rPr>
-              <a:t>SHA-256 fingerprints · run manifests</a:t>
-            </a:r>
-          </a:p>
-        </p:txBody>
-      </p:sp>
-      <p:cxnSp>
-        <p:nvCxnSpPr>
-          <p:cNvPr id="42" name="Connector 41"/>
-          <p:cNvCxnSpPr/>
-          <p:nvPr/>
-        </p:nvCxnSpPr>
-        <p:spPr>
-          <a:xfrm>
-            <a:off x="6702323" y="2743200"/>
-            <a:ext cx="237744" cy="0"/>
-          </a:xfrm>
-          <a:prstGeom prst="line">
-            <a:avLst/>
-          </a:prstGeom>
-          <a:ln w="15875">
-            <a:solidFill>
-              <a:srgbClr val="5F6B7C"/>
-            </a:solidFill>
-            <a:tailEnd type="triangle" w="sm" len="sm"/>
-          </a:ln>
-        </p:spPr>
-        <p:style>
-          <a:lnRef idx="2">
-            <a:schemeClr val="accent1"/>
-          </a:lnRef>
-          <a:fillRef idx="0">
-            <a:schemeClr val="accent1"/>
-          </a:fillRef>
-          <a:effectRef idx="1">
-            <a:schemeClr val="accent1"/>
-          </a:effectRef>
-          <a:fontRef idx="minor">
-            <a:schemeClr val="tx1"/>
-          </a:fontRef>
-        </p:style>
-      </p:cxnSp>
-      <p:sp>
-        <p:nvSpPr>
-          <p:cNvPr id="43" name="Rounded Rectangle 42"/>
-          <p:cNvSpPr/>
-          <p:nvPr/>
-        </p:nvSpPr>
-        <p:spPr>
-          <a:xfrm>
-            <a:off x="6976643" y="1325880"/>
-            <a:ext cx="1831771" cy="2834640"/>
-          </a:xfrm>
-          <a:prstGeom prst="roundRect">
-            <a:avLst>
-              <a:gd name="adj" fmla="val 5000"/>
-            </a:avLst>
-          </a:prstGeom>
-          <a:solidFill>
-            <a:srgbClr val="EDEFF2"/>
-          </a:solidFill>
-          <a:ln w="12700">
-            <a:solidFill>
-              <a:srgbClr val="D1980B"/>
-            </a:solidFill>
-          </a:ln>
-          <a:effectLst/>
-        </p:spPr>
-        <p:style>
-          <a:lnRef idx="1">
-            <a:schemeClr val="accent1"/>
-          </a:lnRef>
-          <a:fillRef idx="3">
-            <a:schemeClr val="accent1"/>
-          </a:fillRef>
-          <a:effectRef idx="2">
-            <a:schemeClr val="accent1"/>
-          </a:effectRef>
-          <a:fontRef idx="minor">
-            <a:schemeClr val="lt1"/>
-          </a:fontRef>
-        </p:style>
-        <p:txBody>
-          <a:bodyPr rtlCol="0" anchor="ctr"/>
-          <a:lstStyle/>
-          <a:p/>
-        </p:txBody>
-      </p:sp>
-      <p:sp>
-        <p:nvSpPr>
-          <p:cNvPr id="44" name="TextBox 43"/>
-          <p:cNvSpPr txBox="1"/>
-          <p:nvPr/>
-        </p:nvSpPr>
-        <p:spPr>
-          <a:xfrm>
-            <a:off x="7122947" y="1472184"/>
-            <a:ext cx="1539163" cy="182880"/>
-          </a:xfrm>
-          <a:prstGeom prst="rect">
-            <a:avLst/>
-          </a:prstGeom>
-          <a:noFill/>
-        </p:spPr>
-        <p:txBody>
-          <a:bodyPr wrap="square" lIns="0" rIns="0" tIns="0" bIns="0" anchor="t">
-            <a:spAutoFit/>
-          </a:bodyPr>
-          <a:lstStyle/>
-          <a:p>
-            <a:pPr algn="l"/>
-            <a:r>
-              <a:rPr sz="850" b="1" spc="80">
-                <a:solidFill>
-                  <a:srgbClr val="866103"/>
-                </a:solidFill>
-                <a:latin typeface="Consolas"/>
-              </a:rPr>
-              <a:t>04</a:t>
-            </a:r>
-            <a:r>
-              <a:rPr sz="850" b="1" spc="80">
-                <a:solidFill>
-                  <a:srgbClr val="866103"/>
-                </a:solidFill>
-                <a:latin typeface="Calibri"/>
-              </a:rPr>
-              <a:t>  DECIDED</a:t>
-            </a:r>
-          </a:p>
-        </p:txBody>
-      </p:sp>
-      <p:pic>
-        <p:nvPicPr>
-          <p:cNvPr id="45" name="Picture 44" descr="check.png"/>
-          <p:cNvPicPr>
-            <a:picLocks noChangeAspect="1"/>
-          </p:cNvPicPr>
-          <p:nvPr/>
-        </p:nvPicPr>
-        <p:blipFill>
-          <a:blip r:embed="rId8"/>
-          <a:stretch>
-            <a:fillRect/>
-          </a:stretch>
-        </p:blipFill>
-        <p:spPr>
-          <a:xfrm>
-            <a:off x="7122947" y="1728216"/>
-            <a:ext cx="292608" cy="292608"/>
-          </a:xfrm>
-          <a:prstGeom prst="rect">
-            <a:avLst/>
-          </a:prstGeom>
-        </p:spPr>
-      </p:pic>
-      <p:sp>
-        <p:nvSpPr>
-          <p:cNvPr id="46" name="TextBox 45"/>
-          <p:cNvSpPr txBox="1"/>
-          <p:nvPr/>
-        </p:nvSpPr>
-        <p:spPr>
-          <a:xfrm>
-            <a:off x="7122947" y="2148840"/>
-            <a:ext cx="1539163" cy="182880"/>
-          </a:xfrm>
-          <a:prstGeom prst="rect">
-            <a:avLst/>
-          </a:prstGeom>
-          <a:noFill/>
-        </p:spPr>
-        <p:txBody>
-          <a:bodyPr wrap="square" lIns="0" rIns="0" tIns="0" bIns="0" anchor="t">
-            <a:spAutoFit/>
-          </a:bodyPr>
-          <a:lstStyle/>
-          <a:p>
-            <a:pPr algn="l"/>
-            <a:r>
-              <a:rPr sz="800" b="1" spc="100">
-                <a:solidFill>
-                  <a:srgbClr val="866103"/>
-                </a:solidFill>
-                <a:latin typeface="Calibri"/>
-              </a:rPr>
-              <a:t>WHO DECIDES?</a:t>
-            </a:r>
-          </a:p>
-        </p:txBody>
-      </p:sp>
-      <p:sp>
-        <p:nvSpPr>
-          <p:cNvPr id="47" name="TextBox 46"/>
-          <p:cNvSpPr txBox="1"/>
-          <p:nvPr/>
-        </p:nvSpPr>
-        <p:spPr>
-          <a:xfrm>
-            <a:off x="7122947" y="2350008"/>
-            <a:ext cx="1539163" cy="237744"/>
-          </a:xfrm>
-          <a:prstGeom prst="rect">
-            <a:avLst/>
-          </a:prstGeom>
-          <a:noFill/>
-        </p:spPr>
-        <p:txBody>
-          <a:bodyPr wrap="square" lIns="0" rIns="0" tIns="0" bIns="0" anchor="t">
-            <a:spAutoFit/>
-          </a:bodyPr>
-          <a:lstStyle/>
-          <a:p>
-            <a:pPr algn="l"/>
-            <a:r>
-              <a:rPr sz="1050" b="1">
-                <a:solidFill>
-                  <a:srgbClr val="1C2127"/>
-                </a:solidFill>
-                <a:latin typeface="Calibri"/>
-              </a:rPr>
-              <a:t>A person decides</a:t>
-            </a:r>
-          </a:p>
-        </p:txBody>
-      </p:sp>
-      <p:sp>
-        <p:nvSpPr>
-          <p:cNvPr id="48" name="TextBox 47"/>
-          <p:cNvSpPr txBox="1"/>
-          <p:nvPr/>
-        </p:nvSpPr>
-        <p:spPr>
-          <a:xfrm>
-            <a:off x="7122947" y="2624328"/>
-            <a:ext cx="1539163" cy="1133856"/>
-          </a:xfrm>
-          <a:prstGeom prst="rect">
-            <a:avLst/>
-          </a:prstGeom>
-          <a:noFill/>
-        </p:spPr>
-        <p:txBody>
-          <a:bodyPr wrap="square" lIns="0" rIns="0" tIns="0" bIns="0" anchor="t">
-            <a:spAutoFit/>
-          </a:bodyPr>
-          <a:lstStyle/>
-          <a:p>
-            <a:pPr algn="l">
-              <a:lnSpc>
-                <a:spcPct val="105000"/>
-              </a:lnSpc>
-            </a:pPr>
-            <a:r>
-              <a:rPr sz="850" b="0">
-                <a:solidFill>
-                  <a:srgbClr val="2F343C"/>
-                </a:solidFill>
-                <a:latin typeface="Calibri"/>
-              </a:rPr>
-              <a:t>The AI only proposes. Code checks every mapping against the FRD word for word and scores it against an approved example; a named reviewer settles what is unclear, approves and uploads.</a:t>
-            </a:r>
-          </a:p>
-        </p:txBody>
-      </p:sp>
-      <p:cxnSp>
-        <p:nvCxnSpPr>
-          <p:cNvPr id="49" name="Connector 48"/>
-          <p:cNvCxnSpPr/>
-          <p:nvPr/>
-        </p:nvCxnSpPr>
-        <p:spPr>
-          <a:xfrm>
-            <a:off x="7122947" y="3776472"/>
-            <a:ext cx="1539164" cy="0"/>
-          </a:xfrm>
-          <a:prstGeom prst="line">
-            <a:avLst/>
-          </a:prstGeom>
-          <a:ln w="6350">
-            <a:solidFill>
-              <a:srgbClr val="C5CBD3"/>
-            </a:solidFill>
-          </a:ln>
-        </p:spPr>
-        <p:style>
-          <a:lnRef idx="2">
-            <a:schemeClr val="accent1"/>
-          </a:lnRef>
-          <a:fillRef idx="0">
-            <a:schemeClr val="accent1"/>
-          </a:fillRef>
-          <a:effectRef idx="1">
-            <a:schemeClr val="accent1"/>
-          </a:effectRef>
-          <a:fontRef idx="minor">
-            <a:schemeClr val="tx1"/>
-          </a:fontRef>
-        </p:style>
-      </p:cxnSp>
-      <p:sp>
-        <p:nvSpPr>
-          <p:cNvPr id="50" name="TextBox 49"/>
-          <p:cNvSpPr txBox="1"/>
-          <p:nvPr/>
-        </p:nvSpPr>
-        <p:spPr>
-          <a:xfrm>
-            <a:off x="7122947" y="3831335"/>
-            <a:ext cx="1539163" cy="274320"/>
-          </a:xfrm>
-          <a:prstGeom prst="rect">
-            <a:avLst/>
-          </a:prstGeom>
-          <a:noFill/>
-        </p:spPr>
-        <p:txBody>
-          <a:bodyPr wrap="square" lIns="0" rIns="0" tIns="0" bIns="0" anchor="t">
-            <a:spAutoFit/>
-          </a:bodyPr>
-          <a:lstStyle/>
-          <a:p>
-            <a:pPr algn="l"/>
-            <a:r>
-              <a:rPr sz="750" b="1">
-                <a:solidFill>
-                  <a:srgbClr val="866103"/>
-                </a:solidFill>
-                <a:latin typeface="Calibri"/>
-              </a:rPr>
-              <a:t>Grounding audit · golden-pair score · human-in-the-loop</a:t>
-            </a:r>
-          </a:p>
-        </p:txBody>
-      </p:sp>
-      <p:sp>
-        <p:nvSpPr>
-          <p:cNvPr id="51" name="Rounded Rectangle 50"/>
-          <p:cNvSpPr/>
-          <p:nvPr/>
-        </p:nvSpPr>
-        <p:spPr>
-          <a:xfrm>
-            <a:off x="548640" y="4361688"/>
-            <a:ext cx="8259775" cy="731520"/>
-          </a:xfrm>
-          <a:prstGeom prst="roundRect">
-            <a:avLst>
-              <a:gd name="adj" fmla="val 5000"/>
-            </a:avLst>
-          </a:prstGeom>
-          <a:solidFill>
-            <a:srgbClr val="EDEFF2"/>
-          </a:solidFill>
-          <a:ln w="12700">
-            <a:solidFill>
-              <a:srgbClr val="00A396"/>
-            </a:solidFill>
-          </a:ln>
-          <a:effectLst/>
-        </p:spPr>
-        <p:style>
-          <a:lnRef idx="1">
-            <a:schemeClr val="accent1"/>
-          </a:lnRef>
-          <a:fillRef idx="3">
-            <a:schemeClr val="accent1"/>
-          </a:fillRef>
-          <a:effectRef idx="2">
-            <a:schemeClr val="accent1"/>
-          </a:effectRef>
-          <a:fontRef idx="minor">
-            <a:schemeClr val="lt1"/>
-          </a:fontRef>
-        </p:style>
-        <p:txBody>
-          <a:bodyPr rtlCol="0" anchor="ctr"/>
-          <a:lstStyle/>
-          <a:p/>
-        </p:txBody>
-      </p:sp>
-      <p:pic>
-        <p:nvPicPr>
-          <p:cNvPr id="52" name="Picture 51" descr="shield.png"/>
-          <p:cNvPicPr>
-            <a:picLocks noChangeAspect="1"/>
-          </p:cNvPicPr>
-          <p:nvPr/>
-        </p:nvPicPr>
-        <p:blipFill>
-          <a:blip r:embed="rId9"/>
-          <a:stretch>
-            <a:fillRect/>
-          </a:stretch>
-        </p:blipFill>
-        <p:spPr>
-          <a:xfrm>
-            <a:off x="694944" y="4562855"/>
-            <a:ext cx="329184" cy="329184"/>
-          </a:xfrm>
-          <a:prstGeom prst="rect">
-            <a:avLst/>
-          </a:prstGeom>
-        </p:spPr>
-      </p:pic>
-      <p:sp>
-        <p:nvSpPr>
-          <p:cNvPr id="53" name="TextBox 52"/>
-          <p:cNvSpPr txBox="1"/>
-          <p:nvPr/>
-        </p:nvSpPr>
-        <p:spPr>
-          <a:xfrm>
-            <a:off x="1133856" y="4480559"/>
-            <a:ext cx="1828800" cy="182880"/>
-          </a:xfrm>
-          <a:prstGeom prst="rect">
-            <a:avLst/>
-          </a:prstGeom>
-          <a:noFill/>
-        </p:spPr>
-        <p:txBody>
-          <a:bodyPr wrap="square" lIns="0" rIns="0" tIns="0" bIns="0" anchor="t">
-            <a:spAutoFit/>
-          </a:bodyPr>
-          <a:lstStyle/>
-          <a:p>
-            <a:pPr algn="l"/>
-            <a:r>
-              <a:rPr sz="800" b="1" spc="100">
-                <a:solidFill>
-                  <a:srgbClr val="007067"/>
-                </a:solidFill>
-                <a:latin typeface="Calibri"/>
-              </a:rPr>
-              <a:t>WHAT HAPPENED?</a:t>
-            </a:r>
-          </a:p>
-        </p:txBody>
-      </p:sp>
-      <p:sp>
-        <p:nvSpPr>
-          <p:cNvPr id="54" name="TextBox 53"/>
-          <p:cNvSpPr txBox="1"/>
-          <p:nvPr/>
-        </p:nvSpPr>
-        <p:spPr>
-          <a:xfrm>
-            <a:off x="1133856" y="4681727"/>
-            <a:ext cx="2103120" cy="237744"/>
-          </a:xfrm>
-          <a:prstGeom prst="rect">
-            <a:avLst/>
-          </a:prstGeom>
-          <a:noFill/>
-        </p:spPr>
-        <p:txBody>
-          <a:bodyPr wrap="square" lIns="0" rIns="0" tIns="0" bIns="0" anchor="t">
-            <a:spAutoFit/>
-          </a:bodyPr>
-          <a:lstStyle/>
-          <a:p>
-            <a:pPr algn="l"/>
-            <a:r>
-              <a:rPr sz="1050" b="1">
-                <a:solidFill>
-                  <a:srgbClr val="1C2127"/>
-                </a:solidFill>
-                <a:latin typeface="Calibri"/>
-              </a:rPr>
-              <a:t>Nothing is off the record</a:t>
-            </a:r>
-          </a:p>
-        </p:txBody>
-      </p:sp>
-      <p:sp>
-        <p:nvSpPr>
-          <p:cNvPr id="55" name="TextBox 54"/>
-          <p:cNvSpPr txBox="1"/>
-          <p:nvPr/>
-        </p:nvSpPr>
-        <p:spPr>
-          <a:xfrm>
-            <a:off x="3291840" y="4489703"/>
-            <a:ext cx="5333695" cy="457200"/>
-          </a:xfrm>
-          <a:prstGeom prst="rect">
-            <a:avLst/>
-          </a:prstGeom>
-          <a:noFill/>
-        </p:spPr>
-        <p:txBody>
-          <a:bodyPr wrap="square" lIns="0" rIns="0" tIns="0" bIns="0" anchor="t">
-            <a:spAutoFit/>
-          </a:bodyPr>
-          <a:lstStyle/>
-          <a:p>
-            <a:pPr algn="l">
-              <a:lnSpc>
-                <a:spcPct val="105000"/>
-              </a:lnSpc>
-            </a:pPr>
-            <a:r>
-              <a:rPr sz="850" b="0">
-                <a:solidFill>
-                  <a:srgbClr val="2F343C"/>
-                </a:solidFill>
-                <a:latin typeface="Calibri"/>
-              </a:rPr>
-              <a:t>Every step above — each run, reviewer decision, re-render, download and sync — writes one record the moment it happens. The trail cannot be edited afterwards and reads like a table.</a:t>
-            </a:r>
-          </a:p>
-        </p:txBody>
-      </p:sp>
-      <p:sp>
-        <p:nvSpPr>
-          <p:cNvPr id="56" name="TextBox 55"/>
-          <p:cNvSpPr txBox="1"/>
-          <p:nvPr/>
-        </p:nvSpPr>
-        <p:spPr>
-          <a:xfrm>
-            <a:off x="3291840" y="4855464"/>
-            <a:ext cx="5333695" cy="182880"/>
-          </a:xfrm>
-          <a:prstGeom prst="rect">
-            <a:avLst/>
-          </a:prstGeom>
-          <a:noFill/>
-        </p:spPr>
-        <p:txBody>
-          <a:bodyPr wrap="square" lIns="0" rIns="0" tIns="0" bIns="0" anchor="t">
-            <a:spAutoFit/>
-          </a:bodyPr>
-          <a:lstStyle/>
-          <a:p>
-            <a:pPr algn="l"/>
-            <a:r>
-              <a:rPr sz="750" b="1">
-                <a:solidFill>
-                  <a:srgbClr val="007067"/>
-                </a:solidFill>
-                <a:latin typeface="Calibri"/>
-              </a:rPr>
-              <a:t>Audit trail in a Unity Catalog volume · Delta run log</a:t>
-            </a:r>
-          </a:p>
-        </p:txBody>
-      </p:sp>
-      <p:sp>
-        <p:nvSpPr>
-          <p:cNvPr id="57" name="TextBox 56"/>
-          <p:cNvSpPr txBox="1"/>
-          <p:nvPr/>
-        </p:nvSpPr>
-        <p:spPr>
-          <a:xfrm>
-            <a:off x="548640" y="5294375"/>
-            <a:ext cx="3974439" cy="658368"/>
-          </a:xfrm>
-          <a:prstGeom prst="rect">
-            <a:avLst/>
-          </a:prstGeom>
-          <a:noFill/>
-        </p:spPr>
-        <p:txBody>
-          <a:bodyPr wrap="square" lIns="0" rIns="0" tIns="0" bIns="0" anchor="t">
-            <a:spAutoFit/>
-          </a:bodyPr>
-          <a:lstStyle/>
-          <a:p>
-            <a:pPr algn="l">
-              <a:lnSpc>
-                <a:spcPct val="105000"/>
-              </a:lnSpc>
-            </a:pPr>
-            <a:r>
-              <a:rPr sz="850" b="1">
-                <a:solidFill>
-                  <a:srgbClr val="1C2127"/>
-                </a:solidFill>
-                <a:latin typeface="Calibri"/>
-              </a:rPr>
-              <a:t>Client data crosses the platform boundary in exactly two places</a:t>
-            </a:r>
-            <a:r>
-              <a:rPr sz="850" b="0">
-                <a:solidFill>
-                  <a:srgbClr val="2F343C"/>
-                </a:solidFill>
-                <a:latin typeface="Calibri"/>
-              </a:rPr>
-              <a:t> — both under the stations where they happen, both recorded.</a:t>
-            </a:r>
-          </a:p>
-        </p:txBody>
-      </p:sp>
-      <p:sp>
-        <p:nvSpPr>
-          <p:cNvPr id="58" name="Rounded Rectangle 57"/>
-          <p:cNvSpPr/>
-          <p:nvPr/>
-        </p:nvSpPr>
-        <p:spPr>
-          <a:xfrm>
-            <a:off x="4833975" y="5257799"/>
-            <a:ext cx="1831771" cy="731520"/>
-          </a:xfrm>
-          <a:prstGeom prst="roundRect">
-            <a:avLst>
-              <a:gd name="adj" fmla="val 8000"/>
-            </a:avLst>
-          </a:prstGeom>
-          <a:solidFill>
-            <a:srgbClr val="FBEEE8"/>
-          </a:solidFill>
-          <a:ln w="9525">
-            <a:solidFill>
-              <a:srgbClr val="D97757"/>
-            </a:solidFill>
-          </a:ln>
-          <a:effectLst/>
-        </p:spPr>
-        <p:style>
-          <a:lnRef idx="1">
-            <a:schemeClr val="accent1"/>
-          </a:lnRef>
-          <a:fillRef idx="3">
-            <a:schemeClr val="accent1"/>
-          </a:fillRef>
-          <a:effectRef idx="2">
-            <a:schemeClr val="accent1"/>
-          </a:effectRef>
-          <a:fontRef idx="minor">
-            <a:schemeClr val="lt1"/>
-          </a:fontRef>
-        </p:style>
-        <p:txBody>
-          <a:bodyPr rtlCol="0" anchor="ctr"/>
-          <a:lstStyle/>
-          <a:p/>
-        </p:txBody>
-      </p:sp>
-      <p:sp>
-        <p:nvSpPr>
-          <p:cNvPr id="59" name="TextBox 58"/>
-          <p:cNvSpPr txBox="1"/>
-          <p:nvPr/>
-        </p:nvSpPr>
-        <p:spPr>
-          <a:xfrm>
-            <a:off x="4943703" y="5330951"/>
-            <a:ext cx="1612315" cy="621792"/>
-          </a:xfrm>
-          <a:prstGeom prst="rect">
-            <a:avLst/>
-          </a:prstGeom>
-          <a:noFill/>
-        </p:spPr>
-        <p:txBody>
-          <a:bodyPr wrap="square" lIns="0" rIns="0" tIns="0" bIns="0" anchor="t">
-            <a:spAutoFit/>
-          </a:bodyPr>
-          <a:lstStyle/>
-          <a:p>
-            <a:pPr algn="l">
-              <a:lnSpc>
-                <a:spcPct val="104000"/>
-              </a:lnSpc>
-            </a:pPr>
-            <a:r>
-              <a:rPr sz="750" b="1">
-                <a:solidFill>
-                  <a:srgbClr val="A04D2C"/>
-                </a:solidFill>
-                <a:latin typeface="Calibri"/>
-              </a:rPr>
-              <a:t>1  FRD text → Anthropic API</a:t>
-            </a:r>
-            <a:r>
-              <a:rPr sz="750" b="0">
-                <a:solidFill>
-                  <a:srgbClr val="A04D2C"/>
-                </a:solidFill>
-                <a:latin typeface="Calibri"/>
-              </a:rPr>
-              <a:t> — API key in a Databricks secret scope; within the client's data-handling review.</a:t>
-            </a:r>
-          </a:p>
-        </p:txBody>
-      </p:sp>
-      <p:sp>
-        <p:nvSpPr>
-          <p:cNvPr id="60" name="Rounded Rectangle 59"/>
-          <p:cNvSpPr/>
-          <p:nvPr/>
-        </p:nvSpPr>
-        <p:spPr>
-          <a:xfrm>
-            <a:off x="6976643" y="5257799"/>
-            <a:ext cx="1831771" cy="731520"/>
-          </a:xfrm>
-          <a:prstGeom prst="roundRect">
-            <a:avLst>
-              <a:gd name="adj" fmla="val 8000"/>
-            </a:avLst>
-          </a:prstGeom>
-          <a:solidFill>
-            <a:srgbClr val="FBF3DC"/>
-          </a:solidFill>
-          <a:ln w="9525">
-            <a:solidFill>
-              <a:srgbClr val="D1980B"/>
-            </a:solidFill>
-          </a:ln>
-          <a:effectLst/>
-        </p:spPr>
-        <p:style>
-          <a:lnRef idx="1">
-            <a:schemeClr val="accent1"/>
-          </a:lnRef>
-          <a:fillRef idx="3">
-            <a:schemeClr val="accent1"/>
-          </a:fillRef>
-          <a:effectRef idx="2">
-            <a:schemeClr val="accent1"/>
-          </a:effectRef>
-          <a:fontRef idx="minor">
-            <a:schemeClr val="lt1"/>
-          </a:fontRef>
-        </p:style>
-        <p:txBody>
-          <a:bodyPr rtlCol="0" anchor="ctr"/>
-          <a:lstStyle/>
-          <a:p/>
-        </p:txBody>
-      </p:sp>
-      <p:sp>
-        <p:nvSpPr>
-          <p:cNvPr id="61" name="TextBox 60"/>
-          <p:cNvSpPr txBox="1"/>
-          <p:nvPr/>
-        </p:nvSpPr>
-        <p:spPr>
-          <a:xfrm>
-            <a:off x="7086371" y="5330951"/>
-            <a:ext cx="1612315" cy="621792"/>
-          </a:xfrm>
-          <a:prstGeom prst="rect">
-            <a:avLst/>
-          </a:prstGeom>
-          <a:noFill/>
-        </p:spPr>
-        <p:txBody>
-          <a:bodyPr wrap="square" lIns="0" rIns="0" tIns="0" bIns="0" anchor="t">
-            <a:spAutoFit/>
-          </a:bodyPr>
-          <a:lstStyle/>
-          <a:p>
-            <a:pPr algn="l">
-              <a:lnSpc>
-                <a:spcPct val="104000"/>
-              </a:lnSpc>
-            </a:pPr>
-            <a:r>
-              <a:rPr sz="750" b="1">
-                <a:solidFill>
-                  <a:srgbClr val="866103"/>
-                </a:solidFill>
-                <a:latin typeface="Calibri"/>
-              </a:rPr>
-              <a:t>2  workbook → a named person</a:t>
-            </a:r>
-            <a:r>
-              <a:rPr sz="750" b="0">
-                <a:solidFill>
-                  <a:srgbClr val="866103"/>
-                </a:solidFill>
-                <a:latin typeface="Calibri"/>
-              </a:rPr>
-              <a:t> — the download is recorded with the file's fingerprint; the agent never writes to SharePoint.</a:t>
-            </a:r>
-          </a:p>
-        </p:txBody>
-      </p:sp>
-      <p:sp>
-        <p:nvSpPr>
-          <p:cNvPr id="62" name="Rounded Rectangle 61"/>
-          <p:cNvSpPr/>
-          <p:nvPr/>
-        </p:nvSpPr>
-        <p:spPr>
-          <a:xfrm>
-            <a:off x="9265615" y="1325880"/>
-            <a:ext cx="2377440" cy="4663440"/>
-          </a:xfrm>
-          <a:prstGeom prst="roundRect">
-            <a:avLst>
-              <a:gd name="adj" fmla="val 4000"/>
-            </a:avLst>
-          </a:prstGeom>
-          <a:solidFill>
-            <a:srgbClr val="F6F7F9"/>
-          </a:solidFill>
-          <a:ln w="15875">
-            <a:solidFill>
-              <a:srgbClr val="7961DB"/>
-            </a:solidFill>
-          </a:ln>
-          <a:effectLst/>
-        </p:spPr>
-        <p:style>
-          <a:lnRef idx="1">
-            <a:schemeClr val="accent1"/>
-          </a:lnRef>
-          <a:fillRef idx="3">
-            <a:schemeClr val="accent1"/>
-          </a:fillRef>
-          <a:effectRef idx="2">
-            <a:schemeClr val="accent1"/>
-          </a:effectRef>
-          <a:fontRef idx="minor">
-            <a:schemeClr val="lt1"/>
-          </a:fontRef>
-        </p:style>
-        <p:txBody>
-          <a:bodyPr rtlCol="0" anchor="ctr"/>
-          <a:lstStyle/>
-          <a:p/>
-        </p:txBody>
-      </p:sp>
-      <p:sp>
-        <p:nvSpPr>
-          <p:cNvPr id="63" name="TextBox 62"/>
-          <p:cNvSpPr txBox="1"/>
-          <p:nvPr/>
-        </p:nvSpPr>
-        <p:spPr>
-          <a:xfrm>
-            <a:off x="9265615" y="1088136"/>
-            <a:ext cx="2377440" cy="201168"/>
-          </a:xfrm>
-          <a:prstGeom prst="rect">
-            <a:avLst/>
-          </a:prstGeom>
-          <a:noFill/>
-        </p:spPr>
-        <p:txBody>
-          <a:bodyPr wrap="square" lIns="0" rIns="0" tIns="0" bIns="0" anchor="t">
-            <a:spAutoFit/>
-          </a:bodyPr>
-          <a:lstStyle/>
-          <a:p>
-            <a:pPr algn="l"/>
-            <a:r>
-              <a:rPr sz="900" b="1" spc="140">
-                <a:solidFill>
-                  <a:srgbClr val="5642A6"/>
-                </a:solidFill>
-                <a:latin typeface="Calibri"/>
-              </a:rPr>
-              <a:t>→  REGISTERED IN</a:t>
-            </a:r>
-          </a:p>
-        </p:txBody>
-      </p:sp>
-      <p:pic>
-        <p:nvPicPr>
-          <p:cNvPr id="64" name="Picture 63" descr="collibra.png"/>
-          <p:cNvPicPr>
-            <a:picLocks noChangeAspect="1"/>
-          </p:cNvPicPr>
-          <p:nvPr/>
-        </p:nvPicPr>
-        <p:blipFill>
-          <a:blip r:embed="rId10"/>
-          <a:stretch>
-            <a:fillRect/>
-          </a:stretch>
-        </p:blipFill>
-        <p:spPr>
-          <a:xfrm>
-            <a:off x="9494215" y="1601390"/>
-            <a:ext cx="1920240" cy="454818"/>
-          </a:xfrm>
-          <a:prstGeom prst="rect">
-            <a:avLst/>
-          </a:prstGeom>
-        </p:spPr>
-      </p:pic>
-      <p:sp>
-        <p:nvSpPr>
-          <p:cNvPr id="65" name="TextBox 64"/>
-          <p:cNvSpPr txBox="1"/>
-          <p:nvPr/>
-        </p:nvSpPr>
-        <p:spPr>
-          <a:xfrm>
-            <a:off x="9494215" y="2167128"/>
-            <a:ext cx="1920240" cy="201168"/>
-          </a:xfrm>
-          <a:prstGeom prst="rect">
-            <a:avLst/>
-          </a:prstGeom>
-          <a:noFill/>
-        </p:spPr>
-        <p:txBody>
-          <a:bodyPr wrap="square" lIns="0" rIns="0" tIns="0" bIns="0" anchor="t">
-            <a:spAutoFit/>
-          </a:bodyPr>
-          <a:lstStyle/>
-          <a:p>
-            <a:pPr algn="l"/>
-            <a:r>
-              <a:rPr sz="800" b="1" spc="100">
-                <a:solidFill>
-                  <a:srgbClr val="5642A6"/>
-                </a:solidFill>
-                <a:latin typeface="Calibri"/>
-              </a:rPr>
-              <a:t>GOVERNANCE REGISTER</a:t>
-            </a:r>
-          </a:p>
-        </p:txBody>
-      </p:sp>
-      <p:sp>
-        <p:nvSpPr>
-          <p:cNvPr id="66" name="TextBox 65"/>
-          <p:cNvSpPr txBox="1"/>
-          <p:nvPr/>
-        </p:nvSpPr>
-        <p:spPr>
-          <a:xfrm>
-            <a:off x="9494215" y="2404872"/>
-            <a:ext cx="1920240" cy="1737360"/>
-          </a:xfrm>
-          <a:prstGeom prst="rect">
-            <a:avLst/>
-          </a:prstGeom>
-          <a:noFill/>
-        </p:spPr>
-        <p:txBody>
-          <a:bodyPr wrap="square" lIns="0" rIns="0" tIns="0" bIns="0" anchor="t">
-            <a:spAutoFit/>
-          </a:bodyPr>
-          <a:lstStyle/>
-          <a:p>
-            <a:pPr algn="l">
-              <a:lnSpc>
-                <a:spcPct val="106000"/>
-              </a:lnSpc>
-            </a:pPr>
-            <a:r>
-              <a:rPr sz="900" b="0">
-                <a:solidFill>
-                  <a:srgbClr val="2F343C"/>
-                </a:solidFill>
-                <a:latin typeface="Calibri"/>
-              </a:rPr>
-              <a:t>The client's data-governance catalog. The agent is registered here as an </a:t>
-            </a:r>
-            <a:r>
-              <a:rPr sz="900" b="1">
-                <a:solidFill>
-                  <a:srgbClr val="1C2127"/>
-                </a:solidFill>
-                <a:latin typeface="Calibri"/>
-              </a:rPr>
-              <a:t>AI asset</a:t>
-            </a:r>
-            <a:r>
-              <a:rPr sz="900" b="0">
-                <a:solidFill>
-                  <a:srgbClr val="2F343C"/>
-                </a:solidFill>
-                <a:latin typeface="Calibri"/>
-              </a:rPr>
-              <a:t>: what it is for, who owns and stewards it, how risky it is, the data it reads and writes, where that data flows, and the controls to the left — one place to answer "what is this agent, and is it under control?"</a:t>
-            </a:r>
-          </a:p>
-        </p:txBody>
-      </p:sp>
-      <p:sp>
-        <p:nvSpPr>
-          <p:cNvPr id="67" name="Rounded Rectangle 66"/>
-          <p:cNvSpPr/>
-          <p:nvPr/>
-        </p:nvSpPr>
-        <p:spPr>
-          <a:xfrm>
-            <a:off x="9494215" y="4297680"/>
-            <a:ext cx="1920240" cy="1463039"/>
-          </a:xfrm>
-          <a:prstGeom prst="roundRect">
-            <a:avLst>
-              <a:gd name="adj" fmla="val 8000"/>
-            </a:avLst>
-          </a:prstGeom>
-          <a:solidFill>
-            <a:srgbClr val="EDEFF2"/>
-          </a:solidFill>
-          <a:ln w="9525">
-            <a:solidFill>
-              <a:srgbClr val="C5CBD3"/>
-            </a:solidFill>
-          </a:ln>
-          <a:effectLst/>
-        </p:spPr>
-        <p:style>
-          <a:lnRef idx="1">
-            <a:schemeClr val="accent1"/>
-          </a:lnRef>
-          <a:fillRef idx="3">
-            <a:schemeClr val="accent1"/>
-          </a:fillRef>
-          <a:effectRef idx="2">
-            <a:schemeClr val="accent1"/>
-          </a:effectRef>
-          <a:fontRef idx="minor">
-            <a:schemeClr val="lt1"/>
-          </a:fontRef>
-        </p:style>
-        <p:txBody>
-          <a:bodyPr rtlCol="0" anchor="ctr"/>
-          <a:lstStyle/>
-          <a:p/>
-        </p:txBody>
-      </p:sp>
-      <p:pic>
-        <p:nvPicPr>
-          <p:cNvPr id="68" name="Picture 67" descr="unitycatalog.png"/>
-          <p:cNvPicPr>
-            <a:picLocks noChangeAspect="1"/>
-          </p:cNvPicPr>
-          <p:nvPr/>
-        </p:nvPicPr>
-        <p:blipFill>
-          <a:blip r:embed="rId4"/>
-          <a:stretch>
-            <a:fillRect/>
-          </a:stretch>
-        </p:blipFill>
-        <p:spPr>
-          <a:xfrm>
-            <a:off x="9679817" y="4425696"/>
-            <a:ext cx="908955" cy="310896"/>
-          </a:xfrm>
-          <a:prstGeom prst="rect">
-            <a:avLst/>
-          </a:prstGeom>
-        </p:spPr>
-      </p:pic>
-      <p:cxnSp>
-        <p:nvCxnSpPr>
-          <p:cNvPr id="69" name="Connector 68"/>
-          <p:cNvCxnSpPr/>
-          <p:nvPr/>
-        </p:nvCxnSpPr>
-        <p:spPr>
-          <a:xfrm>
-            <a:off x="10710367" y="4581144"/>
-            <a:ext cx="256032" cy="0"/>
-          </a:xfrm>
-          <a:prstGeom prst="line">
-            <a:avLst/>
-          </a:prstGeom>
-          <a:ln w="15875">
-            <a:solidFill>
-              <a:srgbClr val="7961DB"/>
-            </a:solidFill>
-            <a:tailEnd type="triangle" w="sm" len="sm"/>
-          </a:ln>
-        </p:spPr>
-        <p:style>
-          <a:lnRef idx="2">
-            <a:schemeClr val="accent1"/>
-          </a:lnRef>
-          <a:fillRef idx="0">
-            <a:schemeClr val="accent1"/>
-          </a:fillRef>
-          <a:effectRef idx="1">
-            <a:schemeClr val="accent1"/>
-          </a:effectRef>
-          <a:fontRef idx="minor">
-            <a:schemeClr val="tx1"/>
-          </a:fontRef>
-        </p:style>
-      </p:cxnSp>
-      <p:sp>
-        <p:nvSpPr>
-          <p:cNvPr id="70" name="TextBox 69"/>
-          <p:cNvSpPr txBox="1"/>
-          <p:nvPr/>
-        </p:nvSpPr>
-        <p:spPr>
-          <a:xfrm>
-            <a:off x="9631375" y="4828032"/>
-            <a:ext cx="1645920" cy="868679"/>
-          </a:xfrm>
-          <a:prstGeom prst="rect">
-            <a:avLst/>
-          </a:prstGeom>
-          <a:noFill/>
-        </p:spPr>
-        <p:txBody>
-          <a:bodyPr wrap="square" lIns="0" rIns="0" tIns="0" bIns="0" anchor="t">
-            <a:spAutoFit/>
-          </a:bodyPr>
-          <a:lstStyle/>
-          <a:p>
-            <a:pPr algn="l">
-              <a:lnSpc>
-                <a:spcPct val="104000"/>
-              </a:lnSpc>
-            </a:pPr>
-            <a:r>
-              <a:rPr sz="850" b="1">
-                <a:solidFill>
-                  <a:srgbClr val="1C2127"/>
-                </a:solidFill>
-                <a:latin typeface="Calibri"/>
-              </a:rPr>
-              <a:t>Collibra harvests Unity Catalog</a:t>
-            </a:r>
-            <a:r>
-              <a:rPr sz="850" b="0">
-                <a:solidFill>
-                  <a:srgbClr val="2F343C"/>
-                </a:solidFill>
-                <a:latin typeface="Calibri"/>
-              </a:rPr>
-              <a:t> — owners, sensitivity and descriptions set in Databricks appear here automatically. Classified once, visible in both.</a:t>
-            </a:r>
-          </a:p>
-        </p:txBody>
-      </p:sp>
-      <p:cxnSp>
-        <p:nvCxnSpPr>
-          <p:cNvPr id="71" name="Connector 70"/>
-          <p:cNvCxnSpPr/>
-          <p:nvPr/>
-        </p:nvCxnSpPr>
-        <p:spPr>
-          <a:xfrm>
-            <a:off x="8881567" y="2743200"/>
-            <a:ext cx="310896" cy="0"/>
-          </a:xfrm>
-          <a:prstGeom prst="line">
-            <a:avLst/>
-          </a:prstGeom>
-          <a:ln w="22225">
-            <a:solidFill>
-              <a:srgbClr val="7961DB"/>
-            </a:solidFill>
-            <a:tailEnd type="triangle" w="sm" len="sm"/>
-          </a:ln>
-        </p:spPr>
-        <p:style>
-          <a:lnRef idx="2">
-            <a:schemeClr val="accent1"/>
-          </a:lnRef>
-          <a:fillRef idx="0">
-            <a:schemeClr val="accent1"/>
-          </a:fillRef>
-          <a:effectRef idx="1">
-            <a:schemeClr val="accent1"/>
-          </a:effectRef>
-          <a:fontRef idx="minor">
-            <a:schemeClr val="tx1"/>
-          </a:fontRef>
-        </p:style>
-      </p:cxnSp>
-      <p:cxnSp>
-        <p:nvCxnSpPr>
-          <p:cNvPr id="72" name="Connector 71"/>
-          <p:cNvCxnSpPr/>
-          <p:nvPr/>
-        </p:nvCxnSpPr>
-        <p:spPr>
-          <a:xfrm>
-            <a:off x="8881567" y="4727448"/>
-            <a:ext cx="310896" cy="0"/>
-          </a:xfrm>
-          <a:prstGeom prst="line">
-            <a:avLst/>
-          </a:prstGeom>
-          <a:ln w="22225">
-            <a:solidFill>
-              <a:srgbClr val="7961DB"/>
-            </a:solidFill>
-            <a:tailEnd type="triangle" w="sm" len="sm"/>
-          </a:ln>
-        </p:spPr>
-        <p:style>
-          <a:lnRef idx="2">
-            <a:schemeClr val="accent1"/>
-          </a:lnRef>
-          <a:fillRef idx="0">
-            <a:schemeClr val="accent1"/>
-          </a:fillRef>
-          <a:effectRef idx="1">
-            <a:schemeClr val="accent1"/>
-          </a:effectRef>
-          <a:fontRef idx="minor">
-            <a:schemeClr val="tx1"/>
-          </a:fontRef>
-        </p:style>
-      </p:cxnSp>
-      <p:sp>
-        <p:nvSpPr>
-          <p:cNvPr id="73" name="TextBox 72"/>
-          <p:cNvSpPr txBox="1"/>
-          <p:nvPr/>
-        </p:nvSpPr>
-        <p:spPr>
-          <a:xfrm>
-            <a:off x="548640" y="6510528"/>
-            <a:ext cx="8595360" cy="274320"/>
-          </a:xfrm>
-          <a:prstGeom prst="rect">
-            <a:avLst/>
-          </a:prstGeom>
-          <a:noFill/>
-        </p:spPr>
-        <p:txBody>
-          <a:bodyPr wrap="square" lIns="0" rIns="0" tIns="0" bIns="0" anchor="t">
-            <a:spAutoFit/>
-          </a:bodyPr>
-          <a:lstStyle/>
-          <a:p>
-            <a:pPr algn="l"/>
-            <a:r>
-              <a:rPr sz="1100" b="1">
-                <a:solidFill>
-                  <a:srgbClr val="007067"/>
-                </a:solidFill>
-                <a:latin typeface="Calibri"/>
-              </a:rPr>
-              <a:t>classified data</a:t>
-            </a:r>
-            <a:r>
-              <a:rPr sz="1100" b="0">
-                <a:solidFill>
-                  <a:srgbClr val="C5CBD3"/>
-                </a:solidFill>
-                <a:latin typeface="Calibri"/>
-              </a:rPr>
-              <a:t>   ·   </a:t>
-            </a:r>
-            <a:r>
-              <a:rPr sz="1100" b="1">
-                <a:solidFill>
-                  <a:srgbClr val="866103"/>
-                </a:solidFill>
-                <a:latin typeface="Calibri"/>
-              </a:rPr>
-              <a:t>named people</a:t>
-            </a:r>
-            <a:r>
-              <a:rPr sz="1100" b="0">
-                <a:solidFill>
-                  <a:srgbClr val="C5CBD3"/>
-                </a:solidFill>
-                <a:latin typeface="Calibri"/>
-              </a:rPr>
-              <a:t>   ·   </a:t>
-            </a:r>
-            <a:r>
-              <a:rPr sz="1100" b="1">
-                <a:solidFill>
-                  <a:srgbClr val="007067"/>
-                </a:solidFill>
-                <a:latin typeface="Calibri"/>
-              </a:rPr>
-              <a:t>traceable outputs</a:t>
-            </a:r>
-            <a:r>
-              <a:rPr sz="1100" b="0">
-                <a:solidFill>
-                  <a:srgbClr val="C5CBD3"/>
-                </a:solidFill>
-                <a:latin typeface="Calibri"/>
-              </a:rPr>
-              <a:t>   ·   </a:t>
-            </a:r>
-            <a:r>
-              <a:rPr sz="1100" b="1">
-                <a:solidFill>
-                  <a:srgbClr val="866103"/>
-                </a:solidFill>
-                <a:latin typeface="Calibri"/>
-              </a:rPr>
-              <a:t>a person decides</a:t>
-            </a:r>
-            <a:r>
-              <a:rPr sz="1100" b="0">
-                <a:solidFill>
-                  <a:srgbClr val="C5CBD3"/>
-                </a:solidFill>
-                <a:latin typeface="Calibri"/>
-              </a:rPr>
-              <a:t>   ·   </a:t>
-            </a:r>
-            <a:r>
-              <a:rPr sz="1100" b="1">
-                <a:solidFill>
-                  <a:srgbClr val="007067"/>
-                </a:solidFill>
-                <a:latin typeface="Calibri"/>
-              </a:rPr>
-              <a:t>a record of everything</a:t>
-            </a:r>
-          </a:p>
-        </p:txBody>
-      </p:sp>
-      <p:sp>
-        <p:nvSpPr>
-          <p:cNvPr id="74" name="Rounded Rectangle 73"/>
-          <p:cNvSpPr/>
-          <p:nvPr/>
-        </p:nvSpPr>
-        <p:spPr>
-          <a:xfrm>
-            <a:off x="7345375" y="6492240"/>
-            <a:ext cx="4297680" cy="274320"/>
-          </a:xfrm>
-          <a:prstGeom prst="roundRect">
-            <a:avLst>
-              <a:gd name="adj" fmla="val 50000"/>
-            </a:avLst>
-          </a:prstGeom>
-          <a:noFill/>
-          <a:ln w="12700">
-            <a:solidFill>
-              <a:srgbClr val="C5CBD3"/>
-            </a:solidFill>
-          </a:ln>
-          <a:effectLst/>
-        </p:spPr>
-        <p:style>
-          <a:lnRef idx="1">
-            <a:schemeClr val="accent1"/>
-          </a:lnRef>
-          <a:fillRef idx="3">
-            <a:schemeClr val="accent1"/>
-          </a:fillRef>
-          <a:effectRef idx="2">
-            <a:schemeClr val="accent1"/>
-          </a:effectRef>
-          <a:fontRef idx="minor">
-            <a:schemeClr val="lt1"/>
-          </a:fontRef>
-        </p:style>
-        <p:txBody>
-          <a:bodyPr rtlCol="0" anchor="ctr"/>
-          <a:lstStyle/>
-          <a:p/>
-        </p:txBody>
-      </p:sp>
-      <p:sp>
-        <p:nvSpPr>
-          <p:cNvPr id="75" name="TextBox 74"/>
-          <p:cNvSpPr txBox="1"/>
-          <p:nvPr/>
-        </p:nvSpPr>
-        <p:spPr>
-          <a:xfrm>
-            <a:off x="7345375" y="6556248"/>
-            <a:ext cx="4297680" cy="182880"/>
-          </a:xfrm>
-          <a:prstGeom prst="rect">
-            <a:avLst/>
-          </a:prstGeom>
-          <a:noFill/>
-        </p:spPr>
-        <p:txBody>
-          <a:bodyPr wrap="square" lIns="0" rIns="0" tIns="0" bIns="0" anchor="t">
-            <a:spAutoFit/>
-          </a:bodyPr>
-          <a:lstStyle/>
-          <a:p>
-            <a:pPr algn="ctr"/>
-            <a:r>
-              <a:rPr sz="800" b="1" spc="100">
-                <a:solidFill>
-                  <a:srgbClr val="5F6B7C"/>
-                </a:solidFill>
-                <a:latin typeface="Calibri"/>
+            <a:pPr algn="r"/>
+            <a:r>
+              <a:rPr sz="720" b="1" spc="90">
+                <a:solidFill>
+                  <a:srgbClr val="455560"/>
+                </a:solidFill>
+                <a:latin typeface="Segoe UI"/>
               </a:rPr>
               <a:t>CONTROLS BUILT 2026-08-23 · COLLIBRA ENTRY PENDING</a:t>
             </a:r>

--- a/context/FRD-to-STTM-Agent-Data-Governance-Architecture.pptx
+++ b/context/FRD-to-STTM-Agent-Data-Governance-Architecture.pptx
@@ -4012,7 +4012,7 @@
                 </a:solidFill>
                 <a:latin typeface="Segoe UI"/>
               </a:rPr>
-              <a:t>Two documents per feed — the FRD and the vendor data dictionary — land in Unity Catalog, where every folder and table carries an owner, a steward, its sensitivity, its source and its retention rule. The standards are config in the agent, not a document.</a:t>
+              <a:t>Two documents per feed — the FRD and the vendor data dictionary — land in frd_raw and vdd_raw, where every folder and table carries an owner, a steward, its sensitivity, its source and its retention rule. The standards and the column vocabulary are config inside the agent, not documents anyone hands over.</a:t>
             </a:r>
           </a:p>
         </p:txBody>

--- a/context/FRD-to-STTM-Agent-Data-Governance-Architecture.pptx
+++ b/context/FRD-to-STTM-Agent-Data-Governance-Architecture.pptx
@@ -4012,7 +4012,7 @@
                 </a:solidFill>
                 <a:latin typeface="Segoe UI"/>
               </a:rPr>
-              <a:t>Two documents per feed — the FRD and the vendor data dictionary — land in frd_raw and vdd_raw, where every folder and table carries an owner, a steward, its sensitivity, its source and its retention rule. The standards and the column vocabulary are config inside the agent, not documents anyone hands over.</a:t>
+              <a:t>Two documents per source — the FRD and the vendor data dictionary — land in frd_raw and vdd_raw, where every folder and table carries an owner, a steward, its sensitivity, its source and its retention rule. The standards and the column vocabulary are config inside the agent, not documents anyone hands over.</a:t>
             </a:r>
           </a:p>
         </p:txBody>
